--- a/power_point/Day3.pptx
+++ b/power_point/Day3.pptx
@@ -5,7 +5,7 @@
     <p:sldMasterId id="2147483684" r:id="rId1"/>
   </p:sldMasterIdLst>
   <p:notesMasterIdLst>
-    <p:notesMasterId r:id="rId19"/>
+    <p:notesMasterId r:id="rId23"/>
   </p:notesMasterIdLst>
   <p:sldIdLst>
     <p:sldId id="256" r:id="rId2"/>
@@ -13,18 +13,22 @@
     <p:sldId id="257" r:id="rId4"/>
     <p:sldId id="290" r:id="rId5"/>
     <p:sldId id="291" r:id="rId6"/>
-    <p:sldId id="292" r:id="rId7"/>
-    <p:sldId id="297" r:id="rId8"/>
-    <p:sldId id="295" r:id="rId9"/>
-    <p:sldId id="298" r:id="rId10"/>
-    <p:sldId id="299" r:id="rId11"/>
-    <p:sldId id="300" r:id="rId12"/>
-    <p:sldId id="301" r:id="rId13"/>
-    <p:sldId id="302" r:id="rId14"/>
-    <p:sldId id="294" r:id="rId15"/>
-    <p:sldId id="303" r:id="rId16"/>
-    <p:sldId id="304" r:id="rId17"/>
-    <p:sldId id="305" r:id="rId18"/>
+    <p:sldId id="306" r:id="rId7"/>
+    <p:sldId id="307" r:id="rId8"/>
+    <p:sldId id="308" r:id="rId9"/>
+    <p:sldId id="309" r:id="rId10"/>
+    <p:sldId id="292" r:id="rId11"/>
+    <p:sldId id="297" r:id="rId12"/>
+    <p:sldId id="295" r:id="rId13"/>
+    <p:sldId id="298" r:id="rId14"/>
+    <p:sldId id="299" r:id="rId15"/>
+    <p:sldId id="300" r:id="rId16"/>
+    <p:sldId id="301" r:id="rId17"/>
+    <p:sldId id="302" r:id="rId18"/>
+    <p:sldId id="294" r:id="rId19"/>
+    <p:sldId id="303" r:id="rId20"/>
+    <p:sldId id="304" r:id="rId21"/>
+    <p:sldId id="305" r:id="rId22"/>
   </p:sldIdLst>
   <p:sldSz cx="12192000" cy="6858000"/>
   <p:notesSz cx="6858000" cy="9144000"/>
@@ -213,7 +217,7 @@
           <a:p>
             <a:fld id="{AD06BF8C-4158-F342-8216-E1A8A29CF1BB}" type="datetimeFigureOut">
               <a:rPr lang="en-GB" smtClean="0"/>
-              <a:t>08/10/2026</a:t>
+              <a:t>15/10/2026</a:t>
             </a:fld>
             <a:endParaRPr lang="en-GB"/>
           </a:p>
@@ -611,7 +615,7 @@
           <a:p>
             <a:fld id="{DE396E4B-6C64-E643-9A0A-AB5E13C2F5FA}" type="datetime1">
               <a:rPr lang="it-IT" smtClean="0"/>
-              <a:t>08/10/26</a:t>
+              <a:t>15/10/26</a:t>
             </a:fld>
             <a:endParaRPr lang="en-GB"/>
           </a:p>
@@ -784,7 +788,7 @@
           <a:p>
             <a:fld id="{31B09858-3BFB-DA41-A1A7-0A2A32E9793F}" type="datetime1">
               <a:rPr lang="it-IT" smtClean="0"/>
-              <a:t>08/10/26</a:t>
+              <a:t>15/10/26</a:t>
             </a:fld>
             <a:endParaRPr lang="en-GB"/>
           </a:p>
@@ -967,7 +971,7 @@
           <a:p>
             <a:fld id="{2C58458F-C659-9242-908F-36A06BB8B093}" type="datetime1">
               <a:rPr lang="it-IT" smtClean="0"/>
-              <a:t>08/10/26</a:t>
+              <a:t>15/10/26</a:t>
             </a:fld>
             <a:endParaRPr lang="en-GB"/>
           </a:p>
@@ -1140,7 +1144,7 @@
           <a:p>
             <a:fld id="{761DFEEA-1162-B343-ACBF-B3E92F6AC390}" type="datetime1">
               <a:rPr lang="it-IT" smtClean="0"/>
-              <a:t>08/10/26</a:t>
+              <a:t>15/10/26</a:t>
             </a:fld>
             <a:endParaRPr lang="en-GB"/>
           </a:p>
@@ -1389,7 +1393,7 @@
           <a:p>
             <a:fld id="{449ECE03-5904-2640-B404-A3FEAB598526}" type="datetime1">
               <a:rPr lang="it-IT" smtClean="0"/>
-              <a:t>08/10/26</a:t>
+              <a:t>15/10/26</a:t>
             </a:fld>
             <a:endParaRPr lang="en-GB"/>
           </a:p>
@@ -1624,7 +1628,7 @@
           <a:p>
             <a:fld id="{60BAE46A-96B1-BD4E-91A6-BD8913D3E1E1}" type="datetime1">
               <a:rPr lang="it-IT" smtClean="0"/>
-              <a:t>08/10/26</a:t>
+              <a:t>15/10/26</a:t>
             </a:fld>
             <a:endParaRPr lang="en-GB"/>
           </a:p>
@@ -1994,7 +1998,7 @@
           <a:p>
             <a:fld id="{9BACEE35-98CA-3449-A912-39DDE1219E25}" type="datetime1">
               <a:rPr lang="it-IT" smtClean="0"/>
-              <a:t>08/10/26</a:t>
+              <a:t>15/10/26</a:t>
             </a:fld>
             <a:endParaRPr lang="en-GB"/>
           </a:p>
@@ -2115,7 +2119,7 @@
           <a:p>
             <a:fld id="{5953B74D-CC1D-D544-8CB0-DB12C3D1744A}" type="datetime1">
               <a:rPr lang="it-IT" smtClean="0"/>
-              <a:t>08/10/26</a:t>
+              <a:t>15/10/26</a:t>
             </a:fld>
             <a:endParaRPr lang="en-GB"/>
           </a:p>
@@ -2213,7 +2217,7 @@
           <a:p>
             <a:fld id="{77398775-032D-C849-B9B0-C1D11ED802C1}" type="datetime1">
               <a:rPr lang="it-IT" smtClean="0"/>
-              <a:t>08/10/26</a:t>
+              <a:t>15/10/26</a:t>
             </a:fld>
             <a:endParaRPr lang="en-GB"/>
           </a:p>
@@ -2493,7 +2497,7 @@
           <a:p>
             <a:fld id="{28DD5ADB-7CE0-804E-9C85-40A519507F1A}" type="datetime1">
               <a:rPr lang="it-IT" smtClean="0"/>
-              <a:t>08/10/26</a:t>
+              <a:t>15/10/26</a:t>
             </a:fld>
             <a:endParaRPr lang="en-GB"/>
           </a:p>
@@ -2753,7 +2757,7 @@
           <a:p>
             <a:fld id="{D404C8A3-CA6B-DB4B-8A18-5294010BD3CB}" type="datetime1">
               <a:rPr lang="it-IT" smtClean="0"/>
-              <a:t>08/10/26</a:t>
+              <a:t>15/10/26</a:t>
             </a:fld>
             <a:endParaRPr lang="en-GB"/>
           </a:p>
@@ -2969,7 +2973,7 @@
           <a:p>
             <a:fld id="{01A1503F-4B7A-6348-924A-FFD23680AA8F}" type="datetime1">
               <a:rPr lang="it-IT" smtClean="0"/>
-              <a:t>08/10/26</a:t>
+              <a:t>15/10/26</a:t>
             </a:fld>
             <a:endParaRPr lang="en-GB"/>
           </a:p>
@@ -3430,7 +3434,7 @@
           <a:p>
             <a:fld id="{220AD085-7898-BE4F-A67D-B59B606A6206}" type="datetime1">
               <a:rPr lang="it-IT" smtClean="0"/>
-              <a:t>08/10/26</a:t>
+              <a:t>15/10/26</a:t>
             </a:fld>
             <a:endParaRPr lang="en-GB"/>
           </a:p>
@@ -3525,10 +3529,293 @@
       </p:grpSpPr>
       <p:sp>
         <p:nvSpPr>
-          <p:cNvPr id="2" name="Title 1">
-            <a:extLst>
-              <a:ext uri="{FF2B5EF4-FFF2-40B4-BE49-F238E27FC236}">
-                <a16:creationId xmlns:a16="http://schemas.microsoft.com/office/drawing/2014/main" id="{811768A0-4B46-9EC2-17C8-532CE5BCA419}"/>
+          <p:cNvPr id="4" name="Date Placeholder 3">
+            <a:extLst>
+              <a:ext uri="{FF2B5EF4-FFF2-40B4-BE49-F238E27FC236}">
+                <a16:creationId xmlns:a16="http://schemas.microsoft.com/office/drawing/2014/main" id="{036D41BE-0535-3666-44BD-7D9D43547DBB}"/>
+              </a:ext>
+            </a:extLst>
+          </p:cNvPr>
+          <p:cNvSpPr>
+            <a:spLocks noGrp="1"/>
+          </p:cNvSpPr>
+          <p:nvPr>
+            <p:ph type="dt" sz="half" idx="10"/>
+          </p:nvPr>
+        </p:nvSpPr>
+        <p:spPr/>
+        <p:txBody>
+          <a:bodyPr/>
+          <a:lstStyle/>
+          <a:p>
+            <a:fld id="{761DFEEA-1162-B343-ACBF-B3E92F6AC390}" type="datetime1">
+              <a:rPr lang="it-IT" smtClean="0"/>
+              <a:t>15/10/26</a:t>
+            </a:fld>
+            <a:endParaRPr lang="en-GB"/>
+          </a:p>
+        </p:txBody>
+      </p:sp>
+      <p:sp>
+        <p:nvSpPr>
+          <p:cNvPr id="5" name="Footer Placeholder 4">
+            <a:extLst>
+              <a:ext uri="{FF2B5EF4-FFF2-40B4-BE49-F238E27FC236}">
+                <a16:creationId xmlns:a16="http://schemas.microsoft.com/office/drawing/2014/main" id="{2A5B017C-1FD5-52FF-2551-15E4DCE5790D}"/>
+              </a:ext>
+            </a:extLst>
+          </p:cNvPr>
+          <p:cNvSpPr>
+            <a:spLocks noGrp="1"/>
+          </p:cNvSpPr>
+          <p:nvPr>
+            <p:ph type="ftr" sz="quarter" idx="11"/>
+          </p:nvPr>
+        </p:nvSpPr>
+        <p:spPr/>
+        <p:txBody>
+          <a:bodyPr/>
+          <a:lstStyle/>
+          <a:p>
+            <a:r>
+              <a:rPr lang="en-GB"/>
+              <a:t>Day 1: Reproducible NGS Data Analysis on Personal Laptops</a:t>
+            </a:r>
+          </a:p>
+        </p:txBody>
+      </p:sp>
+      <p:sp>
+        <p:nvSpPr>
+          <p:cNvPr id="6" name="Slide Number Placeholder 5">
+            <a:extLst>
+              <a:ext uri="{FF2B5EF4-FFF2-40B4-BE49-F238E27FC236}">
+                <a16:creationId xmlns:a16="http://schemas.microsoft.com/office/drawing/2014/main" id="{8FF26809-9CCC-E336-FEB1-3AD87A95AB82}"/>
+              </a:ext>
+            </a:extLst>
+          </p:cNvPr>
+          <p:cNvSpPr>
+            <a:spLocks noGrp="1"/>
+          </p:cNvSpPr>
+          <p:nvPr>
+            <p:ph type="sldNum" sz="quarter" idx="12"/>
+          </p:nvPr>
+        </p:nvSpPr>
+        <p:spPr/>
+        <p:txBody>
+          <a:bodyPr/>
+          <a:lstStyle/>
+          <a:p>
+            <a:fld id="{62E92BA6-6E87-3343-8D2C-B7A656D628E4}" type="slidenum">
+              <a:rPr lang="en-GB" smtClean="0"/>
+              <a:t>9</a:t>
+            </a:fld>
+            <a:endParaRPr lang="en-GB"/>
+          </a:p>
+        </p:txBody>
+      </p:sp>
+      <p:sp>
+        <p:nvSpPr>
+          <p:cNvPr id="7" name="Text 2">
+            <a:extLst>
+              <a:ext uri="{FF2B5EF4-FFF2-40B4-BE49-F238E27FC236}">
+                <a16:creationId xmlns:a16="http://schemas.microsoft.com/office/drawing/2014/main" id="{ECE18393-DCCC-E791-13CE-E0E723223AAA}"/>
+              </a:ext>
+            </a:extLst>
+          </p:cNvPr>
+          <p:cNvSpPr/>
+          <p:nvPr/>
+        </p:nvSpPr>
+        <p:spPr>
+          <a:xfrm>
+            <a:off x="320039" y="1286077"/>
+            <a:ext cx="1325880" cy="640080"/>
+          </a:xfrm>
+          <a:prstGeom prst="rect">
+            <a:avLst/>
+          </a:prstGeom>
+          <a:solidFill>
+            <a:srgbClr val="F6F6F6"/>
+          </a:solidFill>
+          <a:ln w="12700">
+            <a:solidFill>
+              <a:srgbClr val="2F704F"/>
+            </a:solidFill>
+          </a:ln>
+        </p:spPr>
+        <p:txBody>
+          <a:bodyPr wrap="square" lIns="762" tIns="762" rIns="762" bIns="762" rtlCol="0" anchor="ctr">
+            <a:normAutofit/>
+          </a:bodyPr>
+          <a:lstStyle/>
+          <a:p>
+            <a:pPr marL="0" indent="0" algn="ctr">
+              <a:buNone/>
+            </a:pPr>
+            <a:r>
+              <a:rPr lang="en-US" sz="1200" dirty="0">
+                <a:solidFill>
+                  <a:srgbClr val="111111"/>
+                </a:solidFill>
+                <a:latin typeface="Gill Sans" pitchFamily="34" charset="0"/>
+                <a:ea typeface="Gill Sans" pitchFamily="34" charset="-122"/>
+                <a:cs typeface="Gill Sans" pitchFamily="34" charset="-120"/>
+              </a:rPr>
+              <a:t>FASTQ</a:t>
+            </a:r>
+            <a:endParaRPr lang="en-US" sz="1200" dirty="0"/>
+          </a:p>
+        </p:txBody>
+      </p:sp>
+      <p:sp>
+        <p:nvSpPr>
+          <p:cNvPr id="8" name="Shape 3">
+            <a:extLst>
+              <a:ext uri="{FF2B5EF4-FFF2-40B4-BE49-F238E27FC236}">
+                <a16:creationId xmlns:a16="http://schemas.microsoft.com/office/drawing/2014/main" id="{F4BA8BE9-AD13-6972-5151-432BF609AA4E}"/>
+              </a:ext>
+            </a:extLst>
+          </p:cNvPr>
+          <p:cNvSpPr/>
+          <p:nvPr/>
+        </p:nvSpPr>
+        <p:spPr>
+          <a:xfrm>
+            <a:off x="1673351" y="1606117"/>
+            <a:ext cx="219456" cy="0"/>
+          </a:xfrm>
+          <a:prstGeom prst="line">
+            <a:avLst/>
+          </a:prstGeom>
+          <a:noFill/>
+          <a:ln w="15240">
+            <a:solidFill>
+              <a:srgbClr val="2F704F"/>
+            </a:solidFill>
+            <a:prstDash val="solid"/>
+            <a:tailEnd type="triangle"/>
+          </a:ln>
+        </p:spPr>
+        <p:txBody>
+          <a:bodyPr/>
+          <a:lstStyle/>
+          <a:p>
+            <a:endParaRPr lang="en-GB"/>
+          </a:p>
+        </p:txBody>
+      </p:sp>
+      <p:sp>
+        <p:nvSpPr>
+          <p:cNvPr id="9" name="Text 4">
+            <a:extLst>
+              <a:ext uri="{FF2B5EF4-FFF2-40B4-BE49-F238E27FC236}">
+                <a16:creationId xmlns:a16="http://schemas.microsoft.com/office/drawing/2014/main" id="{58F9B1B7-77CD-02EB-C35E-898F59083197}"/>
+              </a:ext>
+            </a:extLst>
+          </p:cNvPr>
+          <p:cNvSpPr/>
+          <p:nvPr/>
+        </p:nvSpPr>
+        <p:spPr>
+          <a:xfrm>
+            <a:off x="1965959" y="1286077"/>
+            <a:ext cx="1325880" cy="640080"/>
+          </a:xfrm>
+          <a:prstGeom prst="rect">
+            <a:avLst/>
+          </a:prstGeom>
+          <a:solidFill>
+            <a:srgbClr val="FFFFFF"/>
+          </a:solidFill>
+          <a:ln w="12700">
+            <a:solidFill>
+              <a:srgbClr val="2F704F"/>
+            </a:solidFill>
+          </a:ln>
+        </p:spPr>
+        <p:txBody>
+          <a:bodyPr wrap="square" lIns="762" tIns="762" rIns="762" bIns="762" rtlCol="0" anchor="ctr">
+            <a:normAutofit/>
+          </a:bodyPr>
+          <a:lstStyle/>
+          <a:p>
+            <a:pPr marL="0" indent="0" algn="ctr">
+              <a:buNone/>
+            </a:pPr>
+            <a:r>
+              <a:rPr lang="en-US" sz="1200" dirty="0">
+                <a:solidFill>
+                  <a:srgbClr val="111111"/>
+                </a:solidFill>
+                <a:latin typeface="Gill Sans" pitchFamily="34" charset="0"/>
+                <a:ea typeface="Gill Sans" pitchFamily="34" charset="-122"/>
+                <a:cs typeface="Gill Sans" pitchFamily="34" charset="-120"/>
+              </a:rPr>
+              <a:t>Bowtie2</a:t>
+            </a:r>
+            <a:endParaRPr lang="en-US" sz="1200" dirty="0"/>
+          </a:p>
+          <a:p>
+            <a:pPr marL="0" indent="0" algn="ctr">
+              <a:buNone/>
+            </a:pPr>
+            <a:r>
+              <a:rPr lang="en-US" sz="1200" dirty="0">
+                <a:solidFill>
+                  <a:srgbClr val="111111"/>
+                </a:solidFill>
+                <a:latin typeface="Gill Sans" pitchFamily="34" charset="0"/>
+                <a:ea typeface="Gill Sans" pitchFamily="34" charset="-122"/>
+                <a:cs typeface="Gill Sans" pitchFamily="34" charset="-120"/>
+              </a:rPr>
+              <a:t>BAM</a:t>
+            </a:r>
+            <a:endParaRPr lang="en-US" sz="1200" dirty="0"/>
+          </a:p>
+        </p:txBody>
+      </p:sp>
+      <p:sp>
+        <p:nvSpPr>
+          <p:cNvPr id="10" name="Shape 5">
+            <a:extLst>
+              <a:ext uri="{FF2B5EF4-FFF2-40B4-BE49-F238E27FC236}">
+                <a16:creationId xmlns:a16="http://schemas.microsoft.com/office/drawing/2014/main" id="{D381E7E0-F6A8-0AE9-4879-3FB98566DC71}"/>
+              </a:ext>
+            </a:extLst>
+          </p:cNvPr>
+          <p:cNvSpPr/>
+          <p:nvPr/>
+        </p:nvSpPr>
+        <p:spPr>
+          <a:xfrm>
+            <a:off x="3319271" y="1606117"/>
+            <a:ext cx="219456" cy="0"/>
+          </a:xfrm>
+          <a:prstGeom prst="line">
+            <a:avLst/>
+          </a:prstGeom>
+          <a:noFill/>
+          <a:ln w="15240">
+            <a:solidFill>
+              <a:srgbClr val="2F704F"/>
+            </a:solidFill>
+            <a:prstDash val="solid"/>
+            <a:tailEnd type="triangle"/>
+          </a:ln>
+        </p:spPr>
+        <p:txBody>
+          <a:bodyPr/>
+          <a:lstStyle/>
+          <a:p>
+            <a:endParaRPr lang="en-GB"/>
+          </a:p>
+        </p:txBody>
+      </p:sp>
+      <p:sp>
+        <p:nvSpPr>
+          <p:cNvPr id="11" name="Title 1">
+            <a:extLst>
+              <a:ext uri="{FF2B5EF4-FFF2-40B4-BE49-F238E27FC236}">
+                <a16:creationId xmlns:a16="http://schemas.microsoft.com/office/drawing/2014/main" id="{4936E58C-989F-A717-670E-41EE46896DE0}"/>
               </a:ext>
             </a:extLst>
           </p:cNvPr>
@@ -3541,30 +3828,862 @@
         </p:nvSpPr>
         <p:spPr>
           <a:xfrm>
-            <a:off x="134470" y="122282"/>
-            <a:ext cx="12192000" cy="658006"/>
+            <a:off x="155985" y="143352"/>
+            <a:ext cx="7783159" cy="551051"/>
           </a:xfrm>
         </p:spPr>
         <p:txBody>
           <a:bodyPr>
-            <a:normAutofit fontScale="90000"/>
+            <a:normAutofit/>
           </a:bodyPr>
           <a:lstStyle/>
           <a:p>
             <a:r>
-              <a:rPr lang="en-IT" b="1" dirty="0"/>
-              <a:t>IDR: reproducibility of ranked peak calls</a:t>
+              <a:rPr lang="en-IT" sz="3200" dirty="0"/>
+              <a:t>ChIP-seq specific QCs:  PhantomPeak check:</a:t>
+            </a:r>
+            <a:endParaRPr lang="en-GB" sz="3200" dirty="0"/>
+          </a:p>
+        </p:txBody>
+      </p:sp>
+      <p:sp>
+        <p:nvSpPr>
+          <p:cNvPr id="12" name="Text 6">
+            <a:extLst>
+              <a:ext uri="{FF2B5EF4-FFF2-40B4-BE49-F238E27FC236}">
+                <a16:creationId xmlns:a16="http://schemas.microsoft.com/office/drawing/2014/main" id="{57ECAA5A-D747-ACC6-E70B-41F2B4C90CEF}"/>
+              </a:ext>
+            </a:extLst>
+          </p:cNvPr>
+          <p:cNvSpPr/>
+          <p:nvPr/>
+        </p:nvSpPr>
+        <p:spPr>
+          <a:xfrm>
+            <a:off x="3611879" y="1286077"/>
+            <a:ext cx="1325880" cy="640080"/>
+          </a:xfrm>
+          <a:prstGeom prst="rect">
+            <a:avLst/>
+          </a:prstGeom>
+          <a:solidFill>
+            <a:srgbClr val="FF0000"/>
+          </a:solidFill>
+          <a:ln w="12700">
+            <a:solidFill>
+              <a:srgbClr val="2F704F"/>
+            </a:solidFill>
+          </a:ln>
+        </p:spPr>
+        <p:txBody>
+          <a:bodyPr wrap="square" lIns="762" tIns="762" rIns="762" bIns="762" rtlCol="0" anchor="ctr">
+            <a:normAutofit/>
+          </a:bodyPr>
+          <a:lstStyle/>
+          <a:p>
+            <a:pPr marL="0" indent="0" algn="ctr">
+              <a:buNone/>
+            </a:pPr>
+            <a:r>
+              <a:rPr lang="en-US" sz="1200" dirty="0">
+                <a:solidFill>
+                  <a:schemeClr val="bg1"/>
+                </a:solidFill>
+                <a:latin typeface="Gill Sans" pitchFamily="34" charset="0"/>
+                <a:ea typeface="Gill Sans" pitchFamily="34" charset="-122"/>
+                <a:cs typeface="Gill Sans" pitchFamily="34" charset="-120"/>
+              </a:rPr>
+              <a:t>ChIP QC</a:t>
+            </a:r>
+            <a:endParaRPr lang="en-US" sz="1200" dirty="0">
+              <a:solidFill>
+                <a:schemeClr val="bg1"/>
+              </a:solidFill>
+            </a:endParaRPr>
+          </a:p>
+          <a:p>
+            <a:pPr marL="0" indent="0" algn="ctr">
+              <a:buNone/>
+            </a:pPr>
+            <a:r>
+              <a:rPr lang="en-US" sz="1200" dirty="0">
+                <a:solidFill>
+                  <a:schemeClr val="bg1"/>
+                </a:solidFill>
+                <a:latin typeface="Gill Sans" pitchFamily="34" charset="0"/>
+                <a:ea typeface="Gill Sans" pitchFamily="34" charset="-122"/>
+                <a:cs typeface="Gill Sans" pitchFamily="34" charset="-120"/>
+              </a:rPr>
+              <a:t>phantom peak</a:t>
+            </a:r>
+            <a:endParaRPr lang="en-US" sz="1200" dirty="0">
+              <a:solidFill>
+                <a:schemeClr val="bg1"/>
+              </a:solidFill>
+            </a:endParaRPr>
+          </a:p>
+        </p:txBody>
+      </p:sp>
+      <p:pic>
+        <p:nvPicPr>
+          <p:cNvPr id="13" name="Picture 12">
+            <a:extLst>
+              <a:ext uri="{FF2B5EF4-FFF2-40B4-BE49-F238E27FC236}">
+                <a16:creationId xmlns:a16="http://schemas.microsoft.com/office/drawing/2014/main" id="{E88F6775-D5E6-58B7-F774-9388EDE7E397}"/>
+              </a:ext>
+            </a:extLst>
+          </p:cNvPr>
+          <p:cNvPicPr>
+            <a:picLocks noChangeAspect="1"/>
+          </p:cNvPicPr>
+          <p:nvPr/>
+        </p:nvPicPr>
+        <p:blipFill>
+          <a:blip r:embed="rId2"/>
+          <a:stretch>
+            <a:fillRect/>
+          </a:stretch>
+        </p:blipFill>
+        <p:spPr>
+          <a:xfrm>
+            <a:off x="409537" y="2342747"/>
+            <a:ext cx="4528222" cy="3917051"/>
+          </a:xfrm>
+          <a:prstGeom prst="rect">
+            <a:avLst/>
+          </a:prstGeom>
+        </p:spPr>
+      </p:pic>
+      <p:pic>
+        <p:nvPicPr>
+          <p:cNvPr id="14" name="Picture 13">
+            <a:extLst>
+              <a:ext uri="{FF2B5EF4-FFF2-40B4-BE49-F238E27FC236}">
+                <a16:creationId xmlns:a16="http://schemas.microsoft.com/office/drawing/2014/main" id="{02C05C69-ACFD-B5B3-C4A0-A3D65005E162}"/>
+              </a:ext>
+            </a:extLst>
+          </p:cNvPr>
+          <p:cNvPicPr>
+            <a:picLocks noChangeAspect="1"/>
+          </p:cNvPicPr>
+          <p:nvPr/>
+        </p:nvPicPr>
+        <p:blipFill>
+          <a:blip r:embed="rId3"/>
+          <a:stretch>
+            <a:fillRect/>
+          </a:stretch>
+        </p:blipFill>
+        <p:spPr>
+          <a:xfrm>
+            <a:off x="6420860" y="1266779"/>
+            <a:ext cx="5079065" cy="4706290"/>
+          </a:xfrm>
+          <a:prstGeom prst="rect">
+            <a:avLst/>
+          </a:prstGeom>
+        </p:spPr>
+      </p:pic>
+      <p:sp>
+        <p:nvSpPr>
+          <p:cNvPr id="16" name="TextBox 15">
+            <a:extLst>
+              <a:ext uri="{FF2B5EF4-FFF2-40B4-BE49-F238E27FC236}">
+                <a16:creationId xmlns:a16="http://schemas.microsoft.com/office/drawing/2014/main" id="{71DC3FB1-323C-991E-0A94-1F0DCA4092AC}"/>
+              </a:ext>
+            </a:extLst>
+          </p:cNvPr>
+          <p:cNvSpPr txBox="1"/>
+          <p:nvPr/>
+        </p:nvSpPr>
+        <p:spPr>
+          <a:xfrm>
+            <a:off x="6294124" y="714690"/>
+            <a:ext cx="5377923" cy="369332"/>
+          </a:xfrm>
+          <a:prstGeom prst="rect">
+            <a:avLst/>
+          </a:prstGeom>
+          <a:noFill/>
+        </p:spPr>
+        <p:txBody>
+          <a:bodyPr wrap="square">
+            <a:spAutoFit/>
+          </a:bodyPr>
+          <a:lstStyle/>
+          <a:p>
+            <a:r>
+              <a:rPr lang="en-IT" sz="1800" b="0" i="0" dirty="0">
+                <a:effectLst/>
+                <a:latin typeface="+mn-lt"/>
+              </a:rPr>
+              <a:t>Strong Signal: predominant peak at the true peak shift.</a:t>
             </a:r>
             <a:endParaRPr lang="en-GB" dirty="0"/>
           </a:p>
         </p:txBody>
       </p:sp>
+      <p:pic>
+        <p:nvPicPr>
+          <p:cNvPr id="17" name="Picture 16">
+            <a:extLst>
+              <a:ext uri="{FF2B5EF4-FFF2-40B4-BE49-F238E27FC236}">
+                <a16:creationId xmlns:a16="http://schemas.microsoft.com/office/drawing/2014/main" id="{ED8779D1-C0EF-2DA0-32CD-7CFD594B3F14}"/>
+              </a:ext>
+            </a:extLst>
+          </p:cNvPr>
+          <p:cNvPicPr>
+            <a:picLocks noChangeAspect="1"/>
+          </p:cNvPicPr>
+          <p:nvPr/>
+        </p:nvPicPr>
+        <p:blipFill>
+          <a:blip r:embed="rId4"/>
+          <a:stretch>
+            <a:fillRect/>
+          </a:stretch>
+        </p:blipFill>
+        <p:spPr>
+          <a:xfrm>
+            <a:off x="6521375" y="1390337"/>
+            <a:ext cx="4832425" cy="4642918"/>
+          </a:xfrm>
+          <a:prstGeom prst="rect">
+            <a:avLst/>
+          </a:prstGeom>
+        </p:spPr>
+      </p:pic>
+      <p:sp>
+        <p:nvSpPr>
+          <p:cNvPr id="19" name="TextBox 18">
+            <a:extLst>
+              <a:ext uri="{FF2B5EF4-FFF2-40B4-BE49-F238E27FC236}">
+                <a16:creationId xmlns:a16="http://schemas.microsoft.com/office/drawing/2014/main" id="{3ECAAB32-7FEF-BAF7-995C-461153E74033}"/>
+              </a:ext>
+            </a:extLst>
+          </p:cNvPr>
+          <p:cNvSpPr txBox="1"/>
+          <p:nvPr/>
+        </p:nvSpPr>
+        <p:spPr>
+          <a:xfrm>
+            <a:off x="6187736" y="694403"/>
+            <a:ext cx="6094206" cy="295466"/>
+          </a:xfrm>
+          <a:prstGeom prst="rect">
+            <a:avLst/>
+          </a:prstGeom>
+          <a:noFill/>
+        </p:spPr>
+        <p:txBody>
+          <a:bodyPr wrap="square">
+            <a:spAutoFit/>
+          </a:bodyPr>
+          <a:lstStyle/>
+          <a:p>
+            <a:r>
+              <a:rPr lang="en-IT" sz="1800" b="0" i="0" dirty="0">
+                <a:effectLst/>
+                <a:latin typeface="+mn-lt"/>
+              </a:rPr>
+              <a:t>Weak Signal: Strongest peak is the blue line (read length) </a:t>
+            </a:r>
+            <a:endParaRPr lang="en-GB" dirty="0"/>
+          </a:p>
+        </p:txBody>
+      </p:sp>
+      <p:pic>
+        <p:nvPicPr>
+          <p:cNvPr id="20" name="Picture 19">
+            <a:extLst>
+              <a:ext uri="{FF2B5EF4-FFF2-40B4-BE49-F238E27FC236}">
+                <a16:creationId xmlns:a16="http://schemas.microsoft.com/office/drawing/2014/main" id="{4BF4BB52-9595-712E-8D95-CDD9654C439F}"/>
+              </a:ext>
+            </a:extLst>
+          </p:cNvPr>
+          <p:cNvPicPr>
+            <a:picLocks noChangeAspect="1"/>
+          </p:cNvPicPr>
+          <p:nvPr/>
+        </p:nvPicPr>
+        <p:blipFill>
+          <a:blip r:embed="rId5"/>
+          <a:stretch>
+            <a:fillRect/>
+          </a:stretch>
+        </p:blipFill>
+        <p:spPr>
+          <a:xfrm>
+            <a:off x="6629419" y="1388161"/>
+            <a:ext cx="4724381" cy="4350617"/>
+          </a:xfrm>
+          <a:prstGeom prst="rect">
+            <a:avLst/>
+          </a:prstGeom>
+        </p:spPr>
+      </p:pic>
+      <p:sp>
+        <p:nvSpPr>
+          <p:cNvPr id="22" name="TextBox 21">
+            <a:extLst>
+              <a:ext uri="{FF2B5EF4-FFF2-40B4-BE49-F238E27FC236}">
+                <a16:creationId xmlns:a16="http://schemas.microsoft.com/office/drawing/2014/main" id="{385FEFF4-2EEA-3B24-60A2-F42E8EF969A4}"/>
+              </a:ext>
+            </a:extLst>
+          </p:cNvPr>
+          <p:cNvSpPr txBox="1"/>
+          <p:nvPr/>
+        </p:nvSpPr>
+        <p:spPr>
+          <a:xfrm>
+            <a:off x="6187736" y="723372"/>
+            <a:ext cx="6096000" cy="295466"/>
+          </a:xfrm>
+          <a:prstGeom prst="rect">
+            <a:avLst/>
+          </a:prstGeom>
+          <a:noFill/>
+        </p:spPr>
+        <p:txBody>
+          <a:bodyPr wrap="square">
+            <a:spAutoFit/>
+          </a:bodyPr>
+          <a:lstStyle/>
+          <a:p>
+            <a:r>
+              <a:rPr lang="en-IT" sz="1800" b="0" i="0" dirty="0">
+                <a:effectLst/>
+                <a:latin typeface="+mn-lt"/>
+              </a:rPr>
+              <a:t>No signal: Predominant peak is the blue line (read length) </a:t>
+            </a:r>
+            <a:endParaRPr lang="en-GB" dirty="0"/>
+          </a:p>
+        </p:txBody>
+      </p:sp>
+      <p:sp>
+        <p:nvSpPr>
+          <p:cNvPr id="23" name="TextBox 22">
+            <a:extLst>
+              <a:ext uri="{FF2B5EF4-FFF2-40B4-BE49-F238E27FC236}">
+                <a16:creationId xmlns:a16="http://schemas.microsoft.com/office/drawing/2014/main" id="{18170771-5CF8-7671-F1B6-924D61316832}"/>
+              </a:ext>
+            </a:extLst>
+          </p:cNvPr>
+          <p:cNvSpPr txBox="1"/>
+          <p:nvPr/>
+        </p:nvSpPr>
+        <p:spPr>
+          <a:xfrm>
+            <a:off x="5771141" y="5871637"/>
+            <a:ext cx="6235103" cy="646331"/>
+          </a:xfrm>
+          <a:prstGeom prst="rect">
+            <a:avLst/>
+          </a:prstGeom>
+          <a:noFill/>
+        </p:spPr>
+        <p:txBody>
+          <a:bodyPr wrap="square" rtlCol="0">
+            <a:spAutoFit/>
+          </a:bodyPr>
+          <a:lstStyle/>
+          <a:p>
+            <a:r>
+              <a:rPr lang="en-GB" dirty="0"/>
+              <a:t>In PE mode we can directly extrapolate this from the BAMPE insert size: so the span between read mates</a:t>
+            </a:r>
+          </a:p>
+        </p:txBody>
+      </p:sp>
+    </p:spTree>
+    <p:extLst>
+      <p:ext uri="{BB962C8B-B14F-4D97-AF65-F5344CB8AC3E}">
+        <p14:creationId xmlns:p14="http://schemas.microsoft.com/office/powerpoint/2010/main" val="2423424265"/>
+      </p:ext>
+    </p:extLst>
+  </p:cSld>
+  <p:clrMapOvr>
+    <a:masterClrMapping/>
+  </p:clrMapOvr>
+  <p:timing>
+    <p:tnLst>
+      <p:par>
+        <p:cTn id="1" dur="indefinite" restart="never" nodeType="tmRoot">
+          <p:childTnLst>
+            <p:seq concurrent="1" nextAc="seek">
+              <p:cTn id="2" dur="indefinite" nodeType="mainSeq">
+                <p:childTnLst>
+                  <p:par>
+                    <p:cTn id="3" fill="hold">
+                      <p:stCondLst>
+                        <p:cond delay="indefinite"/>
+                      </p:stCondLst>
+                      <p:childTnLst>
+                        <p:par>
+                          <p:cTn id="4" fill="hold">
+                            <p:stCondLst>
+                              <p:cond delay="0"/>
+                            </p:stCondLst>
+                            <p:childTnLst>
+                              <p:par>
+                                <p:cTn id="5" presetID="1" presetClass="entr" presetSubtype="0" fill="hold" nodeType="clickEffect">
+                                  <p:stCondLst>
+                                    <p:cond delay="0"/>
+                                  </p:stCondLst>
+                                  <p:childTnLst>
+                                    <p:set>
+                                      <p:cBhvr>
+                                        <p:cTn id="6" dur="1" fill="hold">
+                                          <p:stCondLst>
+                                            <p:cond delay="0"/>
+                                          </p:stCondLst>
+                                        </p:cTn>
+                                        <p:tgtEl>
+                                          <p:spTgt spid="13"/>
+                                        </p:tgtEl>
+                                        <p:attrNameLst>
+                                          <p:attrName>style.visibility</p:attrName>
+                                        </p:attrNameLst>
+                                      </p:cBhvr>
+                                      <p:to>
+                                        <p:strVal val="visible"/>
+                                      </p:to>
+                                    </p:set>
+                                  </p:childTnLst>
+                                </p:cTn>
+                              </p:par>
+                            </p:childTnLst>
+                          </p:cTn>
+                        </p:par>
+                      </p:childTnLst>
+                    </p:cTn>
+                  </p:par>
+                  <p:par>
+                    <p:cTn id="7" fill="hold">
+                      <p:stCondLst>
+                        <p:cond delay="indefinite"/>
+                      </p:stCondLst>
+                      <p:childTnLst>
+                        <p:par>
+                          <p:cTn id="8" fill="hold">
+                            <p:stCondLst>
+                              <p:cond delay="0"/>
+                            </p:stCondLst>
+                            <p:childTnLst>
+                              <p:par>
+                                <p:cTn id="9" presetID="1" presetClass="entr" presetSubtype="0" fill="hold" grpId="0" nodeType="clickEffect">
+                                  <p:stCondLst>
+                                    <p:cond delay="0"/>
+                                  </p:stCondLst>
+                                  <p:childTnLst>
+                                    <p:set>
+                                      <p:cBhvr>
+                                        <p:cTn id="10" dur="1" fill="hold">
+                                          <p:stCondLst>
+                                            <p:cond delay="0"/>
+                                          </p:stCondLst>
+                                        </p:cTn>
+                                        <p:tgtEl>
+                                          <p:spTgt spid="16"/>
+                                        </p:tgtEl>
+                                        <p:attrNameLst>
+                                          <p:attrName>style.visibility</p:attrName>
+                                        </p:attrNameLst>
+                                      </p:cBhvr>
+                                      <p:to>
+                                        <p:strVal val="visible"/>
+                                      </p:to>
+                                    </p:set>
+                                  </p:childTnLst>
+                                </p:cTn>
+                              </p:par>
+                              <p:par>
+                                <p:cTn id="11" presetID="1" presetClass="entr" presetSubtype="0" fill="hold" nodeType="withEffect">
+                                  <p:stCondLst>
+                                    <p:cond delay="0"/>
+                                  </p:stCondLst>
+                                  <p:childTnLst>
+                                    <p:set>
+                                      <p:cBhvr>
+                                        <p:cTn id="12" dur="1" fill="hold">
+                                          <p:stCondLst>
+                                            <p:cond delay="0"/>
+                                          </p:stCondLst>
+                                        </p:cTn>
+                                        <p:tgtEl>
+                                          <p:spTgt spid="14"/>
+                                        </p:tgtEl>
+                                        <p:attrNameLst>
+                                          <p:attrName>style.visibility</p:attrName>
+                                        </p:attrNameLst>
+                                      </p:cBhvr>
+                                      <p:to>
+                                        <p:strVal val="visible"/>
+                                      </p:to>
+                                    </p:set>
+                                  </p:childTnLst>
+                                </p:cTn>
+                              </p:par>
+                            </p:childTnLst>
+                          </p:cTn>
+                        </p:par>
+                      </p:childTnLst>
+                    </p:cTn>
+                  </p:par>
+                  <p:par>
+                    <p:cTn id="13" fill="hold">
+                      <p:stCondLst>
+                        <p:cond delay="indefinite"/>
+                      </p:stCondLst>
+                      <p:childTnLst>
+                        <p:par>
+                          <p:cTn id="14" fill="hold">
+                            <p:stCondLst>
+                              <p:cond delay="0"/>
+                            </p:stCondLst>
+                            <p:childTnLst>
+                              <p:par>
+                                <p:cTn id="15" presetID="1" presetClass="entr" presetSubtype="0" fill="hold" grpId="0" nodeType="clickEffect">
+                                  <p:stCondLst>
+                                    <p:cond delay="0"/>
+                                  </p:stCondLst>
+                                  <p:childTnLst>
+                                    <p:set>
+                                      <p:cBhvr>
+                                        <p:cTn id="16" dur="1" fill="hold">
+                                          <p:stCondLst>
+                                            <p:cond delay="0"/>
+                                          </p:stCondLst>
+                                        </p:cTn>
+                                        <p:tgtEl>
+                                          <p:spTgt spid="19"/>
+                                        </p:tgtEl>
+                                        <p:attrNameLst>
+                                          <p:attrName>style.visibility</p:attrName>
+                                        </p:attrNameLst>
+                                      </p:cBhvr>
+                                      <p:to>
+                                        <p:strVal val="visible"/>
+                                      </p:to>
+                                    </p:set>
+                                  </p:childTnLst>
+                                </p:cTn>
+                              </p:par>
+                              <p:par>
+                                <p:cTn id="17" presetID="1" presetClass="entr" presetSubtype="0" fill="hold" nodeType="withEffect">
+                                  <p:stCondLst>
+                                    <p:cond delay="0"/>
+                                  </p:stCondLst>
+                                  <p:childTnLst>
+                                    <p:set>
+                                      <p:cBhvr>
+                                        <p:cTn id="18" dur="1" fill="hold">
+                                          <p:stCondLst>
+                                            <p:cond delay="0"/>
+                                          </p:stCondLst>
+                                        </p:cTn>
+                                        <p:tgtEl>
+                                          <p:spTgt spid="17"/>
+                                        </p:tgtEl>
+                                        <p:attrNameLst>
+                                          <p:attrName>style.visibility</p:attrName>
+                                        </p:attrNameLst>
+                                      </p:cBhvr>
+                                      <p:to>
+                                        <p:strVal val="visible"/>
+                                      </p:to>
+                                    </p:set>
+                                  </p:childTnLst>
+                                </p:cTn>
+                              </p:par>
+                              <p:par>
+                                <p:cTn id="19" presetID="1" presetClass="exit" presetSubtype="0" fill="hold" nodeType="withEffect">
+                                  <p:stCondLst>
+                                    <p:cond delay="0"/>
+                                  </p:stCondLst>
+                                  <p:childTnLst>
+                                    <p:set>
+                                      <p:cBhvr>
+                                        <p:cTn id="20" dur="1" fill="hold">
+                                          <p:stCondLst>
+                                            <p:cond delay="0"/>
+                                          </p:stCondLst>
+                                        </p:cTn>
+                                        <p:tgtEl>
+                                          <p:spTgt spid="14"/>
+                                        </p:tgtEl>
+                                        <p:attrNameLst>
+                                          <p:attrName>style.visibility</p:attrName>
+                                        </p:attrNameLst>
+                                      </p:cBhvr>
+                                      <p:to>
+                                        <p:strVal val="hidden"/>
+                                      </p:to>
+                                    </p:set>
+                                  </p:childTnLst>
+                                </p:cTn>
+                              </p:par>
+                              <p:par>
+                                <p:cTn id="21" presetID="1" presetClass="exit" presetSubtype="0" fill="hold" grpId="1" nodeType="withEffect">
+                                  <p:stCondLst>
+                                    <p:cond delay="0"/>
+                                  </p:stCondLst>
+                                  <p:childTnLst>
+                                    <p:set>
+                                      <p:cBhvr>
+                                        <p:cTn id="22" dur="1" fill="hold">
+                                          <p:stCondLst>
+                                            <p:cond delay="0"/>
+                                          </p:stCondLst>
+                                        </p:cTn>
+                                        <p:tgtEl>
+                                          <p:spTgt spid="16"/>
+                                        </p:tgtEl>
+                                        <p:attrNameLst>
+                                          <p:attrName>style.visibility</p:attrName>
+                                        </p:attrNameLst>
+                                      </p:cBhvr>
+                                      <p:to>
+                                        <p:strVal val="hidden"/>
+                                      </p:to>
+                                    </p:set>
+                                  </p:childTnLst>
+                                </p:cTn>
+                              </p:par>
+                            </p:childTnLst>
+                          </p:cTn>
+                        </p:par>
+                      </p:childTnLst>
+                    </p:cTn>
+                  </p:par>
+                  <p:par>
+                    <p:cTn id="23" fill="hold">
+                      <p:stCondLst>
+                        <p:cond delay="indefinite"/>
+                      </p:stCondLst>
+                      <p:childTnLst>
+                        <p:par>
+                          <p:cTn id="24" fill="hold">
+                            <p:stCondLst>
+                              <p:cond delay="0"/>
+                            </p:stCondLst>
+                            <p:childTnLst>
+                              <p:par>
+                                <p:cTn id="25" presetID="1" presetClass="exit" presetSubtype="0" fill="hold" nodeType="clickEffect">
+                                  <p:stCondLst>
+                                    <p:cond delay="0"/>
+                                  </p:stCondLst>
+                                  <p:childTnLst>
+                                    <p:set>
+                                      <p:cBhvr>
+                                        <p:cTn id="26" dur="1" fill="hold">
+                                          <p:stCondLst>
+                                            <p:cond delay="0"/>
+                                          </p:stCondLst>
+                                        </p:cTn>
+                                        <p:tgtEl>
+                                          <p:spTgt spid="17"/>
+                                        </p:tgtEl>
+                                        <p:attrNameLst>
+                                          <p:attrName>style.visibility</p:attrName>
+                                        </p:attrNameLst>
+                                      </p:cBhvr>
+                                      <p:to>
+                                        <p:strVal val="hidden"/>
+                                      </p:to>
+                                    </p:set>
+                                  </p:childTnLst>
+                                </p:cTn>
+                              </p:par>
+                              <p:par>
+                                <p:cTn id="27" presetID="1" presetClass="exit" presetSubtype="0" fill="hold" grpId="1" nodeType="withEffect">
+                                  <p:stCondLst>
+                                    <p:cond delay="0"/>
+                                  </p:stCondLst>
+                                  <p:childTnLst>
+                                    <p:set>
+                                      <p:cBhvr>
+                                        <p:cTn id="28" dur="1" fill="hold">
+                                          <p:stCondLst>
+                                            <p:cond delay="0"/>
+                                          </p:stCondLst>
+                                        </p:cTn>
+                                        <p:tgtEl>
+                                          <p:spTgt spid="19"/>
+                                        </p:tgtEl>
+                                        <p:attrNameLst>
+                                          <p:attrName>style.visibility</p:attrName>
+                                        </p:attrNameLst>
+                                      </p:cBhvr>
+                                      <p:to>
+                                        <p:strVal val="hidden"/>
+                                      </p:to>
+                                    </p:set>
+                                  </p:childTnLst>
+                                </p:cTn>
+                              </p:par>
+                              <p:par>
+                                <p:cTn id="29" presetID="1" presetClass="entr" presetSubtype="0" fill="hold" grpId="0" nodeType="withEffect">
+                                  <p:stCondLst>
+                                    <p:cond delay="0"/>
+                                  </p:stCondLst>
+                                  <p:childTnLst>
+                                    <p:set>
+                                      <p:cBhvr>
+                                        <p:cTn id="30" dur="1" fill="hold">
+                                          <p:stCondLst>
+                                            <p:cond delay="0"/>
+                                          </p:stCondLst>
+                                        </p:cTn>
+                                        <p:tgtEl>
+                                          <p:spTgt spid="22"/>
+                                        </p:tgtEl>
+                                        <p:attrNameLst>
+                                          <p:attrName>style.visibility</p:attrName>
+                                        </p:attrNameLst>
+                                      </p:cBhvr>
+                                      <p:to>
+                                        <p:strVal val="visible"/>
+                                      </p:to>
+                                    </p:set>
+                                  </p:childTnLst>
+                                </p:cTn>
+                              </p:par>
+                              <p:par>
+                                <p:cTn id="31" presetID="1" presetClass="entr" presetSubtype="0" fill="hold" nodeType="withEffect">
+                                  <p:stCondLst>
+                                    <p:cond delay="0"/>
+                                  </p:stCondLst>
+                                  <p:childTnLst>
+                                    <p:set>
+                                      <p:cBhvr>
+                                        <p:cTn id="32" dur="1" fill="hold">
+                                          <p:stCondLst>
+                                            <p:cond delay="0"/>
+                                          </p:stCondLst>
+                                        </p:cTn>
+                                        <p:tgtEl>
+                                          <p:spTgt spid="20"/>
+                                        </p:tgtEl>
+                                        <p:attrNameLst>
+                                          <p:attrName>style.visibility</p:attrName>
+                                        </p:attrNameLst>
+                                      </p:cBhvr>
+                                      <p:to>
+                                        <p:strVal val="visible"/>
+                                      </p:to>
+                                    </p:set>
+                                  </p:childTnLst>
+                                </p:cTn>
+                              </p:par>
+                            </p:childTnLst>
+                          </p:cTn>
+                        </p:par>
+                      </p:childTnLst>
+                    </p:cTn>
+                  </p:par>
+                  <p:par>
+                    <p:cTn id="33" fill="hold">
+                      <p:stCondLst>
+                        <p:cond delay="indefinite"/>
+                      </p:stCondLst>
+                      <p:childTnLst>
+                        <p:par>
+                          <p:cTn id="34" fill="hold">
+                            <p:stCondLst>
+                              <p:cond delay="0"/>
+                            </p:stCondLst>
+                            <p:childTnLst>
+                              <p:par>
+                                <p:cTn id="35" presetID="1" presetClass="entr" presetSubtype="0" fill="hold" grpId="0" nodeType="clickEffect">
+                                  <p:stCondLst>
+                                    <p:cond delay="0"/>
+                                  </p:stCondLst>
+                                  <p:childTnLst>
+                                    <p:set>
+                                      <p:cBhvr>
+                                        <p:cTn id="36" dur="1" fill="hold">
+                                          <p:stCondLst>
+                                            <p:cond delay="0"/>
+                                          </p:stCondLst>
+                                        </p:cTn>
+                                        <p:tgtEl>
+                                          <p:spTgt spid="23"/>
+                                        </p:tgtEl>
+                                        <p:attrNameLst>
+                                          <p:attrName>style.visibility</p:attrName>
+                                        </p:attrNameLst>
+                                      </p:cBhvr>
+                                      <p:to>
+                                        <p:strVal val="visible"/>
+                                      </p:to>
+                                    </p:set>
+                                  </p:childTnLst>
+                                </p:cTn>
+                              </p:par>
+                            </p:childTnLst>
+                          </p:cTn>
+                        </p:par>
+                      </p:childTnLst>
+                    </p:cTn>
+                  </p:par>
+                </p:childTnLst>
+              </p:cTn>
+              <p:prevCondLst>
+                <p:cond evt="onPrev" delay="0">
+                  <p:tgtEl>
+                    <p:sldTgt/>
+                  </p:tgtEl>
+                </p:cond>
+              </p:prevCondLst>
+              <p:nextCondLst>
+                <p:cond evt="onNext" delay="0">
+                  <p:tgtEl>
+                    <p:sldTgt/>
+                  </p:tgtEl>
+                </p:cond>
+              </p:nextCondLst>
+            </p:seq>
+          </p:childTnLst>
+        </p:cTn>
+      </p:par>
+    </p:tnLst>
+    <p:bldLst>
+      <p:bldP spid="16" grpId="0"/>
+      <p:bldP spid="16" grpId="1"/>
+      <p:bldP spid="19" grpId="0"/>
+      <p:bldP spid="19" grpId="1"/>
+      <p:bldP spid="22" grpId="0"/>
+      <p:bldP spid="23" grpId="0"/>
+    </p:bldLst>
+  </p:timing>
+</p:sld>
+</file>
+
+<file path=ppt/slides/slide11.xml><?xml version="1.0" encoding="utf-8"?>
+<p:sld xmlns:a="http://schemas.openxmlformats.org/drawingml/2006/main" xmlns:r="http://schemas.openxmlformats.org/officeDocument/2006/relationships" xmlns:p="http://schemas.openxmlformats.org/presentationml/2006/main">
+  <p:cSld>
+    <p:spTree>
+      <p:nvGrpSpPr>
+        <p:cNvPr id="1" name=""/>
+        <p:cNvGrpSpPr/>
+        <p:nvPr/>
+      </p:nvGrpSpPr>
+      <p:grpSpPr>
+        <a:xfrm>
+          <a:off x="0" y="0"/>
+          <a:ext cx="0" cy="0"/>
+          <a:chOff x="0" y="0"/>
+          <a:chExt cx="0" cy="0"/>
+        </a:xfrm>
+      </p:grpSpPr>
       <p:sp>
         <p:nvSpPr>
           <p:cNvPr id="4" name="Date Placeholder 3">
             <a:extLst>
               <a:ext uri="{FF2B5EF4-FFF2-40B4-BE49-F238E27FC236}">
-                <a16:creationId xmlns:a16="http://schemas.microsoft.com/office/drawing/2014/main" id="{ED7D3B1F-927C-D4A7-71C4-0E2B310DF6FC}"/>
+                <a16:creationId xmlns:a16="http://schemas.microsoft.com/office/drawing/2014/main" id="{C11FEEE6-EE9E-CE3E-57FC-1A66932CC1D8}"/>
               </a:ext>
             </a:extLst>
           </p:cNvPr>
@@ -3582,7 +4701,7 @@
           <a:p>
             <a:fld id="{761DFEEA-1162-B343-ACBF-B3E92F6AC390}" type="datetime1">
               <a:rPr lang="it-IT" smtClean="0"/>
-              <a:t>08/10/26</a:t>
+              <a:t>15/10/26</a:t>
             </a:fld>
             <a:endParaRPr lang="en-GB"/>
           </a:p>
@@ -3593,7 +4712,7 @@
           <p:cNvPr id="5" name="Footer Placeholder 4">
             <a:extLst>
               <a:ext uri="{FF2B5EF4-FFF2-40B4-BE49-F238E27FC236}">
-                <a16:creationId xmlns:a16="http://schemas.microsoft.com/office/drawing/2014/main" id="{6DCE18FB-4F88-49F8-6812-AECFEDB09CF0}"/>
+                <a16:creationId xmlns:a16="http://schemas.microsoft.com/office/drawing/2014/main" id="{81AED09B-76D3-24F7-8966-F5263527EFA2}"/>
               </a:ext>
             </a:extLst>
           </p:cNvPr>
@@ -3621,7 +4740,7 @@
           <p:cNvPr id="6" name="Slide Number Placeholder 5">
             <a:extLst>
               <a:ext uri="{FF2B5EF4-FFF2-40B4-BE49-F238E27FC236}">
-                <a16:creationId xmlns:a16="http://schemas.microsoft.com/office/drawing/2014/main" id="{189B7CCB-90F9-9062-63D5-74D7928F0F93}"/>
+                <a16:creationId xmlns:a16="http://schemas.microsoft.com/office/drawing/2014/main" id="{A64D4AB0-09D7-040B-2AEF-A817C8BC7441}"/>
               </a:ext>
             </a:extLst>
           </p:cNvPr>
@@ -3639,7 +4758,1925 @@
           <a:p>
             <a:fld id="{62E92BA6-6E87-3343-8D2C-B7A656D628E4}" type="slidenum">
               <a:rPr lang="en-GB" smtClean="0"/>
-              <a:t>9</a:t>
+              <a:t>10</a:t>
+            </a:fld>
+            <a:endParaRPr lang="en-GB"/>
+          </a:p>
+        </p:txBody>
+      </p:sp>
+      <p:sp>
+        <p:nvSpPr>
+          <p:cNvPr id="7" name="Text 2">
+            <a:extLst>
+              <a:ext uri="{FF2B5EF4-FFF2-40B4-BE49-F238E27FC236}">
+                <a16:creationId xmlns:a16="http://schemas.microsoft.com/office/drawing/2014/main" id="{CED132D3-BF24-D51D-CA52-48D271AC55B4}"/>
+              </a:ext>
+            </a:extLst>
+          </p:cNvPr>
+          <p:cNvSpPr/>
+          <p:nvPr/>
+        </p:nvSpPr>
+        <p:spPr>
+          <a:xfrm>
+            <a:off x="243840" y="823059"/>
+            <a:ext cx="1325880" cy="640080"/>
+          </a:xfrm>
+          <a:prstGeom prst="rect">
+            <a:avLst/>
+          </a:prstGeom>
+          <a:solidFill>
+            <a:srgbClr val="F6F6F6"/>
+          </a:solidFill>
+          <a:ln w="12700">
+            <a:solidFill>
+              <a:srgbClr val="2F704F"/>
+            </a:solidFill>
+          </a:ln>
+        </p:spPr>
+        <p:txBody>
+          <a:bodyPr wrap="square" lIns="762" tIns="762" rIns="762" bIns="762" rtlCol="0" anchor="ctr">
+            <a:normAutofit/>
+          </a:bodyPr>
+          <a:lstStyle/>
+          <a:p>
+            <a:pPr marL="0" indent="0" algn="ctr">
+              <a:buNone/>
+            </a:pPr>
+            <a:r>
+              <a:rPr lang="en-US" sz="1200" dirty="0">
+                <a:solidFill>
+                  <a:srgbClr val="111111"/>
+                </a:solidFill>
+                <a:latin typeface="Gill Sans" pitchFamily="34" charset="0"/>
+                <a:ea typeface="Gill Sans" pitchFamily="34" charset="-122"/>
+                <a:cs typeface="Gill Sans" pitchFamily="34" charset="-120"/>
+              </a:rPr>
+              <a:t>FASTQ</a:t>
+            </a:r>
+            <a:endParaRPr lang="en-US" sz="1200" dirty="0"/>
+          </a:p>
+        </p:txBody>
+      </p:sp>
+      <p:sp>
+        <p:nvSpPr>
+          <p:cNvPr id="8" name="Shape 3">
+            <a:extLst>
+              <a:ext uri="{FF2B5EF4-FFF2-40B4-BE49-F238E27FC236}">
+                <a16:creationId xmlns:a16="http://schemas.microsoft.com/office/drawing/2014/main" id="{5691EC75-7CC6-4A0D-C3AE-9FBDB956F34B}"/>
+              </a:ext>
+            </a:extLst>
+          </p:cNvPr>
+          <p:cNvSpPr/>
+          <p:nvPr/>
+        </p:nvSpPr>
+        <p:spPr>
+          <a:xfrm>
+            <a:off x="1597152" y="1143099"/>
+            <a:ext cx="219456" cy="0"/>
+          </a:xfrm>
+          <a:prstGeom prst="line">
+            <a:avLst/>
+          </a:prstGeom>
+          <a:noFill/>
+          <a:ln w="15240">
+            <a:solidFill>
+              <a:srgbClr val="2F704F"/>
+            </a:solidFill>
+            <a:prstDash val="solid"/>
+            <a:tailEnd type="triangle"/>
+          </a:ln>
+        </p:spPr>
+        <p:txBody>
+          <a:bodyPr/>
+          <a:lstStyle/>
+          <a:p>
+            <a:endParaRPr lang="en-GB"/>
+          </a:p>
+        </p:txBody>
+      </p:sp>
+      <p:sp>
+        <p:nvSpPr>
+          <p:cNvPr id="9" name="Text 4">
+            <a:extLst>
+              <a:ext uri="{FF2B5EF4-FFF2-40B4-BE49-F238E27FC236}">
+                <a16:creationId xmlns:a16="http://schemas.microsoft.com/office/drawing/2014/main" id="{498EA64D-A18D-C04D-9C9E-CCF8EAB75673}"/>
+              </a:ext>
+            </a:extLst>
+          </p:cNvPr>
+          <p:cNvSpPr/>
+          <p:nvPr/>
+        </p:nvSpPr>
+        <p:spPr>
+          <a:xfrm>
+            <a:off x="1889760" y="823059"/>
+            <a:ext cx="1325880" cy="640080"/>
+          </a:xfrm>
+          <a:prstGeom prst="rect">
+            <a:avLst/>
+          </a:prstGeom>
+          <a:solidFill>
+            <a:srgbClr val="FFFFFF"/>
+          </a:solidFill>
+          <a:ln w="12700">
+            <a:solidFill>
+              <a:srgbClr val="2F704F"/>
+            </a:solidFill>
+          </a:ln>
+        </p:spPr>
+        <p:txBody>
+          <a:bodyPr wrap="square" lIns="762" tIns="762" rIns="762" bIns="762" rtlCol="0" anchor="ctr">
+            <a:normAutofit/>
+          </a:bodyPr>
+          <a:lstStyle/>
+          <a:p>
+            <a:pPr marL="0" indent="0" algn="ctr">
+              <a:buNone/>
+            </a:pPr>
+            <a:r>
+              <a:rPr lang="en-US" sz="1200" dirty="0">
+                <a:solidFill>
+                  <a:srgbClr val="111111"/>
+                </a:solidFill>
+                <a:latin typeface="Gill Sans" pitchFamily="34" charset="0"/>
+                <a:ea typeface="Gill Sans" pitchFamily="34" charset="-122"/>
+                <a:cs typeface="Gill Sans" pitchFamily="34" charset="-120"/>
+              </a:rPr>
+              <a:t>Bowtie2</a:t>
+            </a:r>
+            <a:endParaRPr lang="en-US" sz="1200" dirty="0"/>
+          </a:p>
+          <a:p>
+            <a:pPr marL="0" indent="0" algn="ctr">
+              <a:buNone/>
+            </a:pPr>
+            <a:r>
+              <a:rPr lang="en-US" sz="1200" dirty="0">
+                <a:solidFill>
+                  <a:srgbClr val="111111"/>
+                </a:solidFill>
+                <a:latin typeface="Gill Sans" pitchFamily="34" charset="0"/>
+                <a:ea typeface="Gill Sans" pitchFamily="34" charset="-122"/>
+                <a:cs typeface="Gill Sans" pitchFamily="34" charset="-120"/>
+              </a:rPr>
+              <a:t>BAM</a:t>
+            </a:r>
+            <a:endParaRPr lang="en-US" sz="1200" dirty="0"/>
+          </a:p>
+        </p:txBody>
+      </p:sp>
+      <p:sp>
+        <p:nvSpPr>
+          <p:cNvPr id="10" name="Shape 5">
+            <a:extLst>
+              <a:ext uri="{FF2B5EF4-FFF2-40B4-BE49-F238E27FC236}">
+                <a16:creationId xmlns:a16="http://schemas.microsoft.com/office/drawing/2014/main" id="{0FC3CE6E-FAC6-D5A2-FA10-95AE6B33FCFE}"/>
+              </a:ext>
+            </a:extLst>
+          </p:cNvPr>
+          <p:cNvSpPr/>
+          <p:nvPr/>
+        </p:nvSpPr>
+        <p:spPr>
+          <a:xfrm>
+            <a:off x="3243072" y="1143099"/>
+            <a:ext cx="219456" cy="0"/>
+          </a:xfrm>
+          <a:prstGeom prst="line">
+            <a:avLst/>
+          </a:prstGeom>
+          <a:noFill/>
+          <a:ln w="15240">
+            <a:solidFill>
+              <a:srgbClr val="2F704F"/>
+            </a:solidFill>
+            <a:prstDash val="solid"/>
+            <a:tailEnd type="triangle"/>
+          </a:ln>
+        </p:spPr>
+        <p:txBody>
+          <a:bodyPr/>
+          <a:lstStyle/>
+          <a:p>
+            <a:endParaRPr lang="en-GB"/>
+          </a:p>
+        </p:txBody>
+      </p:sp>
+      <p:sp>
+        <p:nvSpPr>
+          <p:cNvPr id="11" name="Text 6">
+            <a:extLst>
+              <a:ext uri="{FF2B5EF4-FFF2-40B4-BE49-F238E27FC236}">
+                <a16:creationId xmlns:a16="http://schemas.microsoft.com/office/drawing/2014/main" id="{63806288-7E96-F634-2749-6B81A5D73DD5}"/>
+              </a:ext>
+            </a:extLst>
+          </p:cNvPr>
+          <p:cNvSpPr/>
+          <p:nvPr/>
+        </p:nvSpPr>
+        <p:spPr>
+          <a:xfrm>
+            <a:off x="3535680" y="823059"/>
+            <a:ext cx="1325880" cy="640080"/>
+          </a:xfrm>
+          <a:prstGeom prst="rect">
+            <a:avLst/>
+          </a:prstGeom>
+          <a:solidFill>
+            <a:srgbClr val="FFFFFF"/>
+          </a:solidFill>
+          <a:ln w="12700">
+            <a:solidFill>
+              <a:srgbClr val="2F704F"/>
+            </a:solidFill>
+          </a:ln>
+        </p:spPr>
+        <p:txBody>
+          <a:bodyPr wrap="square" lIns="762" tIns="762" rIns="762" bIns="762" rtlCol="0" anchor="ctr">
+            <a:normAutofit/>
+          </a:bodyPr>
+          <a:lstStyle/>
+          <a:p>
+            <a:pPr marL="0" indent="0" algn="ctr">
+              <a:buNone/>
+            </a:pPr>
+            <a:r>
+              <a:rPr lang="en-US" sz="1200" dirty="0">
+                <a:solidFill>
+                  <a:srgbClr val="111111"/>
+                </a:solidFill>
+                <a:latin typeface="Gill Sans" pitchFamily="34" charset="0"/>
+                <a:ea typeface="Gill Sans" pitchFamily="34" charset="-122"/>
+                <a:cs typeface="Gill Sans" pitchFamily="34" charset="-120"/>
+              </a:rPr>
+              <a:t>ChIP QC</a:t>
+            </a:r>
+            <a:endParaRPr lang="en-US" sz="1200" dirty="0"/>
+          </a:p>
+          <a:p>
+            <a:pPr marL="0" indent="0" algn="ctr">
+              <a:buNone/>
+            </a:pPr>
+            <a:r>
+              <a:rPr lang="en-US" sz="1200" dirty="0">
+                <a:solidFill>
+                  <a:srgbClr val="111111"/>
+                </a:solidFill>
+                <a:latin typeface="Gill Sans" pitchFamily="34" charset="0"/>
+                <a:ea typeface="Gill Sans" pitchFamily="34" charset="-122"/>
+                <a:cs typeface="Gill Sans" pitchFamily="34" charset="-120"/>
+              </a:rPr>
+              <a:t>phantom peak</a:t>
+            </a:r>
+            <a:endParaRPr lang="en-US" sz="1200" dirty="0"/>
+          </a:p>
+        </p:txBody>
+      </p:sp>
+      <p:sp>
+        <p:nvSpPr>
+          <p:cNvPr id="12" name="Shape 7">
+            <a:extLst>
+              <a:ext uri="{FF2B5EF4-FFF2-40B4-BE49-F238E27FC236}">
+                <a16:creationId xmlns:a16="http://schemas.microsoft.com/office/drawing/2014/main" id="{B610415E-A93C-745E-4856-6DF6BA2C08B2}"/>
+              </a:ext>
+            </a:extLst>
+          </p:cNvPr>
+          <p:cNvSpPr/>
+          <p:nvPr/>
+        </p:nvSpPr>
+        <p:spPr>
+          <a:xfrm>
+            <a:off x="4888992" y="1143099"/>
+            <a:ext cx="219456" cy="0"/>
+          </a:xfrm>
+          <a:prstGeom prst="line">
+            <a:avLst/>
+          </a:prstGeom>
+          <a:noFill/>
+          <a:ln w="15240">
+            <a:solidFill>
+              <a:srgbClr val="2F704F"/>
+            </a:solidFill>
+            <a:prstDash val="solid"/>
+            <a:tailEnd type="triangle"/>
+          </a:ln>
+        </p:spPr>
+        <p:txBody>
+          <a:bodyPr/>
+          <a:lstStyle/>
+          <a:p>
+            <a:endParaRPr lang="en-GB"/>
+          </a:p>
+        </p:txBody>
+      </p:sp>
+      <p:sp>
+        <p:nvSpPr>
+          <p:cNvPr id="13" name="Text 8">
+            <a:extLst>
+              <a:ext uri="{FF2B5EF4-FFF2-40B4-BE49-F238E27FC236}">
+                <a16:creationId xmlns:a16="http://schemas.microsoft.com/office/drawing/2014/main" id="{636028E9-429B-F87F-0DB2-18BE4A352F0C}"/>
+              </a:ext>
+            </a:extLst>
+          </p:cNvPr>
+          <p:cNvSpPr/>
+          <p:nvPr/>
+        </p:nvSpPr>
+        <p:spPr>
+          <a:xfrm>
+            <a:off x="5181600" y="823059"/>
+            <a:ext cx="1325880" cy="640080"/>
+          </a:xfrm>
+          <a:prstGeom prst="rect">
+            <a:avLst/>
+          </a:prstGeom>
+          <a:solidFill>
+            <a:srgbClr val="FFFFFF"/>
+          </a:solidFill>
+          <a:ln w="12700">
+            <a:solidFill>
+              <a:srgbClr val="2F704F"/>
+            </a:solidFill>
+          </a:ln>
+        </p:spPr>
+        <p:txBody>
+          <a:bodyPr wrap="square" lIns="762" tIns="762" rIns="762" bIns="762" rtlCol="0" anchor="ctr">
+            <a:normAutofit/>
+          </a:bodyPr>
+          <a:lstStyle/>
+          <a:p>
+            <a:pPr marL="0" indent="0" algn="ctr">
+              <a:buNone/>
+            </a:pPr>
+            <a:r>
+              <a:rPr lang="en-US" sz="1200" dirty="0">
+                <a:solidFill>
+                  <a:srgbClr val="111111"/>
+                </a:solidFill>
+                <a:latin typeface="Gill Sans" pitchFamily="34" charset="0"/>
+                <a:ea typeface="Gill Sans" pitchFamily="34" charset="-122"/>
+                <a:cs typeface="Gill Sans" pitchFamily="34" charset="-120"/>
+              </a:rPr>
+              <a:t>bigWig</a:t>
+            </a:r>
+            <a:endParaRPr lang="en-US" sz="1200" dirty="0"/>
+          </a:p>
+          <a:p>
+            <a:pPr marL="0" indent="0" algn="ctr">
+              <a:buNone/>
+            </a:pPr>
+            <a:r>
+              <a:rPr lang="en-US" sz="1200" dirty="0">
+                <a:solidFill>
+                  <a:srgbClr val="111111"/>
+                </a:solidFill>
+                <a:latin typeface="Gill Sans" pitchFamily="34" charset="0"/>
+                <a:ea typeface="Gill Sans" pitchFamily="34" charset="-122"/>
+                <a:cs typeface="Gill Sans" pitchFamily="34" charset="-120"/>
+              </a:rPr>
+              <a:t>tracks</a:t>
+            </a:r>
+            <a:endParaRPr lang="en-US" sz="1200" dirty="0"/>
+          </a:p>
+        </p:txBody>
+      </p:sp>
+      <p:sp>
+        <p:nvSpPr>
+          <p:cNvPr id="14" name="Shape 9">
+            <a:extLst>
+              <a:ext uri="{FF2B5EF4-FFF2-40B4-BE49-F238E27FC236}">
+                <a16:creationId xmlns:a16="http://schemas.microsoft.com/office/drawing/2014/main" id="{DC79F522-C27E-C1D7-6E51-2C80555A17E5}"/>
+              </a:ext>
+            </a:extLst>
+          </p:cNvPr>
+          <p:cNvSpPr/>
+          <p:nvPr/>
+        </p:nvSpPr>
+        <p:spPr>
+          <a:xfrm>
+            <a:off x="6534912" y="1143099"/>
+            <a:ext cx="219456" cy="0"/>
+          </a:xfrm>
+          <a:prstGeom prst="line">
+            <a:avLst/>
+          </a:prstGeom>
+          <a:noFill/>
+          <a:ln w="15240">
+            <a:solidFill>
+              <a:srgbClr val="2F704F"/>
+            </a:solidFill>
+            <a:prstDash val="solid"/>
+            <a:tailEnd type="triangle"/>
+          </a:ln>
+        </p:spPr>
+        <p:txBody>
+          <a:bodyPr/>
+          <a:lstStyle/>
+          <a:p>
+            <a:endParaRPr lang="en-GB"/>
+          </a:p>
+        </p:txBody>
+      </p:sp>
+      <p:sp>
+        <p:nvSpPr>
+          <p:cNvPr id="15" name="Text 10">
+            <a:extLst>
+              <a:ext uri="{FF2B5EF4-FFF2-40B4-BE49-F238E27FC236}">
+                <a16:creationId xmlns:a16="http://schemas.microsoft.com/office/drawing/2014/main" id="{0E6BD326-C877-753E-19CA-D24E338337C1}"/>
+              </a:ext>
+            </a:extLst>
+          </p:cNvPr>
+          <p:cNvSpPr/>
+          <p:nvPr/>
+        </p:nvSpPr>
+        <p:spPr>
+          <a:xfrm>
+            <a:off x="6827520" y="823059"/>
+            <a:ext cx="1325880" cy="640080"/>
+          </a:xfrm>
+          <a:prstGeom prst="rect">
+            <a:avLst/>
+          </a:prstGeom>
+          <a:solidFill>
+            <a:srgbClr val="FF0000"/>
+          </a:solidFill>
+          <a:ln w="12700">
+            <a:solidFill>
+              <a:srgbClr val="2F704F"/>
+            </a:solidFill>
+          </a:ln>
+        </p:spPr>
+        <p:txBody>
+          <a:bodyPr wrap="square" lIns="762" tIns="762" rIns="762" bIns="762" rtlCol="0" anchor="ctr">
+            <a:normAutofit/>
+          </a:bodyPr>
+          <a:lstStyle/>
+          <a:p>
+            <a:pPr marL="0" indent="0" algn="ctr">
+              <a:buNone/>
+            </a:pPr>
+            <a:r>
+              <a:rPr lang="en-US" sz="1200" dirty="0">
+                <a:solidFill>
+                  <a:schemeClr val="bg1"/>
+                </a:solidFill>
+                <a:latin typeface="Gill Sans" pitchFamily="34" charset="0"/>
+                <a:ea typeface="Gill Sans" pitchFamily="34" charset="-122"/>
+                <a:cs typeface="Gill Sans" pitchFamily="34" charset="-120"/>
+              </a:rPr>
+              <a:t>MACS3</a:t>
+            </a:r>
+            <a:endParaRPr lang="en-US" sz="1200" dirty="0">
+              <a:solidFill>
+                <a:schemeClr val="bg1"/>
+              </a:solidFill>
+            </a:endParaRPr>
+          </a:p>
+          <a:p>
+            <a:pPr marL="0" indent="0" algn="ctr">
+              <a:buNone/>
+            </a:pPr>
+            <a:r>
+              <a:rPr lang="en-US" sz="1200" dirty="0">
+                <a:solidFill>
+                  <a:schemeClr val="bg1"/>
+                </a:solidFill>
+                <a:latin typeface="Gill Sans" pitchFamily="34" charset="0"/>
+                <a:ea typeface="Gill Sans" pitchFamily="34" charset="-122"/>
+                <a:cs typeface="Gill Sans" pitchFamily="34" charset="-120"/>
+              </a:rPr>
+              <a:t>peaks</a:t>
+            </a:r>
+            <a:endParaRPr lang="en-US" sz="1200" dirty="0">
+              <a:solidFill>
+                <a:schemeClr val="bg1"/>
+              </a:solidFill>
+            </a:endParaRPr>
+          </a:p>
+        </p:txBody>
+      </p:sp>
+      <p:sp>
+        <p:nvSpPr>
+          <p:cNvPr id="16" name="Title 1">
+            <a:extLst>
+              <a:ext uri="{FF2B5EF4-FFF2-40B4-BE49-F238E27FC236}">
+                <a16:creationId xmlns:a16="http://schemas.microsoft.com/office/drawing/2014/main" id="{73B0B448-3769-DFFA-3B1A-47834B4848BF}"/>
+              </a:ext>
+            </a:extLst>
+          </p:cNvPr>
+          <p:cNvSpPr>
+            <a:spLocks noGrp="1"/>
+          </p:cNvSpPr>
+          <p:nvPr>
+            <p:ph type="title"/>
+          </p:nvPr>
+        </p:nvSpPr>
+        <p:spPr>
+          <a:xfrm>
+            <a:off x="155985" y="143352"/>
+            <a:ext cx="10524207" cy="551051"/>
+          </a:xfrm>
+        </p:spPr>
+        <p:txBody>
+          <a:bodyPr>
+            <a:normAutofit/>
+          </a:bodyPr>
+          <a:lstStyle/>
+          <a:p>
+            <a:r>
+              <a:rPr lang="en-IT" sz="3200" dirty="0"/>
+              <a:t>MACS3: from aligned fragments to ChIP enrichment</a:t>
+            </a:r>
+            <a:endParaRPr lang="en-GB" sz="3200" dirty="0"/>
+          </a:p>
+        </p:txBody>
+      </p:sp>
+      <p:sp>
+        <p:nvSpPr>
+          <p:cNvPr id="18" name="TextBox 17">
+            <a:extLst>
+              <a:ext uri="{FF2B5EF4-FFF2-40B4-BE49-F238E27FC236}">
+                <a16:creationId xmlns:a16="http://schemas.microsoft.com/office/drawing/2014/main" id="{7F3B26F0-AD19-D11A-171D-6D2EF6E0ABC1}"/>
+              </a:ext>
+            </a:extLst>
+          </p:cNvPr>
+          <p:cNvSpPr txBox="1"/>
+          <p:nvPr/>
+        </p:nvSpPr>
+        <p:spPr>
+          <a:xfrm>
+            <a:off x="155985" y="1911835"/>
+            <a:ext cx="11938480" cy="4524315"/>
+          </a:xfrm>
+          <a:prstGeom prst="rect">
+            <a:avLst/>
+          </a:prstGeom>
+          <a:noFill/>
+        </p:spPr>
+        <p:txBody>
+          <a:bodyPr wrap="square">
+            <a:spAutoFit/>
+          </a:bodyPr>
+          <a:lstStyle/>
+          <a:p>
+            <a:pPr marL="342900" indent="-342900">
+              <a:buAutoNum type="arabicPeriod"/>
+            </a:pPr>
+            <a:r>
+              <a:rPr lang="en-IT" sz="1600" dirty="0">
+                <a:solidFill>
+                  <a:srgbClr val="00B050"/>
+                </a:solidFill>
+              </a:rPr>
+              <a:t>Build the observed ChIP signal:</a:t>
+            </a:r>
+          </a:p>
+          <a:p>
+            <a:pPr marL="857250" lvl="1" indent="-400050">
+              <a:buAutoNum type="romanLcParenR"/>
+            </a:pPr>
+            <a:r>
+              <a:rPr lang="en-GB" sz="1600" dirty="0"/>
+              <a:t>Fragment are reconstructed either directly from the BAMPE or using the shift of FW and RW like the </a:t>
+            </a:r>
+            <a:r>
+              <a:rPr lang="en-GB" sz="1600" dirty="0" err="1"/>
+              <a:t>Phantompeak</a:t>
+            </a:r>
+            <a:r>
+              <a:rPr lang="en-GB" sz="1600" dirty="0"/>
+              <a:t> trick.</a:t>
+            </a:r>
+          </a:p>
+          <a:p>
+            <a:pPr marL="857250" lvl="1" indent="-400050">
+              <a:buAutoNum type="romanLcParenR"/>
+            </a:pPr>
+            <a:r>
+              <a:rPr lang="en-IT" sz="1600" dirty="0"/>
+              <a:t>Overlapping fragments generate the </a:t>
+            </a:r>
+            <a:r>
+              <a:rPr lang="en-IT" sz="1600" b="1" dirty="0"/>
+              <a:t>observed pileup</a:t>
+            </a:r>
+            <a:r>
+              <a:rPr lang="en-IT" sz="1600" dirty="0"/>
+              <a:t> k(x) across the genome.</a:t>
+            </a:r>
+            <a:endParaRPr lang="en-GB" sz="1600" dirty="0"/>
+          </a:p>
+          <a:p>
+            <a:pPr marL="342900" indent="-342900">
+              <a:buAutoNum type="arabicPeriod"/>
+            </a:pPr>
+            <a:endParaRPr lang="en-GB" sz="1600" dirty="0"/>
+          </a:p>
+          <a:p>
+            <a:pPr marL="342900" indent="-342900">
+              <a:buAutoNum type="arabicPeriod"/>
+            </a:pPr>
+            <a:r>
+              <a:rPr lang="en-IT" sz="1600" dirty="0">
+                <a:solidFill>
+                  <a:srgbClr val="00B050"/>
+                </a:solidFill>
+              </a:rPr>
+              <a:t>Define the expected background</a:t>
+            </a:r>
+            <a:r>
+              <a:rPr lang="en-IT" sz="1600" dirty="0"/>
+              <a:t>:</a:t>
+            </a:r>
+          </a:p>
+          <a:p>
+            <a:pPr marL="857250" lvl="1" indent="-400050">
+              <a:buAutoNum type="romanLcParenR"/>
+            </a:pPr>
+            <a:r>
+              <a:rPr lang="en-IT" sz="1600" dirty="0"/>
+              <a:t>For each genomic region, MACS3 asks: </a:t>
+            </a:r>
+            <a:r>
+              <a:rPr lang="en-IT" sz="1600" b="1" dirty="0"/>
+              <a:t>how much signal would we expect in the absence of specific enrichment?</a:t>
+            </a:r>
+          </a:p>
+          <a:p>
+            <a:pPr marL="857250" lvl="1" indent="-400050">
+              <a:buAutoNum type="romanLcParenR"/>
+            </a:pPr>
+            <a:r>
+              <a:rPr lang="en-US" sz="1600" dirty="0"/>
+              <a:t>BG is constructed from control samples (like input) or internally from the actual sample.</a:t>
+            </a:r>
+          </a:p>
+          <a:p>
+            <a:pPr marL="857250" lvl="1" indent="-400050">
+              <a:buAutoNum type="romanLcParenR"/>
+            </a:pPr>
+            <a:r>
+              <a:rPr lang="en-IT" sz="1600" dirty="0"/>
+              <a:t>MACS3 considers background at different spatial scales: </a:t>
+            </a:r>
+            <a:r>
+              <a:rPr lang="en-IT" sz="1600" b="1" dirty="0"/>
+              <a:t>genome-wide background</a:t>
+            </a:r>
+            <a:r>
+              <a:rPr lang="en-IT" sz="1600" dirty="0"/>
+              <a:t>, </a:t>
+            </a:r>
+            <a:r>
+              <a:rPr lang="en-IT" sz="1600" b="1" dirty="0"/>
+              <a:t>fragment-scale background</a:t>
+            </a:r>
+            <a:r>
+              <a:rPr lang="en-IT" sz="1600" dirty="0"/>
+              <a:t>, </a:t>
+            </a:r>
+            <a:r>
+              <a:rPr lang="en-IT" sz="1600" b="1" dirty="0"/>
+              <a:t>local background</a:t>
+            </a:r>
+            <a:r>
+              <a:rPr lang="en-IT" sz="1600" dirty="0"/>
+              <a:t>, </a:t>
+            </a:r>
+            <a:r>
+              <a:rPr lang="en-IT" sz="1600" b="1" dirty="0"/>
+              <a:t>broader local background </a:t>
+            </a:r>
+            <a:r>
+              <a:rPr lang="en-IT" sz="1600" dirty="0"/>
+              <a:t>-&gt; It uses the largest of these! i.e MACS says my expected intesities are potentially : global average signal, or different local level signals</a:t>
+            </a:r>
+          </a:p>
+          <a:p>
+            <a:pPr marL="342900" indent="-342900">
+              <a:buAutoNum type="arabicPeriod"/>
+            </a:pPr>
+            <a:endParaRPr lang="en-IT" sz="1600" dirty="0"/>
+          </a:p>
+          <a:p>
+            <a:pPr marL="342900" indent="-342900">
+              <a:buAutoNum type="arabicPeriod"/>
+            </a:pPr>
+            <a:r>
+              <a:rPr lang="en-IT" sz="1600" dirty="0">
+                <a:solidFill>
+                  <a:srgbClr val="00B050"/>
+                </a:solidFill>
+              </a:rPr>
+              <a:t>Convert significant enrichment into peaks:</a:t>
+            </a:r>
+          </a:p>
+          <a:p>
+            <a:pPr marL="857250" lvl="1" indent="-400050">
+              <a:buAutoNum type="romanLcParenR"/>
+            </a:pPr>
+            <a:r>
+              <a:rPr lang="en-IT" sz="1600" dirty="0"/>
+              <a:t>MACS3 compares observed pileup and expected (BG) using a </a:t>
+            </a:r>
+            <a:r>
+              <a:rPr lang="en-IT" sz="1600" b="1" dirty="0"/>
+              <a:t>Poisson model</a:t>
+            </a:r>
+            <a:r>
+              <a:rPr lang="en-IT" sz="1600" dirty="0"/>
+              <a:t>. Meaning Observed ~ Poisson(Expected) so we get how likely it is to see that observed signal given the expected signal and its theoretical distribution of the error.</a:t>
+            </a:r>
+          </a:p>
+          <a:p>
+            <a:pPr marL="857250" lvl="1" indent="-400050">
+              <a:buAutoNum type="romanLcParenR"/>
+            </a:pPr>
+            <a:r>
+              <a:rPr lang="en-IT" sz="1600" dirty="0"/>
+              <a:t>It then select those significant – join nearby portions – apply some rule for gapping – compute p and then q values - generate the peakfile!</a:t>
+            </a:r>
+          </a:p>
+          <a:p>
+            <a:pPr marL="400050" indent="-400050">
+              <a:buAutoNum type="romanLcParenR"/>
+            </a:pPr>
+            <a:endParaRPr lang="en-IT" sz="1600" dirty="0"/>
+          </a:p>
+          <a:p>
+            <a:endParaRPr lang="en-IT" sz="1600" dirty="0"/>
+          </a:p>
+        </p:txBody>
+      </p:sp>
+    </p:spTree>
+    <p:extLst>
+      <p:ext uri="{BB962C8B-B14F-4D97-AF65-F5344CB8AC3E}">
+        <p14:creationId xmlns:p14="http://schemas.microsoft.com/office/powerpoint/2010/main" val="3394874389"/>
+      </p:ext>
+    </p:extLst>
+  </p:cSld>
+  <p:clrMapOvr>
+    <a:masterClrMapping/>
+  </p:clrMapOvr>
+  <p:timing>
+    <p:tnLst>
+      <p:par>
+        <p:cTn id="1" dur="indefinite" restart="never" nodeType="tmRoot">
+          <p:childTnLst>
+            <p:seq concurrent="1" nextAc="seek">
+              <p:cTn id="2" dur="indefinite" nodeType="mainSeq">
+                <p:childTnLst>
+                  <p:par>
+                    <p:cTn id="3" fill="hold">
+                      <p:stCondLst>
+                        <p:cond delay="indefinite"/>
+                      </p:stCondLst>
+                      <p:childTnLst>
+                        <p:par>
+                          <p:cTn id="4" fill="hold">
+                            <p:stCondLst>
+                              <p:cond delay="0"/>
+                            </p:stCondLst>
+                            <p:childTnLst>
+                              <p:par>
+                                <p:cTn id="5" presetID="1" presetClass="entr" presetSubtype="0" fill="hold" grpId="0" nodeType="clickEffect">
+                                  <p:stCondLst>
+                                    <p:cond delay="0"/>
+                                  </p:stCondLst>
+                                  <p:childTnLst>
+                                    <p:set>
+                                      <p:cBhvr>
+                                        <p:cTn id="6" dur="1" fill="hold">
+                                          <p:stCondLst>
+                                            <p:cond delay="0"/>
+                                          </p:stCondLst>
+                                        </p:cTn>
+                                        <p:tgtEl>
+                                          <p:spTgt spid="18"/>
+                                        </p:tgtEl>
+                                        <p:attrNameLst>
+                                          <p:attrName>style.visibility</p:attrName>
+                                        </p:attrNameLst>
+                                      </p:cBhvr>
+                                      <p:to>
+                                        <p:strVal val="visible"/>
+                                      </p:to>
+                                    </p:set>
+                                  </p:childTnLst>
+                                </p:cTn>
+                              </p:par>
+                            </p:childTnLst>
+                          </p:cTn>
+                        </p:par>
+                      </p:childTnLst>
+                    </p:cTn>
+                  </p:par>
+                </p:childTnLst>
+              </p:cTn>
+              <p:prevCondLst>
+                <p:cond evt="onPrev" delay="0">
+                  <p:tgtEl>
+                    <p:sldTgt/>
+                  </p:tgtEl>
+                </p:cond>
+              </p:prevCondLst>
+              <p:nextCondLst>
+                <p:cond evt="onNext" delay="0">
+                  <p:tgtEl>
+                    <p:sldTgt/>
+                  </p:tgtEl>
+                </p:cond>
+              </p:nextCondLst>
+            </p:seq>
+          </p:childTnLst>
+        </p:cTn>
+      </p:par>
+    </p:tnLst>
+    <p:bldLst>
+      <p:bldP spid="18" grpId="0"/>
+    </p:bldLst>
+  </p:timing>
+</p:sld>
+</file>
+
+<file path=ppt/slides/slide12.xml><?xml version="1.0" encoding="utf-8"?>
+<p:sld xmlns:a="http://schemas.openxmlformats.org/drawingml/2006/main" xmlns:r="http://schemas.openxmlformats.org/officeDocument/2006/relationships" xmlns:p="http://schemas.openxmlformats.org/presentationml/2006/main">
+  <p:cSld>
+    <p:spTree>
+      <p:nvGrpSpPr>
+        <p:cNvPr id="1" name=""/>
+        <p:cNvGrpSpPr/>
+        <p:nvPr/>
+      </p:nvGrpSpPr>
+      <p:grpSpPr>
+        <a:xfrm>
+          <a:off x="0" y="0"/>
+          <a:ext cx="0" cy="0"/>
+          <a:chOff x="0" y="0"/>
+          <a:chExt cx="0" cy="0"/>
+        </a:xfrm>
+      </p:grpSpPr>
+      <p:sp>
+        <p:nvSpPr>
+          <p:cNvPr id="4" name="Date Placeholder 3">
+            <a:extLst>
+              <a:ext uri="{FF2B5EF4-FFF2-40B4-BE49-F238E27FC236}">
+                <a16:creationId xmlns:a16="http://schemas.microsoft.com/office/drawing/2014/main" id="{4D0F476B-F93A-F44E-C839-0EE0EDB8C20E}"/>
+              </a:ext>
+            </a:extLst>
+          </p:cNvPr>
+          <p:cNvSpPr>
+            <a:spLocks noGrp="1"/>
+          </p:cNvSpPr>
+          <p:nvPr>
+            <p:ph type="dt" sz="half" idx="10"/>
+          </p:nvPr>
+        </p:nvSpPr>
+        <p:spPr/>
+        <p:txBody>
+          <a:bodyPr/>
+          <a:lstStyle/>
+          <a:p>
+            <a:fld id="{761DFEEA-1162-B343-ACBF-B3E92F6AC390}" type="datetime1">
+              <a:rPr lang="it-IT" smtClean="0"/>
+              <a:t>15/10/26</a:t>
+            </a:fld>
+            <a:endParaRPr lang="en-GB"/>
+          </a:p>
+        </p:txBody>
+      </p:sp>
+      <p:sp>
+        <p:nvSpPr>
+          <p:cNvPr id="5" name="Footer Placeholder 4">
+            <a:extLst>
+              <a:ext uri="{FF2B5EF4-FFF2-40B4-BE49-F238E27FC236}">
+                <a16:creationId xmlns:a16="http://schemas.microsoft.com/office/drawing/2014/main" id="{184472E6-C3DC-1337-FAA3-BEE2B67AFA1B}"/>
+              </a:ext>
+            </a:extLst>
+          </p:cNvPr>
+          <p:cNvSpPr>
+            <a:spLocks noGrp="1"/>
+          </p:cNvSpPr>
+          <p:nvPr>
+            <p:ph type="ftr" sz="quarter" idx="11"/>
+          </p:nvPr>
+        </p:nvSpPr>
+        <p:spPr/>
+        <p:txBody>
+          <a:bodyPr/>
+          <a:lstStyle/>
+          <a:p>
+            <a:r>
+              <a:rPr lang="en-GB"/>
+              <a:t>Day 1: Reproducible NGS Data Analysis on Personal Laptops</a:t>
+            </a:r>
+          </a:p>
+        </p:txBody>
+      </p:sp>
+      <p:sp>
+        <p:nvSpPr>
+          <p:cNvPr id="6" name="Slide Number Placeholder 5">
+            <a:extLst>
+              <a:ext uri="{FF2B5EF4-FFF2-40B4-BE49-F238E27FC236}">
+                <a16:creationId xmlns:a16="http://schemas.microsoft.com/office/drawing/2014/main" id="{61F68FD3-3625-0E40-FA59-6838B5ABEABF}"/>
+              </a:ext>
+            </a:extLst>
+          </p:cNvPr>
+          <p:cNvSpPr>
+            <a:spLocks noGrp="1"/>
+          </p:cNvSpPr>
+          <p:nvPr>
+            <p:ph type="sldNum" sz="quarter" idx="12"/>
+          </p:nvPr>
+        </p:nvSpPr>
+        <p:spPr/>
+        <p:txBody>
+          <a:bodyPr/>
+          <a:lstStyle/>
+          <a:p>
+            <a:fld id="{62E92BA6-6E87-3343-8D2C-B7A656D628E4}" type="slidenum">
+              <a:rPr lang="en-GB" smtClean="0"/>
+              <a:t>11</a:t>
+            </a:fld>
+            <a:endParaRPr lang="en-GB"/>
+          </a:p>
+        </p:txBody>
+      </p:sp>
+      <p:sp>
+        <p:nvSpPr>
+          <p:cNvPr id="7" name="Title 1">
+            <a:extLst>
+              <a:ext uri="{FF2B5EF4-FFF2-40B4-BE49-F238E27FC236}">
+                <a16:creationId xmlns:a16="http://schemas.microsoft.com/office/drawing/2014/main" id="{5867F66F-A207-5D96-E7DA-A3884D68C5FB}"/>
+              </a:ext>
+            </a:extLst>
+          </p:cNvPr>
+          <p:cNvSpPr>
+            <a:spLocks noGrp="1"/>
+          </p:cNvSpPr>
+          <p:nvPr>
+            <p:ph type="title"/>
+          </p:nvPr>
+        </p:nvSpPr>
+        <p:spPr>
+          <a:xfrm>
+            <a:off x="155985" y="143352"/>
+            <a:ext cx="9414735" cy="551051"/>
+          </a:xfrm>
+        </p:spPr>
+        <p:txBody>
+          <a:bodyPr>
+            <a:normAutofit/>
+          </a:bodyPr>
+          <a:lstStyle/>
+          <a:p>
+            <a:r>
+              <a:rPr lang="en-IT" sz="3200" dirty="0"/>
+              <a:t>Control condition and Control-free peak calling:</a:t>
+            </a:r>
+            <a:endParaRPr lang="en-GB" sz="3200" dirty="0"/>
+          </a:p>
+        </p:txBody>
+      </p:sp>
+      <p:pic>
+        <p:nvPicPr>
+          <p:cNvPr id="9" name="Picture 8">
+            <a:extLst>
+              <a:ext uri="{FF2B5EF4-FFF2-40B4-BE49-F238E27FC236}">
+                <a16:creationId xmlns:a16="http://schemas.microsoft.com/office/drawing/2014/main" id="{70D574AD-2FE2-7452-6CCD-E630B58191FF}"/>
+              </a:ext>
+            </a:extLst>
+          </p:cNvPr>
+          <p:cNvPicPr>
+            <a:picLocks noChangeAspect="1"/>
+          </p:cNvPicPr>
+          <p:nvPr/>
+        </p:nvPicPr>
+        <p:blipFill>
+          <a:blip r:embed="rId2"/>
+          <a:stretch>
+            <a:fillRect/>
+          </a:stretch>
+        </p:blipFill>
+        <p:spPr>
+          <a:xfrm>
+            <a:off x="285622" y="1387255"/>
+            <a:ext cx="11620755" cy="4276243"/>
+          </a:xfrm>
+          <a:prstGeom prst="rect">
+            <a:avLst/>
+          </a:prstGeom>
+          <a:ln w="28575">
+            <a:solidFill>
+              <a:schemeClr val="tx1"/>
+            </a:solidFill>
+          </a:ln>
+        </p:spPr>
+      </p:pic>
+    </p:spTree>
+    <p:extLst>
+      <p:ext uri="{BB962C8B-B14F-4D97-AF65-F5344CB8AC3E}">
+        <p14:creationId xmlns:p14="http://schemas.microsoft.com/office/powerpoint/2010/main" val="3213431792"/>
+      </p:ext>
+    </p:extLst>
+  </p:cSld>
+  <p:clrMapOvr>
+    <a:masterClrMapping/>
+  </p:clrMapOvr>
+</p:sld>
+</file>
+
+<file path=ppt/slides/slide13.xml><?xml version="1.0" encoding="utf-8"?>
+<p:sld xmlns:a="http://schemas.openxmlformats.org/drawingml/2006/main" xmlns:r="http://schemas.openxmlformats.org/officeDocument/2006/relationships" xmlns:p="http://schemas.openxmlformats.org/presentationml/2006/main">
+  <p:cSld>
+    <p:spTree>
+      <p:nvGrpSpPr>
+        <p:cNvPr id="1" name=""/>
+        <p:cNvGrpSpPr/>
+        <p:nvPr/>
+      </p:nvGrpSpPr>
+      <p:grpSpPr>
+        <a:xfrm>
+          <a:off x="0" y="0"/>
+          <a:ext cx="0" cy="0"/>
+          <a:chOff x="0" y="0"/>
+          <a:chExt cx="0" cy="0"/>
+        </a:xfrm>
+      </p:grpSpPr>
+      <p:sp>
+        <p:nvSpPr>
+          <p:cNvPr id="4" name="Date Placeholder 3">
+            <a:extLst>
+              <a:ext uri="{FF2B5EF4-FFF2-40B4-BE49-F238E27FC236}">
+                <a16:creationId xmlns:a16="http://schemas.microsoft.com/office/drawing/2014/main" id="{48EB20C5-5AEF-F776-1AE3-A90C2C0DE936}"/>
+              </a:ext>
+            </a:extLst>
+          </p:cNvPr>
+          <p:cNvSpPr>
+            <a:spLocks noGrp="1"/>
+          </p:cNvSpPr>
+          <p:nvPr>
+            <p:ph type="dt" sz="half" idx="10"/>
+          </p:nvPr>
+        </p:nvSpPr>
+        <p:spPr/>
+        <p:txBody>
+          <a:bodyPr/>
+          <a:lstStyle/>
+          <a:p>
+            <a:fld id="{761DFEEA-1162-B343-ACBF-B3E92F6AC390}" type="datetime1">
+              <a:rPr lang="it-IT" smtClean="0"/>
+              <a:t>15/10/26</a:t>
+            </a:fld>
+            <a:endParaRPr lang="en-GB"/>
+          </a:p>
+        </p:txBody>
+      </p:sp>
+      <p:sp>
+        <p:nvSpPr>
+          <p:cNvPr id="5" name="Footer Placeholder 4">
+            <a:extLst>
+              <a:ext uri="{FF2B5EF4-FFF2-40B4-BE49-F238E27FC236}">
+                <a16:creationId xmlns:a16="http://schemas.microsoft.com/office/drawing/2014/main" id="{B04E9174-8DF0-2675-8B68-953439908917}"/>
+              </a:ext>
+            </a:extLst>
+          </p:cNvPr>
+          <p:cNvSpPr>
+            <a:spLocks noGrp="1"/>
+          </p:cNvSpPr>
+          <p:nvPr>
+            <p:ph type="ftr" sz="quarter" idx="11"/>
+          </p:nvPr>
+        </p:nvSpPr>
+        <p:spPr/>
+        <p:txBody>
+          <a:bodyPr/>
+          <a:lstStyle/>
+          <a:p>
+            <a:r>
+              <a:rPr lang="en-GB"/>
+              <a:t>Day 1: Reproducible NGS Data Analysis on Personal Laptops</a:t>
+            </a:r>
+          </a:p>
+        </p:txBody>
+      </p:sp>
+      <p:sp>
+        <p:nvSpPr>
+          <p:cNvPr id="6" name="Slide Number Placeholder 5">
+            <a:extLst>
+              <a:ext uri="{FF2B5EF4-FFF2-40B4-BE49-F238E27FC236}">
+                <a16:creationId xmlns:a16="http://schemas.microsoft.com/office/drawing/2014/main" id="{7ABA7BD0-A2FD-BCBF-0B22-4FB0E375A484}"/>
+              </a:ext>
+            </a:extLst>
+          </p:cNvPr>
+          <p:cNvSpPr>
+            <a:spLocks noGrp="1"/>
+          </p:cNvSpPr>
+          <p:nvPr>
+            <p:ph type="sldNum" sz="quarter" idx="12"/>
+          </p:nvPr>
+        </p:nvSpPr>
+        <p:spPr/>
+        <p:txBody>
+          <a:bodyPr/>
+          <a:lstStyle/>
+          <a:p>
+            <a:fld id="{62E92BA6-6E87-3343-8D2C-B7A656D628E4}" type="slidenum">
+              <a:rPr lang="en-GB" smtClean="0"/>
+              <a:t>12</a:t>
+            </a:fld>
+            <a:endParaRPr lang="en-GB"/>
+          </a:p>
+        </p:txBody>
+      </p:sp>
+      <p:sp>
+        <p:nvSpPr>
+          <p:cNvPr id="7" name="Title 1">
+            <a:extLst>
+              <a:ext uri="{FF2B5EF4-FFF2-40B4-BE49-F238E27FC236}">
+                <a16:creationId xmlns:a16="http://schemas.microsoft.com/office/drawing/2014/main" id="{879F5670-A0C1-EA68-AA92-558F8EB5C765}"/>
+              </a:ext>
+            </a:extLst>
+          </p:cNvPr>
+          <p:cNvSpPr>
+            <a:spLocks noGrp="1"/>
+          </p:cNvSpPr>
+          <p:nvPr>
+            <p:ph type="title"/>
+          </p:nvPr>
+        </p:nvSpPr>
+        <p:spPr>
+          <a:xfrm>
+            <a:off x="155985" y="143352"/>
+            <a:ext cx="9414735" cy="551051"/>
+          </a:xfrm>
+        </p:spPr>
+        <p:txBody>
+          <a:bodyPr>
+            <a:normAutofit fontScale="90000"/>
+          </a:bodyPr>
+          <a:lstStyle/>
+          <a:p>
+            <a:r>
+              <a:rPr lang="en-IT" b="1" dirty="0"/>
+              <a:t>Post-peak quality control</a:t>
+            </a:r>
+          </a:p>
+        </p:txBody>
+      </p:sp>
+      <p:sp>
+        <p:nvSpPr>
+          <p:cNvPr id="8" name="Text 2">
+            <a:extLst>
+              <a:ext uri="{FF2B5EF4-FFF2-40B4-BE49-F238E27FC236}">
+                <a16:creationId xmlns:a16="http://schemas.microsoft.com/office/drawing/2014/main" id="{C648B2FD-CFFC-6CA1-3F84-76E18A928531}"/>
+              </a:ext>
+            </a:extLst>
+          </p:cNvPr>
+          <p:cNvSpPr/>
+          <p:nvPr/>
+        </p:nvSpPr>
+        <p:spPr>
+          <a:xfrm>
+            <a:off x="320039" y="1286077"/>
+            <a:ext cx="1325880" cy="640080"/>
+          </a:xfrm>
+          <a:prstGeom prst="rect">
+            <a:avLst/>
+          </a:prstGeom>
+          <a:solidFill>
+            <a:srgbClr val="F6F6F6"/>
+          </a:solidFill>
+          <a:ln w="12700">
+            <a:solidFill>
+              <a:srgbClr val="2F704F"/>
+            </a:solidFill>
+          </a:ln>
+        </p:spPr>
+        <p:txBody>
+          <a:bodyPr wrap="square" lIns="762" tIns="762" rIns="762" bIns="762" rtlCol="0" anchor="ctr">
+            <a:normAutofit/>
+          </a:bodyPr>
+          <a:lstStyle/>
+          <a:p>
+            <a:pPr marL="0" indent="0" algn="ctr">
+              <a:buNone/>
+            </a:pPr>
+            <a:r>
+              <a:rPr lang="en-US" sz="1200" dirty="0">
+                <a:solidFill>
+                  <a:srgbClr val="111111"/>
+                </a:solidFill>
+                <a:latin typeface="Gill Sans" pitchFamily="34" charset="0"/>
+                <a:ea typeface="Gill Sans" pitchFamily="34" charset="-122"/>
+                <a:cs typeface="Gill Sans" pitchFamily="34" charset="-120"/>
+              </a:rPr>
+              <a:t>FASTQ</a:t>
+            </a:r>
+            <a:endParaRPr lang="en-US" sz="1200" dirty="0"/>
+          </a:p>
+        </p:txBody>
+      </p:sp>
+      <p:sp>
+        <p:nvSpPr>
+          <p:cNvPr id="9" name="Shape 3">
+            <a:extLst>
+              <a:ext uri="{FF2B5EF4-FFF2-40B4-BE49-F238E27FC236}">
+                <a16:creationId xmlns:a16="http://schemas.microsoft.com/office/drawing/2014/main" id="{E054935D-12F5-C156-1030-C693E7EA736A}"/>
+              </a:ext>
+            </a:extLst>
+          </p:cNvPr>
+          <p:cNvSpPr/>
+          <p:nvPr/>
+        </p:nvSpPr>
+        <p:spPr>
+          <a:xfrm>
+            <a:off x="1673351" y="1606117"/>
+            <a:ext cx="219456" cy="0"/>
+          </a:xfrm>
+          <a:prstGeom prst="line">
+            <a:avLst/>
+          </a:prstGeom>
+          <a:noFill/>
+          <a:ln w="15240">
+            <a:solidFill>
+              <a:srgbClr val="2F704F"/>
+            </a:solidFill>
+            <a:prstDash val="solid"/>
+            <a:tailEnd type="triangle"/>
+          </a:ln>
+        </p:spPr>
+        <p:txBody>
+          <a:bodyPr/>
+          <a:lstStyle/>
+          <a:p>
+            <a:endParaRPr lang="en-GB"/>
+          </a:p>
+        </p:txBody>
+      </p:sp>
+      <p:sp>
+        <p:nvSpPr>
+          <p:cNvPr id="10" name="Text 4">
+            <a:extLst>
+              <a:ext uri="{FF2B5EF4-FFF2-40B4-BE49-F238E27FC236}">
+                <a16:creationId xmlns:a16="http://schemas.microsoft.com/office/drawing/2014/main" id="{16EE36DA-24ED-529D-647F-CB8ECFB49ED4}"/>
+              </a:ext>
+            </a:extLst>
+          </p:cNvPr>
+          <p:cNvSpPr/>
+          <p:nvPr/>
+        </p:nvSpPr>
+        <p:spPr>
+          <a:xfrm>
+            <a:off x="1965959" y="1286077"/>
+            <a:ext cx="1325880" cy="640080"/>
+          </a:xfrm>
+          <a:prstGeom prst="rect">
+            <a:avLst/>
+          </a:prstGeom>
+          <a:solidFill>
+            <a:srgbClr val="FFFFFF"/>
+          </a:solidFill>
+          <a:ln w="12700">
+            <a:solidFill>
+              <a:srgbClr val="2F704F"/>
+            </a:solidFill>
+          </a:ln>
+        </p:spPr>
+        <p:txBody>
+          <a:bodyPr wrap="square" lIns="762" tIns="762" rIns="762" bIns="762" rtlCol="0" anchor="ctr">
+            <a:normAutofit/>
+          </a:bodyPr>
+          <a:lstStyle/>
+          <a:p>
+            <a:pPr marL="0" indent="0" algn="ctr">
+              <a:buNone/>
+            </a:pPr>
+            <a:r>
+              <a:rPr lang="en-US" sz="1200" dirty="0">
+                <a:solidFill>
+                  <a:srgbClr val="111111"/>
+                </a:solidFill>
+                <a:latin typeface="Gill Sans" pitchFamily="34" charset="0"/>
+                <a:ea typeface="Gill Sans" pitchFamily="34" charset="-122"/>
+                <a:cs typeface="Gill Sans" pitchFamily="34" charset="-120"/>
+              </a:rPr>
+              <a:t>Bowtie2</a:t>
+            </a:r>
+            <a:endParaRPr lang="en-US" sz="1200" dirty="0"/>
+          </a:p>
+          <a:p>
+            <a:pPr marL="0" indent="0" algn="ctr">
+              <a:buNone/>
+            </a:pPr>
+            <a:r>
+              <a:rPr lang="en-US" sz="1200" dirty="0">
+                <a:solidFill>
+                  <a:srgbClr val="111111"/>
+                </a:solidFill>
+                <a:latin typeface="Gill Sans" pitchFamily="34" charset="0"/>
+                <a:ea typeface="Gill Sans" pitchFamily="34" charset="-122"/>
+                <a:cs typeface="Gill Sans" pitchFamily="34" charset="-120"/>
+              </a:rPr>
+              <a:t>BAM</a:t>
+            </a:r>
+            <a:endParaRPr lang="en-US" sz="1200" dirty="0"/>
+          </a:p>
+        </p:txBody>
+      </p:sp>
+      <p:sp>
+        <p:nvSpPr>
+          <p:cNvPr id="11" name="Shape 5">
+            <a:extLst>
+              <a:ext uri="{FF2B5EF4-FFF2-40B4-BE49-F238E27FC236}">
+                <a16:creationId xmlns:a16="http://schemas.microsoft.com/office/drawing/2014/main" id="{6F45CC0F-F71A-5A17-D471-0EF65F65A043}"/>
+              </a:ext>
+            </a:extLst>
+          </p:cNvPr>
+          <p:cNvSpPr/>
+          <p:nvPr/>
+        </p:nvSpPr>
+        <p:spPr>
+          <a:xfrm>
+            <a:off x="3319271" y="1606117"/>
+            <a:ext cx="219456" cy="0"/>
+          </a:xfrm>
+          <a:prstGeom prst="line">
+            <a:avLst/>
+          </a:prstGeom>
+          <a:noFill/>
+          <a:ln w="15240">
+            <a:solidFill>
+              <a:srgbClr val="2F704F"/>
+            </a:solidFill>
+            <a:prstDash val="solid"/>
+            <a:tailEnd type="triangle"/>
+          </a:ln>
+        </p:spPr>
+        <p:txBody>
+          <a:bodyPr/>
+          <a:lstStyle/>
+          <a:p>
+            <a:endParaRPr lang="en-GB"/>
+          </a:p>
+        </p:txBody>
+      </p:sp>
+      <p:sp>
+        <p:nvSpPr>
+          <p:cNvPr id="12" name="Text 6">
+            <a:extLst>
+              <a:ext uri="{FF2B5EF4-FFF2-40B4-BE49-F238E27FC236}">
+                <a16:creationId xmlns:a16="http://schemas.microsoft.com/office/drawing/2014/main" id="{771268DD-DC6A-2177-CF26-9126392D25BE}"/>
+              </a:ext>
+            </a:extLst>
+          </p:cNvPr>
+          <p:cNvSpPr/>
+          <p:nvPr/>
+        </p:nvSpPr>
+        <p:spPr>
+          <a:xfrm>
+            <a:off x="3611879" y="1286077"/>
+            <a:ext cx="1325880" cy="640080"/>
+          </a:xfrm>
+          <a:prstGeom prst="rect">
+            <a:avLst/>
+          </a:prstGeom>
+          <a:solidFill>
+            <a:srgbClr val="FFFFFF"/>
+          </a:solidFill>
+          <a:ln w="12700">
+            <a:solidFill>
+              <a:srgbClr val="2F704F"/>
+            </a:solidFill>
+          </a:ln>
+        </p:spPr>
+        <p:txBody>
+          <a:bodyPr wrap="square" lIns="762" tIns="762" rIns="762" bIns="762" rtlCol="0" anchor="ctr">
+            <a:normAutofit/>
+          </a:bodyPr>
+          <a:lstStyle/>
+          <a:p>
+            <a:pPr marL="0" indent="0" algn="ctr">
+              <a:buNone/>
+            </a:pPr>
+            <a:r>
+              <a:rPr lang="en-US" sz="1200" dirty="0">
+                <a:solidFill>
+                  <a:srgbClr val="111111"/>
+                </a:solidFill>
+                <a:latin typeface="Gill Sans" pitchFamily="34" charset="0"/>
+                <a:ea typeface="Gill Sans" pitchFamily="34" charset="-122"/>
+                <a:cs typeface="Gill Sans" pitchFamily="34" charset="-120"/>
+              </a:rPr>
+              <a:t>ChIP QC</a:t>
+            </a:r>
+            <a:endParaRPr lang="en-US" sz="1200" dirty="0"/>
+          </a:p>
+          <a:p>
+            <a:pPr marL="0" indent="0" algn="ctr">
+              <a:buNone/>
+            </a:pPr>
+            <a:r>
+              <a:rPr lang="en-US" sz="1200" dirty="0">
+                <a:solidFill>
+                  <a:srgbClr val="111111"/>
+                </a:solidFill>
+                <a:latin typeface="Gill Sans" pitchFamily="34" charset="0"/>
+                <a:ea typeface="Gill Sans" pitchFamily="34" charset="-122"/>
+                <a:cs typeface="Gill Sans" pitchFamily="34" charset="-120"/>
+              </a:rPr>
+              <a:t>phantom peak</a:t>
+            </a:r>
+            <a:endParaRPr lang="en-US" sz="1200" dirty="0"/>
+          </a:p>
+        </p:txBody>
+      </p:sp>
+      <p:sp>
+        <p:nvSpPr>
+          <p:cNvPr id="13" name="Shape 7">
+            <a:extLst>
+              <a:ext uri="{FF2B5EF4-FFF2-40B4-BE49-F238E27FC236}">
+                <a16:creationId xmlns:a16="http://schemas.microsoft.com/office/drawing/2014/main" id="{018B2203-1D26-CF67-69B1-4EABAEF30EE3}"/>
+              </a:ext>
+            </a:extLst>
+          </p:cNvPr>
+          <p:cNvSpPr/>
+          <p:nvPr/>
+        </p:nvSpPr>
+        <p:spPr>
+          <a:xfrm>
+            <a:off x="4965191" y="1606117"/>
+            <a:ext cx="219456" cy="0"/>
+          </a:xfrm>
+          <a:prstGeom prst="line">
+            <a:avLst/>
+          </a:prstGeom>
+          <a:noFill/>
+          <a:ln w="15240">
+            <a:solidFill>
+              <a:srgbClr val="2F704F"/>
+            </a:solidFill>
+            <a:prstDash val="solid"/>
+            <a:tailEnd type="triangle"/>
+          </a:ln>
+        </p:spPr>
+        <p:txBody>
+          <a:bodyPr/>
+          <a:lstStyle/>
+          <a:p>
+            <a:endParaRPr lang="en-GB"/>
+          </a:p>
+        </p:txBody>
+      </p:sp>
+      <p:sp>
+        <p:nvSpPr>
+          <p:cNvPr id="14" name="Text 8">
+            <a:extLst>
+              <a:ext uri="{FF2B5EF4-FFF2-40B4-BE49-F238E27FC236}">
+                <a16:creationId xmlns:a16="http://schemas.microsoft.com/office/drawing/2014/main" id="{950F42B7-52BF-55C7-2915-FF2420C4B3CE}"/>
+              </a:ext>
+            </a:extLst>
+          </p:cNvPr>
+          <p:cNvSpPr/>
+          <p:nvPr/>
+        </p:nvSpPr>
+        <p:spPr>
+          <a:xfrm>
+            <a:off x="5257799" y="1286077"/>
+            <a:ext cx="1325880" cy="640080"/>
+          </a:xfrm>
+          <a:prstGeom prst="rect">
+            <a:avLst/>
+          </a:prstGeom>
+          <a:solidFill>
+            <a:srgbClr val="FFFFFF"/>
+          </a:solidFill>
+          <a:ln w="12700">
+            <a:solidFill>
+              <a:srgbClr val="2F704F"/>
+            </a:solidFill>
+          </a:ln>
+        </p:spPr>
+        <p:txBody>
+          <a:bodyPr wrap="square" lIns="762" tIns="762" rIns="762" bIns="762" rtlCol="0" anchor="ctr">
+            <a:normAutofit/>
+          </a:bodyPr>
+          <a:lstStyle/>
+          <a:p>
+            <a:pPr marL="0" indent="0" algn="ctr">
+              <a:buNone/>
+            </a:pPr>
+            <a:r>
+              <a:rPr lang="en-US" sz="1200" dirty="0">
+                <a:solidFill>
+                  <a:srgbClr val="111111"/>
+                </a:solidFill>
+                <a:latin typeface="Gill Sans" pitchFamily="34" charset="0"/>
+                <a:ea typeface="Gill Sans" pitchFamily="34" charset="-122"/>
+                <a:cs typeface="Gill Sans" pitchFamily="34" charset="-120"/>
+              </a:rPr>
+              <a:t>bigWig</a:t>
+            </a:r>
+            <a:endParaRPr lang="en-US" sz="1200" dirty="0"/>
+          </a:p>
+          <a:p>
+            <a:pPr marL="0" indent="0" algn="ctr">
+              <a:buNone/>
+            </a:pPr>
+            <a:r>
+              <a:rPr lang="en-US" sz="1200" dirty="0">
+                <a:solidFill>
+                  <a:srgbClr val="111111"/>
+                </a:solidFill>
+                <a:latin typeface="Gill Sans" pitchFamily="34" charset="0"/>
+                <a:ea typeface="Gill Sans" pitchFamily="34" charset="-122"/>
+                <a:cs typeface="Gill Sans" pitchFamily="34" charset="-120"/>
+              </a:rPr>
+              <a:t>tracks</a:t>
+            </a:r>
+            <a:endParaRPr lang="en-US" sz="1200" dirty="0"/>
+          </a:p>
+        </p:txBody>
+      </p:sp>
+      <p:sp>
+        <p:nvSpPr>
+          <p:cNvPr id="15" name="Shape 9">
+            <a:extLst>
+              <a:ext uri="{FF2B5EF4-FFF2-40B4-BE49-F238E27FC236}">
+                <a16:creationId xmlns:a16="http://schemas.microsoft.com/office/drawing/2014/main" id="{EDD1205E-4E1D-224A-1F72-5861203F6237}"/>
+              </a:ext>
+            </a:extLst>
+          </p:cNvPr>
+          <p:cNvSpPr/>
+          <p:nvPr/>
+        </p:nvSpPr>
+        <p:spPr>
+          <a:xfrm>
+            <a:off x="6611111" y="1606117"/>
+            <a:ext cx="219456" cy="0"/>
+          </a:xfrm>
+          <a:prstGeom prst="line">
+            <a:avLst/>
+          </a:prstGeom>
+          <a:noFill/>
+          <a:ln w="15240">
+            <a:solidFill>
+              <a:srgbClr val="2F704F"/>
+            </a:solidFill>
+            <a:prstDash val="solid"/>
+            <a:tailEnd type="triangle"/>
+          </a:ln>
+        </p:spPr>
+        <p:txBody>
+          <a:bodyPr/>
+          <a:lstStyle/>
+          <a:p>
+            <a:endParaRPr lang="en-GB"/>
+          </a:p>
+        </p:txBody>
+      </p:sp>
+      <p:sp>
+        <p:nvSpPr>
+          <p:cNvPr id="16" name="Text 10">
+            <a:extLst>
+              <a:ext uri="{FF2B5EF4-FFF2-40B4-BE49-F238E27FC236}">
+                <a16:creationId xmlns:a16="http://schemas.microsoft.com/office/drawing/2014/main" id="{476D79C6-E996-021D-AC3E-664DB950FE63}"/>
+              </a:ext>
+            </a:extLst>
+          </p:cNvPr>
+          <p:cNvSpPr/>
+          <p:nvPr/>
+        </p:nvSpPr>
+        <p:spPr>
+          <a:xfrm>
+            <a:off x="6903719" y="1286077"/>
+            <a:ext cx="1325880" cy="640080"/>
+          </a:xfrm>
+          <a:prstGeom prst="rect">
+            <a:avLst/>
+          </a:prstGeom>
+          <a:solidFill>
+            <a:srgbClr val="FFFFFF"/>
+          </a:solidFill>
+          <a:ln w="12700">
+            <a:solidFill>
+              <a:srgbClr val="2F704F"/>
+            </a:solidFill>
+          </a:ln>
+        </p:spPr>
+        <p:txBody>
+          <a:bodyPr wrap="square" lIns="762" tIns="762" rIns="762" bIns="762" rtlCol="0" anchor="ctr">
+            <a:normAutofit/>
+          </a:bodyPr>
+          <a:lstStyle/>
+          <a:p>
+            <a:pPr marL="0" indent="0" algn="ctr">
+              <a:buNone/>
+            </a:pPr>
+            <a:r>
+              <a:rPr lang="en-US" sz="1200" dirty="0">
+                <a:solidFill>
+                  <a:srgbClr val="111111"/>
+                </a:solidFill>
+                <a:latin typeface="Gill Sans" pitchFamily="34" charset="0"/>
+                <a:ea typeface="Gill Sans" pitchFamily="34" charset="-122"/>
+                <a:cs typeface="Gill Sans" pitchFamily="34" charset="-120"/>
+              </a:rPr>
+              <a:t>MACS3</a:t>
+            </a:r>
+            <a:endParaRPr lang="en-US" sz="1200" dirty="0"/>
+          </a:p>
+          <a:p>
+            <a:pPr marL="0" indent="0" algn="ctr">
+              <a:buNone/>
+            </a:pPr>
+            <a:r>
+              <a:rPr lang="en-US" sz="1200" dirty="0">
+                <a:solidFill>
+                  <a:srgbClr val="111111"/>
+                </a:solidFill>
+                <a:latin typeface="Gill Sans" pitchFamily="34" charset="0"/>
+                <a:ea typeface="Gill Sans" pitchFamily="34" charset="-122"/>
+                <a:cs typeface="Gill Sans" pitchFamily="34" charset="-120"/>
+              </a:rPr>
+              <a:t>peaks</a:t>
+            </a:r>
+            <a:endParaRPr lang="en-US" sz="1200" dirty="0"/>
+          </a:p>
+        </p:txBody>
+      </p:sp>
+      <p:sp>
+        <p:nvSpPr>
+          <p:cNvPr id="17" name="Shape 11">
+            <a:extLst>
+              <a:ext uri="{FF2B5EF4-FFF2-40B4-BE49-F238E27FC236}">
+                <a16:creationId xmlns:a16="http://schemas.microsoft.com/office/drawing/2014/main" id="{617C312D-7ABB-049A-5841-20DE80CEAA9B}"/>
+              </a:ext>
+            </a:extLst>
+          </p:cNvPr>
+          <p:cNvSpPr/>
+          <p:nvPr/>
+        </p:nvSpPr>
+        <p:spPr>
+          <a:xfrm>
+            <a:off x="8257031" y="1606117"/>
+            <a:ext cx="219456" cy="0"/>
+          </a:xfrm>
+          <a:prstGeom prst="line">
+            <a:avLst/>
+          </a:prstGeom>
+          <a:noFill/>
+          <a:ln w="15240">
+            <a:solidFill>
+              <a:srgbClr val="2F704F"/>
+            </a:solidFill>
+            <a:prstDash val="solid"/>
+            <a:tailEnd type="triangle"/>
+          </a:ln>
+        </p:spPr>
+        <p:txBody>
+          <a:bodyPr/>
+          <a:lstStyle/>
+          <a:p>
+            <a:endParaRPr lang="en-GB"/>
+          </a:p>
+        </p:txBody>
+      </p:sp>
+      <p:sp>
+        <p:nvSpPr>
+          <p:cNvPr id="18" name="Text 12">
+            <a:extLst>
+              <a:ext uri="{FF2B5EF4-FFF2-40B4-BE49-F238E27FC236}">
+                <a16:creationId xmlns:a16="http://schemas.microsoft.com/office/drawing/2014/main" id="{00204C3C-8274-4048-BC37-67A686BB85DF}"/>
+              </a:ext>
+            </a:extLst>
+          </p:cNvPr>
+          <p:cNvSpPr/>
+          <p:nvPr/>
+        </p:nvSpPr>
+        <p:spPr>
+          <a:xfrm>
+            <a:off x="8549639" y="1286077"/>
+            <a:ext cx="1325880" cy="640080"/>
+          </a:xfrm>
+          <a:prstGeom prst="rect">
+            <a:avLst/>
+          </a:prstGeom>
+          <a:solidFill>
+            <a:srgbClr val="FF0000"/>
+          </a:solidFill>
+          <a:ln w="12700">
+            <a:solidFill>
+              <a:srgbClr val="2F704F"/>
+            </a:solidFill>
+          </a:ln>
+        </p:spPr>
+        <p:txBody>
+          <a:bodyPr wrap="square" lIns="762" tIns="762" rIns="762" bIns="762" rtlCol="0" anchor="ctr">
+            <a:normAutofit/>
+          </a:bodyPr>
+          <a:lstStyle/>
+          <a:p>
+            <a:pPr algn="ctr"/>
+            <a:r>
+              <a:rPr lang="en-US" sz="1200" dirty="0">
+                <a:solidFill>
+                  <a:schemeClr val="bg1"/>
+                </a:solidFill>
+                <a:latin typeface="Gill Sans" pitchFamily="34" charset="0"/>
+                <a:ea typeface="Gill Sans" pitchFamily="34" charset="-122"/>
+                <a:cs typeface="Gill Sans" pitchFamily="34" charset="-120"/>
+              </a:rPr>
+              <a:t>Post-peak quality control</a:t>
+            </a:r>
+            <a:endParaRPr lang="en-US" sz="1200" dirty="0">
+              <a:solidFill>
+                <a:schemeClr val="bg1"/>
+              </a:solidFill>
+            </a:endParaRPr>
+          </a:p>
+        </p:txBody>
+      </p:sp>
+      <p:pic>
+        <p:nvPicPr>
+          <p:cNvPr id="21" name="Picture 20">
+            <a:extLst>
+              <a:ext uri="{FF2B5EF4-FFF2-40B4-BE49-F238E27FC236}">
+                <a16:creationId xmlns:a16="http://schemas.microsoft.com/office/drawing/2014/main" id="{DBB19BF3-329B-2D7B-7F4F-2C028828B356}"/>
+              </a:ext>
+            </a:extLst>
+          </p:cNvPr>
+          <p:cNvPicPr>
+            <a:picLocks noChangeAspect="1"/>
+          </p:cNvPicPr>
+          <p:nvPr/>
+        </p:nvPicPr>
+        <p:blipFill>
+          <a:blip r:embed="rId2"/>
+          <a:stretch>
+            <a:fillRect/>
+          </a:stretch>
+        </p:blipFill>
+        <p:spPr>
+          <a:xfrm>
+            <a:off x="406761" y="2359577"/>
+            <a:ext cx="10947039" cy="3212346"/>
+          </a:xfrm>
+          <a:prstGeom prst="rect">
+            <a:avLst/>
+          </a:prstGeom>
+          <a:ln w="28575">
+            <a:solidFill>
+              <a:schemeClr val="tx1"/>
+            </a:solidFill>
+          </a:ln>
+        </p:spPr>
+      </p:pic>
+    </p:spTree>
+    <p:extLst>
+      <p:ext uri="{BB962C8B-B14F-4D97-AF65-F5344CB8AC3E}">
+        <p14:creationId xmlns:p14="http://schemas.microsoft.com/office/powerpoint/2010/main" val="248477289"/>
+      </p:ext>
+    </p:extLst>
+  </p:cSld>
+  <p:clrMapOvr>
+    <a:masterClrMapping/>
+  </p:clrMapOvr>
+</p:sld>
+</file>
+
+<file path=ppt/slides/slide14.xml><?xml version="1.0" encoding="utf-8"?>
+<p:sld xmlns:a="http://schemas.openxmlformats.org/drawingml/2006/main" xmlns:r="http://schemas.openxmlformats.org/officeDocument/2006/relationships" xmlns:p="http://schemas.openxmlformats.org/presentationml/2006/main">
+  <p:cSld>
+    <p:spTree>
+      <p:nvGrpSpPr>
+        <p:cNvPr id="1" name=""/>
+        <p:cNvGrpSpPr/>
+        <p:nvPr/>
+      </p:nvGrpSpPr>
+      <p:grpSpPr>
+        <a:xfrm>
+          <a:off x="0" y="0"/>
+          <a:ext cx="0" cy="0"/>
+          <a:chOff x="0" y="0"/>
+          <a:chExt cx="0" cy="0"/>
+        </a:xfrm>
+      </p:grpSpPr>
+      <p:sp>
+        <p:nvSpPr>
+          <p:cNvPr id="2" name="Title 1">
+            <a:extLst>
+              <a:ext uri="{FF2B5EF4-FFF2-40B4-BE49-F238E27FC236}">
+                <a16:creationId xmlns:a16="http://schemas.microsoft.com/office/drawing/2014/main" id="{811768A0-4B46-9EC2-17C8-532CE5BCA419}"/>
+              </a:ext>
+            </a:extLst>
+          </p:cNvPr>
+          <p:cNvSpPr>
+            <a:spLocks noGrp="1"/>
+          </p:cNvSpPr>
+          <p:nvPr>
+            <p:ph type="title"/>
+          </p:nvPr>
+        </p:nvSpPr>
+        <p:spPr>
+          <a:xfrm>
+            <a:off x="134470" y="122282"/>
+            <a:ext cx="12192000" cy="658006"/>
+          </a:xfrm>
+        </p:spPr>
+        <p:txBody>
+          <a:bodyPr>
+            <a:normAutofit fontScale="90000"/>
+          </a:bodyPr>
+          <a:lstStyle/>
+          <a:p>
+            <a:r>
+              <a:rPr lang="en-IT" b="1" dirty="0"/>
+              <a:t>IDR: reproducibility of ranked peak calls</a:t>
+            </a:r>
+            <a:endParaRPr lang="en-GB" dirty="0"/>
+          </a:p>
+        </p:txBody>
+      </p:sp>
+      <p:sp>
+        <p:nvSpPr>
+          <p:cNvPr id="4" name="Date Placeholder 3">
+            <a:extLst>
+              <a:ext uri="{FF2B5EF4-FFF2-40B4-BE49-F238E27FC236}">
+                <a16:creationId xmlns:a16="http://schemas.microsoft.com/office/drawing/2014/main" id="{ED7D3B1F-927C-D4A7-71C4-0E2B310DF6FC}"/>
+              </a:ext>
+            </a:extLst>
+          </p:cNvPr>
+          <p:cNvSpPr>
+            <a:spLocks noGrp="1"/>
+          </p:cNvSpPr>
+          <p:nvPr>
+            <p:ph type="dt" sz="half" idx="10"/>
+          </p:nvPr>
+        </p:nvSpPr>
+        <p:spPr/>
+        <p:txBody>
+          <a:bodyPr/>
+          <a:lstStyle/>
+          <a:p>
+            <a:fld id="{761DFEEA-1162-B343-ACBF-B3E92F6AC390}" type="datetime1">
+              <a:rPr lang="it-IT" smtClean="0"/>
+              <a:t>15/10/26</a:t>
+            </a:fld>
+            <a:endParaRPr lang="en-GB"/>
+          </a:p>
+        </p:txBody>
+      </p:sp>
+      <p:sp>
+        <p:nvSpPr>
+          <p:cNvPr id="5" name="Footer Placeholder 4">
+            <a:extLst>
+              <a:ext uri="{FF2B5EF4-FFF2-40B4-BE49-F238E27FC236}">
+                <a16:creationId xmlns:a16="http://schemas.microsoft.com/office/drawing/2014/main" id="{6DCE18FB-4F88-49F8-6812-AECFEDB09CF0}"/>
+              </a:ext>
+            </a:extLst>
+          </p:cNvPr>
+          <p:cNvSpPr>
+            <a:spLocks noGrp="1"/>
+          </p:cNvSpPr>
+          <p:nvPr>
+            <p:ph type="ftr" sz="quarter" idx="11"/>
+          </p:nvPr>
+        </p:nvSpPr>
+        <p:spPr/>
+        <p:txBody>
+          <a:bodyPr/>
+          <a:lstStyle/>
+          <a:p>
+            <a:r>
+              <a:rPr lang="en-GB"/>
+              <a:t>Day 1: Reproducible NGS Data Analysis on Personal Laptops</a:t>
+            </a:r>
+          </a:p>
+        </p:txBody>
+      </p:sp>
+      <p:sp>
+        <p:nvSpPr>
+          <p:cNvPr id="6" name="Slide Number Placeholder 5">
+            <a:extLst>
+              <a:ext uri="{FF2B5EF4-FFF2-40B4-BE49-F238E27FC236}">
+                <a16:creationId xmlns:a16="http://schemas.microsoft.com/office/drawing/2014/main" id="{189B7CCB-90F9-9062-63D5-74D7928F0F93}"/>
+              </a:ext>
+            </a:extLst>
+          </p:cNvPr>
+          <p:cNvSpPr>
+            <a:spLocks noGrp="1"/>
+          </p:cNvSpPr>
+          <p:nvPr>
+            <p:ph type="sldNum" sz="quarter" idx="12"/>
+          </p:nvPr>
+        </p:nvSpPr>
+        <p:spPr/>
+        <p:txBody>
+          <a:bodyPr/>
+          <a:lstStyle/>
+          <a:p>
+            <a:fld id="{62E92BA6-6E87-3343-8D2C-B7A656D628E4}" type="slidenum">
+              <a:rPr lang="en-GB" smtClean="0"/>
+              <a:t>13</a:t>
             </a:fld>
             <a:endParaRPr lang="en-GB"/>
           </a:p>
@@ -4174,7 +7211,7 @@
 </p:sld>
 </file>
 
-<file path=ppt/slides/slide11.xml><?xml version="1.0" encoding="utf-8"?>
+<file path=ppt/slides/slide15.xml><?xml version="1.0" encoding="utf-8"?>
 <p:sld xmlns:a="http://schemas.openxmlformats.org/drawingml/2006/main" xmlns:r="http://schemas.openxmlformats.org/officeDocument/2006/relationships" xmlns:p="http://schemas.openxmlformats.org/presentationml/2006/main">
   <p:cSld>
     <p:spTree>
@@ -4214,7 +7251,7 @@
           <a:p>
             <a:fld id="{761DFEEA-1162-B343-ACBF-B3E92F6AC390}" type="datetime1">
               <a:rPr lang="it-IT" smtClean="0"/>
-              <a:t>08/10/26</a:t>
+              <a:t>15/10/26</a:t>
             </a:fld>
             <a:endParaRPr lang="en-GB"/>
           </a:p>
@@ -4271,7 +7308,7 @@
           <a:p>
             <a:fld id="{62E92BA6-6E87-3343-8D2C-B7A656D628E4}" type="slidenum">
               <a:rPr lang="en-GB" smtClean="0"/>
-              <a:t>10</a:t>
+              <a:t>14</a:t>
             </a:fld>
             <a:endParaRPr lang="en-GB"/>
           </a:p>
@@ -4539,7 +7576,7 @@
 </p:sld>
 </file>
 
-<file path=ppt/slides/slide12.xml><?xml version="1.0" encoding="utf-8"?>
+<file path=ppt/slides/slide16.xml><?xml version="1.0" encoding="utf-8"?>
 <p:sld xmlns:a="http://schemas.openxmlformats.org/drawingml/2006/main" xmlns:r="http://schemas.openxmlformats.org/officeDocument/2006/relationships" xmlns:p="http://schemas.openxmlformats.org/presentationml/2006/main">
   <p:cSld>
     <p:spTree>
@@ -4579,7 +7616,7 @@
           <a:p>
             <a:fld id="{761DFEEA-1162-B343-ACBF-B3E92F6AC390}" type="datetime1">
               <a:rPr lang="it-IT" smtClean="0"/>
-              <a:t>08/10/26</a:t>
+              <a:t>15/10/26</a:t>
             </a:fld>
             <a:endParaRPr lang="en-GB"/>
           </a:p>
@@ -4636,7 +7673,7 @@
           <a:p>
             <a:fld id="{62E92BA6-6E87-3343-8D2C-B7A656D628E4}" type="slidenum">
               <a:rPr lang="en-GB" smtClean="0"/>
-              <a:t>11</a:t>
+              <a:t>15</a:t>
             </a:fld>
             <a:endParaRPr lang="en-GB"/>
           </a:p>
@@ -4852,7 +7889,7 @@
 </p:sld>
 </file>
 
-<file path=ppt/slides/slide13.xml><?xml version="1.0" encoding="utf-8"?>
+<file path=ppt/slides/slide17.xml><?xml version="1.0" encoding="utf-8"?>
 <p:sld xmlns:a="http://schemas.openxmlformats.org/drawingml/2006/main" xmlns:r="http://schemas.openxmlformats.org/officeDocument/2006/relationships" xmlns:p="http://schemas.openxmlformats.org/presentationml/2006/main">
   <p:cSld>
     <p:spTree>
@@ -4892,7 +7929,7 @@
           <a:p>
             <a:fld id="{761DFEEA-1162-B343-ACBF-B3E92F6AC390}" type="datetime1">
               <a:rPr lang="it-IT" smtClean="0"/>
-              <a:t>08/10/26</a:t>
+              <a:t>15/10/26</a:t>
             </a:fld>
             <a:endParaRPr lang="en-GB"/>
           </a:p>
@@ -4949,7 +7986,7 @@
           <a:p>
             <a:fld id="{62E92BA6-6E87-3343-8D2C-B7A656D628E4}" type="slidenum">
               <a:rPr lang="en-GB" smtClean="0"/>
-              <a:t>12</a:t>
+              <a:t>16</a:t>
             </a:fld>
             <a:endParaRPr lang="en-GB"/>
           </a:p>
@@ -4968,7 +8005,7 @@
 </p:sld>
 </file>
 
-<file path=ppt/slides/slide14.xml><?xml version="1.0" encoding="utf-8"?>
+<file path=ppt/slides/slide18.xml><?xml version="1.0" encoding="utf-8"?>
 <p:sld xmlns:a="http://schemas.openxmlformats.org/drawingml/2006/main" xmlns:r="http://schemas.openxmlformats.org/officeDocument/2006/relationships" xmlns:p="http://schemas.openxmlformats.org/presentationml/2006/main">
   <p:cSld>
     <p:spTree>
@@ -5008,7 +8045,7 @@
           <a:p>
             <a:fld id="{761DFEEA-1162-B343-ACBF-B3E92F6AC390}" type="datetime1">
               <a:rPr lang="it-IT" smtClean="0"/>
-              <a:t>08/10/26</a:t>
+              <a:t>15/10/26</a:t>
             </a:fld>
             <a:endParaRPr lang="en-GB"/>
           </a:p>
@@ -5065,7 +8102,7 @@
           <a:p>
             <a:fld id="{62E92BA6-6E87-3343-8D2C-B7A656D628E4}" type="slidenum">
               <a:rPr lang="en-GB" smtClean="0"/>
-              <a:t>13</a:t>
+              <a:t>17</a:t>
             </a:fld>
             <a:endParaRPr lang="en-GB"/>
           </a:p>
@@ -6540,7 +9577,7 @@
 </p:sld>
 </file>
 
-<file path=ppt/slides/slide15.xml><?xml version="1.0" encoding="utf-8"?>
+<file path=ppt/slides/slide19.xml><?xml version="1.0" encoding="utf-8"?>
 <p:sld xmlns:a="http://schemas.openxmlformats.org/drawingml/2006/main" xmlns:r="http://schemas.openxmlformats.org/officeDocument/2006/relationships" xmlns:p="http://schemas.openxmlformats.org/presentationml/2006/main">
   <p:cSld>
     <p:spTree>
@@ -6580,7 +9617,7 @@
           <a:p>
             <a:fld id="{761DFEEA-1162-B343-ACBF-B3E92F6AC390}" type="datetime1">
               <a:rPr lang="it-IT" smtClean="0"/>
-              <a:t>08/10/26</a:t>
+              <a:t>15/10/26</a:t>
             </a:fld>
             <a:endParaRPr lang="en-GB"/>
           </a:p>
@@ -6637,7 +9674,7 @@
           <a:p>
             <a:fld id="{62E92BA6-6E87-3343-8D2C-B7A656D628E4}" type="slidenum">
               <a:rPr lang="en-GB" smtClean="0"/>
-              <a:t>14</a:t>
+              <a:t>18</a:t>
             </a:fld>
             <a:endParaRPr lang="en-GB"/>
           </a:p>
@@ -7206,917 +10243,6 @@
     <p:extLst>
       <p:ext uri="{BB962C8B-B14F-4D97-AF65-F5344CB8AC3E}">
         <p14:creationId xmlns:p14="http://schemas.microsoft.com/office/powerpoint/2010/main" val="3830852608"/>
-      </p:ext>
-    </p:extLst>
-  </p:cSld>
-  <p:clrMapOvr>
-    <a:masterClrMapping/>
-  </p:clrMapOvr>
-</p:sld>
-</file>
-
-<file path=ppt/slides/slide16.xml><?xml version="1.0" encoding="utf-8"?>
-<p:sld xmlns:a="http://schemas.openxmlformats.org/drawingml/2006/main" xmlns:r="http://schemas.openxmlformats.org/officeDocument/2006/relationships" xmlns:p="http://schemas.openxmlformats.org/presentationml/2006/main">
-  <p:cSld>
-    <p:spTree>
-      <p:nvGrpSpPr>
-        <p:cNvPr id="1" name=""/>
-        <p:cNvGrpSpPr/>
-        <p:nvPr/>
-      </p:nvGrpSpPr>
-      <p:grpSpPr>
-        <a:xfrm>
-          <a:off x="0" y="0"/>
-          <a:ext cx="0" cy="0"/>
-          <a:chOff x="0" y="0"/>
-          <a:chExt cx="0" cy="0"/>
-        </a:xfrm>
-      </p:grpSpPr>
-      <p:sp>
-        <p:nvSpPr>
-          <p:cNvPr id="4" name="Date Placeholder 3">
-            <a:extLst>
-              <a:ext uri="{FF2B5EF4-FFF2-40B4-BE49-F238E27FC236}">
-                <a16:creationId xmlns:a16="http://schemas.microsoft.com/office/drawing/2014/main" id="{063B98AF-3CB2-2C31-D6FC-A2A3418C919F}"/>
-              </a:ext>
-            </a:extLst>
-          </p:cNvPr>
-          <p:cNvSpPr>
-            <a:spLocks noGrp="1"/>
-          </p:cNvSpPr>
-          <p:nvPr>
-            <p:ph type="dt" sz="half" idx="10"/>
-          </p:nvPr>
-        </p:nvSpPr>
-        <p:spPr/>
-        <p:txBody>
-          <a:bodyPr/>
-          <a:lstStyle/>
-          <a:p>
-            <a:fld id="{761DFEEA-1162-B343-ACBF-B3E92F6AC390}" type="datetime1">
-              <a:rPr lang="it-IT" smtClean="0"/>
-              <a:t>08/10/26</a:t>
-            </a:fld>
-            <a:endParaRPr lang="en-GB" dirty="0"/>
-          </a:p>
-        </p:txBody>
-      </p:sp>
-      <p:sp>
-        <p:nvSpPr>
-          <p:cNvPr id="5" name="Footer Placeholder 4">
-            <a:extLst>
-              <a:ext uri="{FF2B5EF4-FFF2-40B4-BE49-F238E27FC236}">
-                <a16:creationId xmlns:a16="http://schemas.microsoft.com/office/drawing/2014/main" id="{D377EBF2-39F9-4FD2-282F-A7D423AE12B4}"/>
-              </a:ext>
-            </a:extLst>
-          </p:cNvPr>
-          <p:cNvSpPr>
-            <a:spLocks noGrp="1"/>
-          </p:cNvSpPr>
-          <p:nvPr>
-            <p:ph type="ftr" sz="quarter" idx="11"/>
-          </p:nvPr>
-        </p:nvSpPr>
-        <p:spPr/>
-        <p:txBody>
-          <a:bodyPr/>
-          <a:lstStyle/>
-          <a:p>
-            <a:r>
-              <a:rPr lang="en-GB" dirty="0"/>
-              <a:t>Day 1: Reproducible NGS Data Analysis on Personal Laptops</a:t>
-            </a:r>
-          </a:p>
-        </p:txBody>
-      </p:sp>
-      <p:sp>
-        <p:nvSpPr>
-          <p:cNvPr id="6" name="Slide Number Placeholder 5">
-            <a:extLst>
-              <a:ext uri="{FF2B5EF4-FFF2-40B4-BE49-F238E27FC236}">
-                <a16:creationId xmlns:a16="http://schemas.microsoft.com/office/drawing/2014/main" id="{30098E79-3320-176B-5FA3-2A3D754805B7}"/>
-              </a:ext>
-            </a:extLst>
-          </p:cNvPr>
-          <p:cNvSpPr>
-            <a:spLocks noGrp="1"/>
-          </p:cNvSpPr>
-          <p:nvPr>
-            <p:ph type="sldNum" sz="quarter" idx="12"/>
-          </p:nvPr>
-        </p:nvSpPr>
-        <p:spPr/>
-        <p:txBody>
-          <a:bodyPr/>
-          <a:lstStyle/>
-          <a:p>
-            <a:fld id="{62E92BA6-6E87-3343-8D2C-B7A656D628E4}" type="slidenum">
-              <a:rPr lang="en-GB" smtClean="0"/>
-              <a:t>15</a:t>
-            </a:fld>
-            <a:endParaRPr lang="en-GB"/>
-          </a:p>
-        </p:txBody>
-      </p:sp>
-      <p:sp>
-        <p:nvSpPr>
-          <p:cNvPr id="7" name="TextBox 6">
-            <a:extLst>
-              <a:ext uri="{FF2B5EF4-FFF2-40B4-BE49-F238E27FC236}">
-                <a16:creationId xmlns:a16="http://schemas.microsoft.com/office/drawing/2014/main" id="{21FE0794-6E92-E0A9-EE49-0D899618D582}"/>
-              </a:ext>
-            </a:extLst>
-          </p:cNvPr>
-          <p:cNvSpPr txBox="1"/>
-          <p:nvPr/>
-        </p:nvSpPr>
-        <p:spPr>
-          <a:xfrm>
-            <a:off x="0" y="0"/>
-            <a:ext cx="12192000" cy="523220"/>
-          </a:xfrm>
-          <a:prstGeom prst="rect">
-            <a:avLst/>
-          </a:prstGeom>
-          <a:noFill/>
-        </p:spPr>
-        <p:txBody>
-          <a:bodyPr wrap="square">
-            <a:spAutoFit/>
-          </a:bodyPr>
-          <a:lstStyle/>
-          <a:p>
-            <a:r>
-              <a:rPr lang="en-IT" sz="2800" b="1" dirty="0"/>
-              <a:t>De novo motif discovery with STREME</a:t>
-            </a:r>
-          </a:p>
-        </p:txBody>
-      </p:sp>
-      <p:sp>
-        <p:nvSpPr>
-          <p:cNvPr id="8" name="TextBox 7">
-            <a:extLst>
-              <a:ext uri="{FF2B5EF4-FFF2-40B4-BE49-F238E27FC236}">
-                <a16:creationId xmlns:a16="http://schemas.microsoft.com/office/drawing/2014/main" id="{A4242A9B-AC00-C44B-84B2-4E84BDFC690B}"/>
-              </a:ext>
-            </a:extLst>
-          </p:cNvPr>
-          <p:cNvSpPr txBox="1"/>
-          <p:nvPr/>
-        </p:nvSpPr>
-        <p:spPr>
-          <a:xfrm>
-            <a:off x="170688" y="902208"/>
-            <a:ext cx="11340477" cy="369332"/>
-          </a:xfrm>
-          <a:prstGeom prst="rect">
-            <a:avLst/>
-          </a:prstGeom>
-          <a:noFill/>
-        </p:spPr>
-        <p:txBody>
-          <a:bodyPr wrap="none" rtlCol="0">
-            <a:spAutoFit/>
-          </a:bodyPr>
-          <a:lstStyle/>
-          <a:p>
-            <a:r>
-              <a:rPr lang="en-IT" dirty="0"/>
-              <a:t>ChIP-seq tells us </a:t>
-            </a:r>
-            <a:r>
-              <a:rPr lang="en-IT" b="1" dirty="0"/>
-              <a:t>where</a:t>
-            </a:r>
-            <a:r>
-              <a:rPr lang="en-IT" dirty="0"/>
-              <a:t> a protein-associated enrichment occurs in the genome. Motif analysis asks a different question:</a:t>
-            </a:r>
-            <a:endParaRPr lang="en-GB" dirty="0"/>
-          </a:p>
-        </p:txBody>
-      </p:sp>
-      <p:sp>
-        <p:nvSpPr>
-          <p:cNvPr id="10" name="TextBox 9">
-            <a:extLst>
-              <a:ext uri="{FF2B5EF4-FFF2-40B4-BE49-F238E27FC236}">
-                <a16:creationId xmlns:a16="http://schemas.microsoft.com/office/drawing/2014/main" id="{5FEED0D7-DFE7-AB61-FA1E-E64BAB7F593B}"/>
-              </a:ext>
-            </a:extLst>
-          </p:cNvPr>
-          <p:cNvSpPr txBox="1"/>
-          <p:nvPr/>
-        </p:nvSpPr>
-        <p:spPr>
-          <a:xfrm>
-            <a:off x="0" y="1450473"/>
-            <a:ext cx="12192000" cy="400110"/>
-          </a:xfrm>
-          <a:prstGeom prst="rect">
-            <a:avLst/>
-          </a:prstGeom>
-          <a:noFill/>
-        </p:spPr>
-        <p:txBody>
-          <a:bodyPr wrap="square">
-            <a:spAutoFit/>
-          </a:bodyPr>
-          <a:lstStyle/>
-          <a:p>
-            <a:pPr algn="ctr"/>
-            <a:r>
-              <a:rPr lang="en-IT" sz="2000" b="0" i="0" dirty="0">
-                <a:solidFill>
-                  <a:schemeClr val="tx1">
-                    <a:lumMod val="50000"/>
-                    <a:lumOff val="50000"/>
-                  </a:schemeClr>
-                </a:solidFill>
-                <a:effectLst/>
-                <a:latin typeface="+mn-lt"/>
-              </a:rPr>
-              <a:t>Do those enriched regions share a short DNA sequence pattern more often than expected by chance?</a:t>
-            </a:r>
-            <a:endParaRPr lang="en-GB" sz="2000" dirty="0">
-              <a:solidFill>
-                <a:schemeClr val="tx1">
-                  <a:lumMod val="50000"/>
-                  <a:lumOff val="50000"/>
-                </a:schemeClr>
-              </a:solidFill>
-            </a:endParaRPr>
-          </a:p>
-        </p:txBody>
-      </p:sp>
-      <p:pic>
-        <p:nvPicPr>
-          <p:cNvPr id="12" name="Picture 11">
-            <a:extLst>
-              <a:ext uri="{FF2B5EF4-FFF2-40B4-BE49-F238E27FC236}">
-                <a16:creationId xmlns:a16="http://schemas.microsoft.com/office/drawing/2014/main" id="{2DD22CF0-3ACA-CA77-7FB6-FECE4EF83A46}"/>
-              </a:ext>
-            </a:extLst>
-          </p:cNvPr>
-          <p:cNvPicPr>
-            <a:picLocks noChangeAspect="1"/>
-          </p:cNvPicPr>
-          <p:nvPr/>
-        </p:nvPicPr>
-        <p:blipFill>
-          <a:blip r:embed="rId2"/>
-          <a:stretch>
-            <a:fillRect/>
-          </a:stretch>
-        </p:blipFill>
-        <p:spPr>
-          <a:xfrm>
-            <a:off x="405384" y="2334712"/>
-            <a:ext cx="7772400" cy="2188575"/>
-          </a:xfrm>
-          <a:prstGeom prst="rect">
-            <a:avLst/>
-          </a:prstGeom>
-          <a:ln>
-            <a:solidFill>
-              <a:schemeClr val="tx1"/>
-            </a:solidFill>
-          </a:ln>
-        </p:spPr>
-      </p:pic>
-      <p:sp>
-        <p:nvSpPr>
-          <p:cNvPr id="14" name="TextBox 13">
-            <a:extLst>
-              <a:ext uri="{FF2B5EF4-FFF2-40B4-BE49-F238E27FC236}">
-                <a16:creationId xmlns:a16="http://schemas.microsoft.com/office/drawing/2014/main" id="{F910230C-C116-4CEA-E505-081E504C8E19}"/>
-              </a:ext>
-            </a:extLst>
-          </p:cNvPr>
-          <p:cNvSpPr txBox="1"/>
-          <p:nvPr/>
-        </p:nvSpPr>
-        <p:spPr>
-          <a:xfrm>
-            <a:off x="8327136" y="2334711"/>
-            <a:ext cx="3713422" cy="2585323"/>
-          </a:xfrm>
-          <a:prstGeom prst="rect">
-            <a:avLst/>
-          </a:prstGeom>
-          <a:noFill/>
-        </p:spPr>
-        <p:txBody>
-          <a:bodyPr wrap="square">
-            <a:spAutoFit/>
-          </a:bodyPr>
-          <a:lstStyle/>
-          <a:p>
-            <a:r>
-              <a:rPr lang="en-IT" sz="1800" b="1" i="0" dirty="0">
-                <a:solidFill>
-                  <a:schemeClr val="tx1"/>
-                </a:solidFill>
-                <a:effectLst/>
-                <a:latin typeface="+mn-lt"/>
-              </a:rPr>
-              <a:t>De novo</a:t>
-            </a:r>
-            <a:r>
-              <a:rPr lang="en-IT" sz="1800" b="0" i="0" dirty="0">
-                <a:solidFill>
-                  <a:schemeClr val="tx1"/>
-                </a:solidFill>
-                <a:effectLst/>
-                <a:latin typeface="+mn-lt"/>
-              </a:rPr>
-              <a:t> means that we do not give STREME a known HP1021 binding motif and ask whether it is present. </a:t>
-            </a:r>
-          </a:p>
-          <a:p>
-            <a:endParaRPr lang="en-IT" dirty="0"/>
-          </a:p>
-          <a:p>
-            <a:r>
-              <a:rPr lang="en-IT" sz="1800" b="0" i="0" dirty="0">
-                <a:solidFill>
-                  <a:schemeClr val="tx1"/>
-                </a:solidFill>
-                <a:effectLst/>
-                <a:latin typeface="+mn-lt"/>
-              </a:rPr>
-              <a:t>STREME starts from the peak sequences themselves and searches for recurring patterns that are enriched compared with a background set.</a:t>
-            </a:r>
-            <a:endParaRPr lang="en-GB" dirty="0"/>
-          </a:p>
-        </p:txBody>
-      </p:sp>
-      <p:sp>
-        <p:nvSpPr>
-          <p:cNvPr id="16" name="TextBox 15">
-            <a:extLst>
-              <a:ext uri="{FF2B5EF4-FFF2-40B4-BE49-F238E27FC236}">
-                <a16:creationId xmlns:a16="http://schemas.microsoft.com/office/drawing/2014/main" id="{F1DB4D6A-02CB-2BB4-006A-917C9E293E18}"/>
-              </a:ext>
-            </a:extLst>
-          </p:cNvPr>
-          <p:cNvSpPr txBox="1"/>
-          <p:nvPr/>
-        </p:nvSpPr>
-        <p:spPr>
-          <a:xfrm>
-            <a:off x="405384" y="5032462"/>
-            <a:ext cx="11786616" cy="1200329"/>
-          </a:xfrm>
-          <a:prstGeom prst="rect">
-            <a:avLst/>
-          </a:prstGeom>
-          <a:noFill/>
-        </p:spPr>
-        <p:txBody>
-          <a:bodyPr wrap="square">
-            <a:spAutoFit/>
-          </a:bodyPr>
-          <a:lstStyle/>
-          <a:p>
-            <a:pPr marL="342900" lvl="0" indent="-342900" algn="l">
-              <a:buFont typeface="Arial" panose="020B0604020202020204" pitchFamily="34" charset="0"/>
-              <a:buChar char="•"/>
-            </a:pPr>
-            <a:r>
-              <a:rPr lang="en-IT" sz="1800" b="0" i="0" dirty="0">
-                <a:solidFill>
-                  <a:schemeClr val="tx1"/>
-                </a:solidFill>
-                <a:effectLst/>
-                <a:latin typeface="+mn-lt"/>
-              </a:rPr>
-              <a:t>the DNA-binding preference is unknown;</a:t>
-            </a:r>
-          </a:p>
-          <a:p>
-            <a:pPr marL="342900" lvl="0" indent="-342900" algn="l">
-              <a:buFont typeface="Arial" panose="020B0604020202020204" pitchFamily="34" charset="0"/>
-              <a:buChar char="•"/>
-            </a:pPr>
-            <a:r>
-              <a:rPr lang="en-IT" sz="1800" b="0" i="0" dirty="0">
-                <a:solidFill>
-                  <a:schemeClr val="tx1"/>
-                </a:solidFill>
-                <a:effectLst/>
-                <a:latin typeface="+mn-lt"/>
-              </a:rPr>
-              <a:t>we want to recover the expected motif without forcing the answer;</a:t>
-            </a:r>
-          </a:p>
-          <a:p>
-            <a:pPr marL="342900" lvl="0" indent="-342900" algn="l">
-              <a:buFont typeface="Arial" panose="020B0604020202020204" pitchFamily="34" charset="0"/>
-              <a:buChar char="•"/>
-            </a:pPr>
-            <a:r>
-              <a:rPr lang="en-IT" sz="1800" b="0" i="0" dirty="0">
-                <a:solidFill>
-                  <a:schemeClr val="tx1"/>
-                </a:solidFill>
-                <a:effectLst/>
-                <a:latin typeface="+mn-lt"/>
-              </a:rPr>
-              <a:t>we want to detect additional motifs that could reflect cofactors or other sequence features associated with the peaks.</a:t>
-            </a:r>
-          </a:p>
-          <a:p>
-            <a:pPr marL="342900" lvl="0" indent="-342900" algn="l">
-              <a:buFont typeface="Arial" panose="020B0604020202020204" pitchFamily="34" charset="0"/>
-              <a:buChar char="•"/>
-            </a:pPr>
-            <a:r>
-              <a:rPr lang="en-IT" dirty="0"/>
-              <a:t>As a QC given the known motif for the targeted protein</a:t>
-            </a:r>
-            <a:endParaRPr lang="en-GB" dirty="0"/>
-          </a:p>
-        </p:txBody>
-      </p:sp>
-    </p:spTree>
-    <p:extLst>
-      <p:ext uri="{BB962C8B-B14F-4D97-AF65-F5344CB8AC3E}">
-        <p14:creationId xmlns:p14="http://schemas.microsoft.com/office/powerpoint/2010/main" val="116167225"/>
-      </p:ext>
-    </p:extLst>
-  </p:cSld>
-  <p:clrMapOvr>
-    <a:masterClrMapping/>
-  </p:clrMapOvr>
-  <p:timing>
-    <p:tnLst>
-      <p:par>
-        <p:cTn id="1" dur="indefinite" restart="never" nodeType="tmRoot">
-          <p:childTnLst>
-            <p:seq concurrent="1" nextAc="seek">
-              <p:cTn id="2" dur="indefinite" nodeType="mainSeq">
-                <p:childTnLst>
-                  <p:par>
-                    <p:cTn id="3" fill="hold">
-                      <p:stCondLst>
-                        <p:cond delay="indefinite"/>
-                      </p:stCondLst>
-                      <p:childTnLst>
-                        <p:par>
-                          <p:cTn id="4" fill="hold">
-                            <p:stCondLst>
-                              <p:cond delay="0"/>
-                            </p:stCondLst>
-                            <p:childTnLst>
-                              <p:par>
-                                <p:cTn id="5" presetID="1" presetClass="entr" presetSubtype="0" fill="hold" nodeType="clickEffect">
-                                  <p:stCondLst>
-                                    <p:cond delay="0"/>
-                                  </p:stCondLst>
-                                  <p:childTnLst>
-                                    <p:set>
-                                      <p:cBhvr>
-                                        <p:cTn id="6" dur="1" fill="hold">
-                                          <p:stCondLst>
-                                            <p:cond delay="0"/>
-                                          </p:stCondLst>
-                                        </p:cTn>
-                                        <p:tgtEl>
-                                          <p:spTgt spid="12"/>
-                                        </p:tgtEl>
-                                        <p:attrNameLst>
-                                          <p:attrName>style.visibility</p:attrName>
-                                        </p:attrNameLst>
-                                      </p:cBhvr>
-                                      <p:to>
-                                        <p:strVal val="visible"/>
-                                      </p:to>
-                                    </p:set>
-                                  </p:childTnLst>
-                                </p:cTn>
-                              </p:par>
-                            </p:childTnLst>
-                          </p:cTn>
-                        </p:par>
-                      </p:childTnLst>
-                    </p:cTn>
-                  </p:par>
-                </p:childTnLst>
-              </p:cTn>
-              <p:prevCondLst>
-                <p:cond evt="onPrev" delay="0">
-                  <p:tgtEl>
-                    <p:sldTgt/>
-                  </p:tgtEl>
-                </p:cond>
-              </p:prevCondLst>
-              <p:nextCondLst>
-                <p:cond evt="onNext" delay="0">
-                  <p:tgtEl>
-                    <p:sldTgt/>
-                  </p:tgtEl>
-                </p:cond>
-              </p:nextCondLst>
-            </p:seq>
-          </p:childTnLst>
-        </p:cTn>
-      </p:par>
-    </p:tnLst>
-  </p:timing>
-</p:sld>
-</file>
-
-<file path=ppt/slides/slide17.xml><?xml version="1.0" encoding="utf-8"?>
-<p:sld xmlns:a="http://schemas.openxmlformats.org/drawingml/2006/main" xmlns:r="http://schemas.openxmlformats.org/officeDocument/2006/relationships" xmlns:p="http://schemas.openxmlformats.org/presentationml/2006/main">
-  <p:cSld>
-    <p:spTree>
-      <p:nvGrpSpPr>
-        <p:cNvPr id="1" name=""/>
-        <p:cNvGrpSpPr/>
-        <p:nvPr/>
-      </p:nvGrpSpPr>
-      <p:grpSpPr>
-        <a:xfrm>
-          <a:off x="0" y="0"/>
-          <a:ext cx="0" cy="0"/>
-          <a:chOff x="0" y="0"/>
-          <a:chExt cx="0" cy="0"/>
-        </a:xfrm>
-      </p:grpSpPr>
-      <p:sp>
-        <p:nvSpPr>
-          <p:cNvPr id="4" name="Date Placeholder 3">
-            <a:extLst>
-              <a:ext uri="{FF2B5EF4-FFF2-40B4-BE49-F238E27FC236}">
-                <a16:creationId xmlns:a16="http://schemas.microsoft.com/office/drawing/2014/main" id="{717E1797-475D-1867-AC1D-B904D43E3E27}"/>
-              </a:ext>
-            </a:extLst>
-          </p:cNvPr>
-          <p:cNvSpPr>
-            <a:spLocks noGrp="1"/>
-          </p:cNvSpPr>
-          <p:nvPr>
-            <p:ph type="dt" sz="half" idx="10"/>
-          </p:nvPr>
-        </p:nvSpPr>
-        <p:spPr/>
-        <p:txBody>
-          <a:bodyPr/>
-          <a:lstStyle/>
-          <a:p>
-            <a:fld id="{761DFEEA-1162-B343-ACBF-B3E92F6AC390}" type="datetime1">
-              <a:rPr lang="it-IT" smtClean="0"/>
-              <a:t>08/10/26</a:t>
-            </a:fld>
-            <a:endParaRPr lang="en-GB"/>
-          </a:p>
-        </p:txBody>
-      </p:sp>
-      <p:sp>
-        <p:nvSpPr>
-          <p:cNvPr id="5" name="Footer Placeholder 4">
-            <a:extLst>
-              <a:ext uri="{FF2B5EF4-FFF2-40B4-BE49-F238E27FC236}">
-                <a16:creationId xmlns:a16="http://schemas.microsoft.com/office/drawing/2014/main" id="{F6B5BDF9-ED9F-D22C-34B1-F66F13BB5175}"/>
-              </a:ext>
-            </a:extLst>
-          </p:cNvPr>
-          <p:cNvSpPr>
-            <a:spLocks noGrp="1"/>
-          </p:cNvSpPr>
-          <p:nvPr>
-            <p:ph type="ftr" sz="quarter" idx="11"/>
-          </p:nvPr>
-        </p:nvSpPr>
-        <p:spPr/>
-        <p:txBody>
-          <a:bodyPr/>
-          <a:lstStyle/>
-          <a:p>
-            <a:r>
-              <a:rPr lang="en-GB"/>
-              <a:t>Day 1: Reproducible NGS Data Analysis on Personal Laptops</a:t>
-            </a:r>
-          </a:p>
-        </p:txBody>
-      </p:sp>
-      <p:sp>
-        <p:nvSpPr>
-          <p:cNvPr id="6" name="Slide Number Placeholder 5">
-            <a:extLst>
-              <a:ext uri="{FF2B5EF4-FFF2-40B4-BE49-F238E27FC236}">
-                <a16:creationId xmlns:a16="http://schemas.microsoft.com/office/drawing/2014/main" id="{9BBBC257-7F02-89F1-29F2-D19823281107}"/>
-              </a:ext>
-            </a:extLst>
-          </p:cNvPr>
-          <p:cNvSpPr>
-            <a:spLocks noGrp="1"/>
-          </p:cNvSpPr>
-          <p:nvPr>
-            <p:ph type="sldNum" sz="quarter" idx="12"/>
-          </p:nvPr>
-        </p:nvSpPr>
-        <p:spPr/>
-        <p:txBody>
-          <a:bodyPr/>
-          <a:lstStyle/>
-          <a:p>
-            <a:fld id="{62E92BA6-6E87-3343-8D2C-B7A656D628E4}" type="slidenum">
-              <a:rPr lang="en-GB" smtClean="0"/>
-              <a:t>16</a:t>
-            </a:fld>
-            <a:endParaRPr lang="en-GB"/>
-          </a:p>
-        </p:txBody>
-      </p:sp>
-      <p:sp>
-        <p:nvSpPr>
-          <p:cNvPr id="8" name="TextBox 7">
-            <a:extLst>
-              <a:ext uri="{FF2B5EF4-FFF2-40B4-BE49-F238E27FC236}">
-                <a16:creationId xmlns:a16="http://schemas.microsoft.com/office/drawing/2014/main" id="{1346DA1A-EE0C-48CD-32F7-5ABB17D04D9C}"/>
-              </a:ext>
-            </a:extLst>
-          </p:cNvPr>
-          <p:cNvSpPr txBox="1"/>
-          <p:nvPr/>
-        </p:nvSpPr>
-        <p:spPr>
-          <a:xfrm>
-            <a:off x="838200" y="2067477"/>
-            <a:ext cx="10131552" cy="3693319"/>
-          </a:xfrm>
-          <a:prstGeom prst="rect">
-            <a:avLst/>
-          </a:prstGeom>
-          <a:noFill/>
-        </p:spPr>
-        <p:txBody>
-          <a:bodyPr wrap="square">
-            <a:spAutoFit/>
-          </a:bodyPr>
-          <a:lstStyle/>
-          <a:p>
-            <a:pPr indent="0" algn="l">
-              <a:buNone/>
-            </a:pPr>
-            <a:r>
-              <a:rPr lang="en-IT" sz="1800" b="0" i="0" dirty="0">
-                <a:solidFill>
-                  <a:schemeClr val="tx1"/>
-                </a:solidFill>
-                <a:effectLst/>
-                <a:latin typeface="+mn-lt"/>
-              </a:rPr>
-              <a:t>STREME proceeds from candidate sequence words toward a more flexible motif representation:</a:t>
-            </a:r>
-          </a:p>
-          <a:p>
-            <a:pPr indent="0" algn="l">
-              <a:buNone/>
-            </a:pPr>
-            <a:endParaRPr lang="en-IT" sz="1800" b="0" i="0" dirty="0">
-              <a:solidFill>
-                <a:schemeClr val="tx1"/>
-              </a:solidFill>
-              <a:effectLst/>
-              <a:latin typeface="+mn-lt"/>
-            </a:endParaRPr>
-          </a:p>
-          <a:p>
-            <a:pPr marL="342900" lvl="0" indent="-342900" algn="l">
-              <a:buFont typeface="+mj-lt"/>
-              <a:buAutoNum type="arabicPeriod"/>
-            </a:pPr>
-            <a:r>
-              <a:rPr lang="en-IT" sz="1800" b="1" i="0" dirty="0">
-                <a:solidFill>
-                  <a:schemeClr val="tx1"/>
-                </a:solidFill>
-                <a:effectLst/>
-                <a:latin typeface="+mn-lt"/>
-              </a:rPr>
-              <a:t>Find promising seed words.</a:t>
-            </a:r>
-            <a:r>
-              <a:rPr lang="en-IT" sz="1800" b="0" i="0" dirty="0">
-                <a:solidFill>
-                  <a:schemeClr val="tx1"/>
-                </a:solidFill>
-                <a:effectLst/>
-                <a:latin typeface="+mn-lt"/>
-              </a:rPr>
-              <a:t> Short words enriched in the primary sequences relative to the controls provide starting points.</a:t>
-            </a:r>
-          </a:p>
-          <a:p>
-            <a:pPr marL="342900" lvl="0" indent="-342900" algn="l">
-              <a:buFont typeface="+mj-lt"/>
-              <a:buAutoNum type="arabicPeriod"/>
-            </a:pPr>
-            <a:r>
-              <a:rPr lang="en-IT" sz="1800" b="1" i="0" dirty="0">
-                <a:solidFill>
-                  <a:schemeClr val="tx1"/>
-                </a:solidFill>
-                <a:effectLst/>
-                <a:latin typeface="+mn-lt"/>
-              </a:rPr>
-              <a:t>Refine the motif.</a:t>
-            </a:r>
-            <a:r>
-              <a:rPr lang="en-IT" sz="1800" b="0" i="0" dirty="0">
-                <a:solidFill>
-                  <a:schemeClr val="tx1"/>
-                </a:solidFill>
-                <a:effectLst/>
-                <a:latin typeface="+mn-lt"/>
-              </a:rPr>
-              <a:t> Similar sequence occurrences are collected and used to improve the model.</a:t>
-            </a:r>
-          </a:p>
-          <a:p>
-            <a:pPr marL="342900" lvl="0" indent="-342900" algn="l">
-              <a:buFont typeface="+mj-lt"/>
-              <a:buAutoNum type="arabicPeriod"/>
-            </a:pPr>
-            <a:r>
-              <a:rPr lang="en-IT" sz="1800" b="1" i="0" dirty="0">
-                <a:solidFill>
-                  <a:schemeClr val="tx1"/>
-                </a:solidFill>
-                <a:effectLst/>
-                <a:latin typeface="+mn-lt"/>
-              </a:rPr>
-              <a:t>Represent the motif as a position-weight matrix (PWM).</a:t>
-            </a:r>
-            <a:r>
-              <a:rPr lang="en-IT" sz="1800" b="0" i="0" dirty="0">
-                <a:solidFill>
-                  <a:schemeClr val="tx1"/>
-                </a:solidFill>
-                <a:effectLst/>
-                <a:latin typeface="+mn-lt"/>
-              </a:rPr>
-              <a:t> Each position stores the preference for A, C, G and T rather than requiring one exact sequence.</a:t>
-            </a:r>
-          </a:p>
-          <a:p>
-            <a:pPr marL="342900" lvl="0" indent="-342900" algn="l">
-              <a:buFont typeface="+mj-lt"/>
-              <a:buAutoNum type="arabicPeriod"/>
-            </a:pPr>
-            <a:r>
-              <a:rPr lang="en-IT" sz="1800" b="1" i="0" dirty="0">
-                <a:solidFill>
-                  <a:schemeClr val="tx1"/>
-                </a:solidFill>
-                <a:effectLst/>
-                <a:latin typeface="+mn-lt"/>
-              </a:rPr>
-              <a:t>Search both DNA strands.</a:t>
-            </a:r>
-            <a:r>
-              <a:rPr lang="en-IT" sz="1800" b="0" i="0" dirty="0">
-                <a:solidFill>
-                  <a:schemeClr val="tx1"/>
-                </a:solidFill>
-                <a:effectLst/>
-                <a:latin typeface="+mn-lt"/>
-              </a:rPr>
-              <a:t> A DNA-binding site may occur in either orientation, so the reverse complement is considered automatically for DNA.</a:t>
-            </a:r>
-          </a:p>
-          <a:p>
-            <a:pPr marL="342900" lvl="0" indent="-342900" algn="l">
-              <a:buFont typeface="+mj-lt"/>
-              <a:buAutoNum type="arabicPeriod"/>
-            </a:pPr>
-            <a:r>
-              <a:rPr lang="en-IT" sz="1800" b="1" i="0" dirty="0">
-                <a:solidFill>
-                  <a:schemeClr val="tx1"/>
-                </a:solidFill>
-                <a:effectLst/>
-                <a:latin typeface="+mn-lt"/>
-              </a:rPr>
-              <a:t>Evaluate enrichment.</a:t>
-            </a:r>
-            <a:r>
-              <a:rPr lang="en-IT" sz="1800" b="0" i="0" dirty="0">
-                <a:solidFill>
-                  <a:schemeClr val="tx1"/>
-                </a:solidFill>
-                <a:effectLst/>
-                <a:latin typeface="+mn-lt"/>
-              </a:rPr>
-              <a:t> STREME asks whether sequences containing good matches to the motif are more frequent in the primary set than in the control set.</a:t>
-            </a:r>
-          </a:p>
-          <a:p>
-            <a:pPr marL="342900" lvl="0" indent="-342900" algn="l">
-              <a:buFont typeface="+mj-lt"/>
-              <a:buAutoNum type="arabicPeriod"/>
-            </a:pPr>
-            <a:r>
-              <a:rPr lang="en-IT" sz="1800" b="1" i="0" dirty="0">
-                <a:solidFill>
-                  <a:schemeClr val="tx1"/>
-                </a:solidFill>
-                <a:effectLst/>
-                <a:latin typeface="+mn-lt"/>
-              </a:rPr>
-              <a:t>Continue searching.</a:t>
-            </a:r>
-            <a:r>
-              <a:rPr lang="en-IT" sz="1800" b="0" i="0" dirty="0">
-                <a:solidFill>
-                  <a:schemeClr val="tx1"/>
-                </a:solidFill>
-                <a:effectLst/>
-                <a:latin typeface="+mn-lt"/>
-              </a:rPr>
-              <a:t> After a motif is found, its strongest sites are masked/erased and STREME can search for additional motifs in the remaining sequence information.</a:t>
-            </a:r>
-          </a:p>
-        </p:txBody>
-      </p:sp>
-      <p:sp>
-        <p:nvSpPr>
-          <p:cNvPr id="9" name="TextBox 8">
-            <a:extLst>
-              <a:ext uri="{FF2B5EF4-FFF2-40B4-BE49-F238E27FC236}">
-                <a16:creationId xmlns:a16="http://schemas.microsoft.com/office/drawing/2014/main" id="{A317D3F3-8335-815E-A35D-67889975DC49}"/>
-              </a:ext>
-            </a:extLst>
-          </p:cNvPr>
-          <p:cNvSpPr txBox="1"/>
-          <p:nvPr/>
-        </p:nvSpPr>
-        <p:spPr>
-          <a:xfrm>
-            <a:off x="0" y="0"/>
-            <a:ext cx="12192000" cy="523220"/>
-          </a:xfrm>
-          <a:prstGeom prst="rect">
-            <a:avLst/>
-          </a:prstGeom>
-          <a:noFill/>
-        </p:spPr>
-        <p:txBody>
-          <a:bodyPr wrap="square">
-            <a:spAutoFit/>
-          </a:bodyPr>
-          <a:lstStyle/>
-          <a:p>
-            <a:r>
-              <a:rPr lang="en-IT" sz="2800" b="1" dirty="0"/>
-              <a:t>De novo motif discovery with STREME</a:t>
-            </a:r>
-          </a:p>
-        </p:txBody>
-      </p:sp>
-      <p:pic>
-        <p:nvPicPr>
-          <p:cNvPr id="10" name="Picture 9">
-            <a:extLst>
-              <a:ext uri="{FF2B5EF4-FFF2-40B4-BE49-F238E27FC236}">
-                <a16:creationId xmlns:a16="http://schemas.microsoft.com/office/drawing/2014/main" id="{AA25F026-C01E-756A-660E-98905C3D3CCA}"/>
-              </a:ext>
-            </a:extLst>
-          </p:cNvPr>
-          <p:cNvPicPr>
-            <a:picLocks noChangeAspect="1"/>
-          </p:cNvPicPr>
-          <p:nvPr/>
-        </p:nvPicPr>
-        <p:blipFill>
-          <a:blip r:embed="rId2"/>
-          <a:stretch>
-            <a:fillRect/>
-          </a:stretch>
-        </p:blipFill>
-        <p:spPr>
-          <a:xfrm>
-            <a:off x="6964680" y="0"/>
-            <a:ext cx="5227320" cy="1471924"/>
-          </a:xfrm>
-          <a:prstGeom prst="rect">
-            <a:avLst/>
-          </a:prstGeom>
-          <a:ln>
-            <a:solidFill>
-              <a:schemeClr val="tx1"/>
-            </a:solidFill>
-          </a:ln>
-        </p:spPr>
-      </p:pic>
-    </p:spTree>
-    <p:extLst>
-      <p:ext uri="{BB962C8B-B14F-4D97-AF65-F5344CB8AC3E}">
-        <p14:creationId xmlns:p14="http://schemas.microsoft.com/office/powerpoint/2010/main" val="3666508007"/>
       </p:ext>
     </p:extLst>
   </p:cSld>
@@ -8235,7 +10361,7 @@
           <a:p>
             <a:fld id="{761DFEEA-1162-B343-ACBF-B3E92F6AC390}" type="datetime1">
               <a:rPr lang="it-IT" smtClean="0"/>
-              <a:t>08/10/26</a:t>
+              <a:t>15/10/26</a:t>
             </a:fld>
             <a:endParaRPr lang="en-GB"/>
           </a:p>
@@ -8471,6 +10597,842 @@
 </p:sld>
 </file>
 
+<file path=ppt/slides/slide20.xml><?xml version="1.0" encoding="utf-8"?>
+<p:sld xmlns:a="http://schemas.openxmlformats.org/drawingml/2006/main" xmlns:r="http://schemas.openxmlformats.org/officeDocument/2006/relationships" xmlns:p="http://schemas.openxmlformats.org/presentationml/2006/main">
+  <p:cSld>
+    <p:spTree>
+      <p:nvGrpSpPr>
+        <p:cNvPr id="1" name=""/>
+        <p:cNvGrpSpPr/>
+        <p:nvPr/>
+      </p:nvGrpSpPr>
+      <p:grpSpPr>
+        <a:xfrm>
+          <a:off x="0" y="0"/>
+          <a:ext cx="0" cy="0"/>
+          <a:chOff x="0" y="0"/>
+          <a:chExt cx="0" cy="0"/>
+        </a:xfrm>
+      </p:grpSpPr>
+      <p:sp>
+        <p:nvSpPr>
+          <p:cNvPr id="4" name="Date Placeholder 3">
+            <a:extLst>
+              <a:ext uri="{FF2B5EF4-FFF2-40B4-BE49-F238E27FC236}">
+                <a16:creationId xmlns:a16="http://schemas.microsoft.com/office/drawing/2014/main" id="{063B98AF-3CB2-2C31-D6FC-A2A3418C919F}"/>
+              </a:ext>
+            </a:extLst>
+          </p:cNvPr>
+          <p:cNvSpPr>
+            <a:spLocks noGrp="1"/>
+          </p:cNvSpPr>
+          <p:nvPr>
+            <p:ph type="dt" sz="half" idx="10"/>
+          </p:nvPr>
+        </p:nvSpPr>
+        <p:spPr/>
+        <p:txBody>
+          <a:bodyPr/>
+          <a:lstStyle/>
+          <a:p>
+            <a:fld id="{761DFEEA-1162-B343-ACBF-B3E92F6AC390}" type="datetime1">
+              <a:rPr lang="it-IT" smtClean="0"/>
+              <a:t>15/10/26</a:t>
+            </a:fld>
+            <a:endParaRPr lang="en-GB" dirty="0"/>
+          </a:p>
+        </p:txBody>
+      </p:sp>
+      <p:sp>
+        <p:nvSpPr>
+          <p:cNvPr id="5" name="Footer Placeholder 4">
+            <a:extLst>
+              <a:ext uri="{FF2B5EF4-FFF2-40B4-BE49-F238E27FC236}">
+                <a16:creationId xmlns:a16="http://schemas.microsoft.com/office/drawing/2014/main" id="{D377EBF2-39F9-4FD2-282F-A7D423AE12B4}"/>
+              </a:ext>
+            </a:extLst>
+          </p:cNvPr>
+          <p:cNvSpPr>
+            <a:spLocks noGrp="1"/>
+          </p:cNvSpPr>
+          <p:nvPr>
+            <p:ph type="ftr" sz="quarter" idx="11"/>
+          </p:nvPr>
+        </p:nvSpPr>
+        <p:spPr/>
+        <p:txBody>
+          <a:bodyPr/>
+          <a:lstStyle/>
+          <a:p>
+            <a:r>
+              <a:rPr lang="en-GB" dirty="0"/>
+              <a:t>Day 1: Reproducible NGS Data Analysis on Personal Laptops</a:t>
+            </a:r>
+          </a:p>
+        </p:txBody>
+      </p:sp>
+      <p:sp>
+        <p:nvSpPr>
+          <p:cNvPr id="6" name="Slide Number Placeholder 5">
+            <a:extLst>
+              <a:ext uri="{FF2B5EF4-FFF2-40B4-BE49-F238E27FC236}">
+                <a16:creationId xmlns:a16="http://schemas.microsoft.com/office/drawing/2014/main" id="{30098E79-3320-176B-5FA3-2A3D754805B7}"/>
+              </a:ext>
+            </a:extLst>
+          </p:cNvPr>
+          <p:cNvSpPr>
+            <a:spLocks noGrp="1"/>
+          </p:cNvSpPr>
+          <p:nvPr>
+            <p:ph type="sldNum" sz="quarter" idx="12"/>
+          </p:nvPr>
+        </p:nvSpPr>
+        <p:spPr/>
+        <p:txBody>
+          <a:bodyPr/>
+          <a:lstStyle/>
+          <a:p>
+            <a:fld id="{62E92BA6-6E87-3343-8D2C-B7A656D628E4}" type="slidenum">
+              <a:rPr lang="en-GB" smtClean="0"/>
+              <a:t>19</a:t>
+            </a:fld>
+            <a:endParaRPr lang="en-GB"/>
+          </a:p>
+        </p:txBody>
+      </p:sp>
+      <p:sp>
+        <p:nvSpPr>
+          <p:cNvPr id="7" name="TextBox 6">
+            <a:extLst>
+              <a:ext uri="{FF2B5EF4-FFF2-40B4-BE49-F238E27FC236}">
+                <a16:creationId xmlns:a16="http://schemas.microsoft.com/office/drawing/2014/main" id="{21FE0794-6E92-E0A9-EE49-0D899618D582}"/>
+              </a:ext>
+            </a:extLst>
+          </p:cNvPr>
+          <p:cNvSpPr txBox="1"/>
+          <p:nvPr/>
+        </p:nvSpPr>
+        <p:spPr>
+          <a:xfrm>
+            <a:off x="0" y="0"/>
+            <a:ext cx="12192000" cy="523220"/>
+          </a:xfrm>
+          <a:prstGeom prst="rect">
+            <a:avLst/>
+          </a:prstGeom>
+          <a:noFill/>
+        </p:spPr>
+        <p:txBody>
+          <a:bodyPr wrap="square">
+            <a:spAutoFit/>
+          </a:bodyPr>
+          <a:lstStyle/>
+          <a:p>
+            <a:r>
+              <a:rPr lang="en-IT" sz="2800" b="1" dirty="0"/>
+              <a:t>De novo motif discovery with STREME</a:t>
+            </a:r>
+          </a:p>
+        </p:txBody>
+      </p:sp>
+      <p:sp>
+        <p:nvSpPr>
+          <p:cNvPr id="8" name="TextBox 7">
+            <a:extLst>
+              <a:ext uri="{FF2B5EF4-FFF2-40B4-BE49-F238E27FC236}">
+                <a16:creationId xmlns:a16="http://schemas.microsoft.com/office/drawing/2014/main" id="{A4242A9B-AC00-C44B-84B2-4E84BDFC690B}"/>
+              </a:ext>
+            </a:extLst>
+          </p:cNvPr>
+          <p:cNvSpPr txBox="1"/>
+          <p:nvPr/>
+        </p:nvSpPr>
+        <p:spPr>
+          <a:xfrm>
+            <a:off x="170688" y="902208"/>
+            <a:ext cx="11340477" cy="369332"/>
+          </a:xfrm>
+          <a:prstGeom prst="rect">
+            <a:avLst/>
+          </a:prstGeom>
+          <a:noFill/>
+        </p:spPr>
+        <p:txBody>
+          <a:bodyPr wrap="none" rtlCol="0">
+            <a:spAutoFit/>
+          </a:bodyPr>
+          <a:lstStyle/>
+          <a:p>
+            <a:r>
+              <a:rPr lang="en-IT" dirty="0"/>
+              <a:t>ChIP-seq tells us </a:t>
+            </a:r>
+            <a:r>
+              <a:rPr lang="en-IT" b="1" dirty="0"/>
+              <a:t>where</a:t>
+            </a:r>
+            <a:r>
+              <a:rPr lang="en-IT" dirty="0"/>
+              <a:t> a protein-associated enrichment occurs in the genome. Motif analysis asks a different question:</a:t>
+            </a:r>
+            <a:endParaRPr lang="en-GB" dirty="0"/>
+          </a:p>
+        </p:txBody>
+      </p:sp>
+      <p:sp>
+        <p:nvSpPr>
+          <p:cNvPr id="10" name="TextBox 9">
+            <a:extLst>
+              <a:ext uri="{FF2B5EF4-FFF2-40B4-BE49-F238E27FC236}">
+                <a16:creationId xmlns:a16="http://schemas.microsoft.com/office/drawing/2014/main" id="{5FEED0D7-DFE7-AB61-FA1E-E64BAB7F593B}"/>
+              </a:ext>
+            </a:extLst>
+          </p:cNvPr>
+          <p:cNvSpPr txBox="1"/>
+          <p:nvPr/>
+        </p:nvSpPr>
+        <p:spPr>
+          <a:xfrm>
+            <a:off x="0" y="1450473"/>
+            <a:ext cx="12192000" cy="400110"/>
+          </a:xfrm>
+          <a:prstGeom prst="rect">
+            <a:avLst/>
+          </a:prstGeom>
+          <a:noFill/>
+        </p:spPr>
+        <p:txBody>
+          <a:bodyPr wrap="square">
+            <a:spAutoFit/>
+          </a:bodyPr>
+          <a:lstStyle/>
+          <a:p>
+            <a:pPr algn="ctr"/>
+            <a:r>
+              <a:rPr lang="en-IT" sz="2000" b="0" i="0" dirty="0">
+                <a:solidFill>
+                  <a:schemeClr val="tx1">
+                    <a:lumMod val="50000"/>
+                    <a:lumOff val="50000"/>
+                  </a:schemeClr>
+                </a:solidFill>
+                <a:effectLst/>
+                <a:latin typeface="+mn-lt"/>
+              </a:rPr>
+              <a:t>Do those enriched regions share a short DNA sequence pattern more often than expected by chance?</a:t>
+            </a:r>
+            <a:endParaRPr lang="en-GB" sz="2000" dirty="0">
+              <a:solidFill>
+                <a:schemeClr val="tx1">
+                  <a:lumMod val="50000"/>
+                  <a:lumOff val="50000"/>
+                </a:schemeClr>
+              </a:solidFill>
+            </a:endParaRPr>
+          </a:p>
+        </p:txBody>
+      </p:sp>
+      <p:pic>
+        <p:nvPicPr>
+          <p:cNvPr id="12" name="Picture 11">
+            <a:extLst>
+              <a:ext uri="{FF2B5EF4-FFF2-40B4-BE49-F238E27FC236}">
+                <a16:creationId xmlns:a16="http://schemas.microsoft.com/office/drawing/2014/main" id="{2DD22CF0-3ACA-CA77-7FB6-FECE4EF83A46}"/>
+              </a:ext>
+            </a:extLst>
+          </p:cNvPr>
+          <p:cNvPicPr>
+            <a:picLocks noChangeAspect="1"/>
+          </p:cNvPicPr>
+          <p:nvPr/>
+        </p:nvPicPr>
+        <p:blipFill>
+          <a:blip r:embed="rId2"/>
+          <a:stretch>
+            <a:fillRect/>
+          </a:stretch>
+        </p:blipFill>
+        <p:spPr>
+          <a:xfrm>
+            <a:off x="405384" y="2334712"/>
+            <a:ext cx="7772400" cy="2188575"/>
+          </a:xfrm>
+          <a:prstGeom prst="rect">
+            <a:avLst/>
+          </a:prstGeom>
+          <a:ln>
+            <a:solidFill>
+              <a:schemeClr val="tx1"/>
+            </a:solidFill>
+          </a:ln>
+        </p:spPr>
+      </p:pic>
+      <p:sp>
+        <p:nvSpPr>
+          <p:cNvPr id="14" name="TextBox 13">
+            <a:extLst>
+              <a:ext uri="{FF2B5EF4-FFF2-40B4-BE49-F238E27FC236}">
+                <a16:creationId xmlns:a16="http://schemas.microsoft.com/office/drawing/2014/main" id="{F910230C-C116-4CEA-E505-081E504C8E19}"/>
+              </a:ext>
+            </a:extLst>
+          </p:cNvPr>
+          <p:cNvSpPr txBox="1"/>
+          <p:nvPr/>
+        </p:nvSpPr>
+        <p:spPr>
+          <a:xfrm>
+            <a:off x="8327136" y="2334711"/>
+            <a:ext cx="3713422" cy="2585323"/>
+          </a:xfrm>
+          <a:prstGeom prst="rect">
+            <a:avLst/>
+          </a:prstGeom>
+          <a:noFill/>
+        </p:spPr>
+        <p:txBody>
+          <a:bodyPr wrap="square">
+            <a:spAutoFit/>
+          </a:bodyPr>
+          <a:lstStyle/>
+          <a:p>
+            <a:r>
+              <a:rPr lang="en-IT" sz="1800" b="1" i="0" dirty="0">
+                <a:solidFill>
+                  <a:schemeClr val="tx1"/>
+                </a:solidFill>
+                <a:effectLst/>
+                <a:latin typeface="+mn-lt"/>
+              </a:rPr>
+              <a:t>De novo</a:t>
+            </a:r>
+            <a:r>
+              <a:rPr lang="en-IT" sz="1800" b="0" i="0" dirty="0">
+                <a:solidFill>
+                  <a:schemeClr val="tx1"/>
+                </a:solidFill>
+                <a:effectLst/>
+                <a:latin typeface="+mn-lt"/>
+              </a:rPr>
+              <a:t> means that we do not give STREME a known HP1021 binding motif and ask whether it is present. </a:t>
+            </a:r>
+          </a:p>
+          <a:p>
+            <a:endParaRPr lang="en-IT" dirty="0"/>
+          </a:p>
+          <a:p>
+            <a:r>
+              <a:rPr lang="en-IT" sz="1800" b="0" i="0" dirty="0">
+                <a:solidFill>
+                  <a:schemeClr val="tx1"/>
+                </a:solidFill>
+                <a:effectLst/>
+                <a:latin typeface="+mn-lt"/>
+              </a:rPr>
+              <a:t>STREME starts from the peak sequences themselves and searches for recurring patterns that are enriched compared with a background set.</a:t>
+            </a:r>
+            <a:endParaRPr lang="en-GB" dirty="0"/>
+          </a:p>
+        </p:txBody>
+      </p:sp>
+      <p:sp>
+        <p:nvSpPr>
+          <p:cNvPr id="16" name="TextBox 15">
+            <a:extLst>
+              <a:ext uri="{FF2B5EF4-FFF2-40B4-BE49-F238E27FC236}">
+                <a16:creationId xmlns:a16="http://schemas.microsoft.com/office/drawing/2014/main" id="{F1DB4D6A-02CB-2BB4-006A-917C9E293E18}"/>
+              </a:ext>
+            </a:extLst>
+          </p:cNvPr>
+          <p:cNvSpPr txBox="1"/>
+          <p:nvPr/>
+        </p:nvSpPr>
+        <p:spPr>
+          <a:xfrm>
+            <a:off x="405384" y="5032462"/>
+            <a:ext cx="11786616" cy="1200329"/>
+          </a:xfrm>
+          <a:prstGeom prst="rect">
+            <a:avLst/>
+          </a:prstGeom>
+          <a:noFill/>
+        </p:spPr>
+        <p:txBody>
+          <a:bodyPr wrap="square">
+            <a:spAutoFit/>
+          </a:bodyPr>
+          <a:lstStyle/>
+          <a:p>
+            <a:pPr marL="342900" lvl="0" indent="-342900" algn="l">
+              <a:buFont typeface="Arial" panose="020B0604020202020204" pitchFamily="34" charset="0"/>
+              <a:buChar char="•"/>
+            </a:pPr>
+            <a:r>
+              <a:rPr lang="en-IT" sz="1800" b="0" i="0" dirty="0">
+                <a:solidFill>
+                  <a:schemeClr val="tx1"/>
+                </a:solidFill>
+                <a:effectLst/>
+                <a:latin typeface="+mn-lt"/>
+              </a:rPr>
+              <a:t>the DNA-binding preference is unknown;</a:t>
+            </a:r>
+          </a:p>
+          <a:p>
+            <a:pPr marL="342900" lvl="0" indent="-342900" algn="l">
+              <a:buFont typeface="Arial" panose="020B0604020202020204" pitchFamily="34" charset="0"/>
+              <a:buChar char="•"/>
+            </a:pPr>
+            <a:r>
+              <a:rPr lang="en-IT" sz="1800" b="0" i="0" dirty="0">
+                <a:solidFill>
+                  <a:schemeClr val="tx1"/>
+                </a:solidFill>
+                <a:effectLst/>
+                <a:latin typeface="+mn-lt"/>
+              </a:rPr>
+              <a:t>we want to recover the expected motif without forcing the answer;</a:t>
+            </a:r>
+          </a:p>
+          <a:p>
+            <a:pPr marL="342900" lvl="0" indent="-342900" algn="l">
+              <a:buFont typeface="Arial" panose="020B0604020202020204" pitchFamily="34" charset="0"/>
+              <a:buChar char="•"/>
+            </a:pPr>
+            <a:r>
+              <a:rPr lang="en-IT" sz="1800" b="0" i="0" dirty="0">
+                <a:solidFill>
+                  <a:schemeClr val="tx1"/>
+                </a:solidFill>
+                <a:effectLst/>
+                <a:latin typeface="+mn-lt"/>
+              </a:rPr>
+              <a:t>we want to detect additional motifs that could reflect cofactors or other sequence features associated with the peaks.</a:t>
+            </a:r>
+          </a:p>
+          <a:p>
+            <a:pPr marL="342900" lvl="0" indent="-342900" algn="l">
+              <a:buFont typeface="Arial" panose="020B0604020202020204" pitchFamily="34" charset="0"/>
+              <a:buChar char="•"/>
+            </a:pPr>
+            <a:r>
+              <a:rPr lang="en-IT" dirty="0"/>
+              <a:t>As a QC given the known motif for the targeted protein</a:t>
+            </a:r>
+            <a:endParaRPr lang="en-GB" dirty="0"/>
+          </a:p>
+        </p:txBody>
+      </p:sp>
+    </p:spTree>
+    <p:extLst>
+      <p:ext uri="{BB962C8B-B14F-4D97-AF65-F5344CB8AC3E}">
+        <p14:creationId xmlns:p14="http://schemas.microsoft.com/office/powerpoint/2010/main" val="116167225"/>
+      </p:ext>
+    </p:extLst>
+  </p:cSld>
+  <p:clrMapOvr>
+    <a:masterClrMapping/>
+  </p:clrMapOvr>
+</p:sld>
+</file>
+
+<file path=ppt/slides/slide21.xml><?xml version="1.0" encoding="utf-8"?>
+<p:sld xmlns:a="http://schemas.openxmlformats.org/drawingml/2006/main" xmlns:r="http://schemas.openxmlformats.org/officeDocument/2006/relationships" xmlns:p="http://schemas.openxmlformats.org/presentationml/2006/main">
+  <p:cSld>
+    <p:spTree>
+      <p:nvGrpSpPr>
+        <p:cNvPr id="1" name=""/>
+        <p:cNvGrpSpPr/>
+        <p:nvPr/>
+      </p:nvGrpSpPr>
+      <p:grpSpPr>
+        <a:xfrm>
+          <a:off x="0" y="0"/>
+          <a:ext cx="0" cy="0"/>
+          <a:chOff x="0" y="0"/>
+          <a:chExt cx="0" cy="0"/>
+        </a:xfrm>
+      </p:grpSpPr>
+      <p:sp>
+        <p:nvSpPr>
+          <p:cNvPr id="4" name="Date Placeholder 3">
+            <a:extLst>
+              <a:ext uri="{FF2B5EF4-FFF2-40B4-BE49-F238E27FC236}">
+                <a16:creationId xmlns:a16="http://schemas.microsoft.com/office/drawing/2014/main" id="{717E1797-475D-1867-AC1D-B904D43E3E27}"/>
+              </a:ext>
+            </a:extLst>
+          </p:cNvPr>
+          <p:cNvSpPr>
+            <a:spLocks noGrp="1"/>
+          </p:cNvSpPr>
+          <p:nvPr>
+            <p:ph type="dt" sz="half" idx="10"/>
+          </p:nvPr>
+        </p:nvSpPr>
+        <p:spPr/>
+        <p:txBody>
+          <a:bodyPr/>
+          <a:lstStyle/>
+          <a:p>
+            <a:fld id="{761DFEEA-1162-B343-ACBF-B3E92F6AC390}" type="datetime1">
+              <a:rPr lang="it-IT" smtClean="0"/>
+              <a:t>15/10/26</a:t>
+            </a:fld>
+            <a:endParaRPr lang="en-GB"/>
+          </a:p>
+        </p:txBody>
+      </p:sp>
+      <p:sp>
+        <p:nvSpPr>
+          <p:cNvPr id="5" name="Footer Placeholder 4">
+            <a:extLst>
+              <a:ext uri="{FF2B5EF4-FFF2-40B4-BE49-F238E27FC236}">
+                <a16:creationId xmlns:a16="http://schemas.microsoft.com/office/drawing/2014/main" id="{F6B5BDF9-ED9F-D22C-34B1-F66F13BB5175}"/>
+              </a:ext>
+            </a:extLst>
+          </p:cNvPr>
+          <p:cNvSpPr>
+            <a:spLocks noGrp="1"/>
+          </p:cNvSpPr>
+          <p:nvPr>
+            <p:ph type="ftr" sz="quarter" idx="11"/>
+          </p:nvPr>
+        </p:nvSpPr>
+        <p:spPr/>
+        <p:txBody>
+          <a:bodyPr/>
+          <a:lstStyle/>
+          <a:p>
+            <a:r>
+              <a:rPr lang="en-GB"/>
+              <a:t>Day 1: Reproducible NGS Data Analysis on Personal Laptops</a:t>
+            </a:r>
+          </a:p>
+        </p:txBody>
+      </p:sp>
+      <p:sp>
+        <p:nvSpPr>
+          <p:cNvPr id="6" name="Slide Number Placeholder 5">
+            <a:extLst>
+              <a:ext uri="{FF2B5EF4-FFF2-40B4-BE49-F238E27FC236}">
+                <a16:creationId xmlns:a16="http://schemas.microsoft.com/office/drawing/2014/main" id="{9BBBC257-7F02-89F1-29F2-D19823281107}"/>
+              </a:ext>
+            </a:extLst>
+          </p:cNvPr>
+          <p:cNvSpPr>
+            <a:spLocks noGrp="1"/>
+          </p:cNvSpPr>
+          <p:nvPr>
+            <p:ph type="sldNum" sz="quarter" idx="12"/>
+          </p:nvPr>
+        </p:nvSpPr>
+        <p:spPr/>
+        <p:txBody>
+          <a:bodyPr/>
+          <a:lstStyle/>
+          <a:p>
+            <a:fld id="{62E92BA6-6E87-3343-8D2C-B7A656D628E4}" type="slidenum">
+              <a:rPr lang="en-GB" smtClean="0"/>
+              <a:t>20</a:t>
+            </a:fld>
+            <a:endParaRPr lang="en-GB"/>
+          </a:p>
+        </p:txBody>
+      </p:sp>
+      <p:sp>
+        <p:nvSpPr>
+          <p:cNvPr id="8" name="TextBox 7">
+            <a:extLst>
+              <a:ext uri="{FF2B5EF4-FFF2-40B4-BE49-F238E27FC236}">
+                <a16:creationId xmlns:a16="http://schemas.microsoft.com/office/drawing/2014/main" id="{1346DA1A-EE0C-48CD-32F7-5ABB17D04D9C}"/>
+              </a:ext>
+            </a:extLst>
+          </p:cNvPr>
+          <p:cNvSpPr txBox="1"/>
+          <p:nvPr/>
+        </p:nvSpPr>
+        <p:spPr>
+          <a:xfrm>
+            <a:off x="838200" y="2067477"/>
+            <a:ext cx="10131552" cy="3693319"/>
+          </a:xfrm>
+          <a:prstGeom prst="rect">
+            <a:avLst/>
+          </a:prstGeom>
+          <a:noFill/>
+        </p:spPr>
+        <p:txBody>
+          <a:bodyPr wrap="square">
+            <a:spAutoFit/>
+          </a:bodyPr>
+          <a:lstStyle/>
+          <a:p>
+            <a:pPr indent="0" algn="l">
+              <a:buNone/>
+            </a:pPr>
+            <a:r>
+              <a:rPr lang="en-IT" sz="1800" b="0" i="0" dirty="0">
+                <a:solidFill>
+                  <a:schemeClr val="tx1"/>
+                </a:solidFill>
+                <a:effectLst/>
+                <a:latin typeface="+mn-lt"/>
+              </a:rPr>
+              <a:t>STREME proceeds from candidate sequence words toward a more flexible motif representation:</a:t>
+            </a:r>
+          </a:p>
+          <a:p>
+            <a:pPr indent="0" algn="l">
+              <a:buNone/>
+            </a:pPr>
+            <a:endParaRPr lang="en-IT" sz="1800" b="0" i="0" dirty="0">
+              <a:solidFill>
+                <a:schemeClr val="tx1"/>
+              </a:solidFill>
+              <a:effectLst/>
+              <a:latin typeface="+mn-lt"/>
+            </a:endParaRPr>
+          </a:p>
+          <a:p>
+            <a:pPr marL="342900" lvl="0" indent="-342900" algn="l">
+              <a:buFont typeface="+mj-lt"/>
+              <a:buAutoNum type="arabicPeriod"/>
+            </a:pPr>
+            <a:r>
+              <a:rPr lang="en-IT" sz="1800" b="1" i="0" dirty="0">
+                <a:solidFill>
+                  <a:schemeClr val="tx1"/>
+                </a:solidFill>
+                <a:effectLst/>
+                <a:latin typeface="+mn-lt"/>
+              </a:rPr>
+              <a:t>Find promising seed words.</a:t>
+            </a:r>
+            <a:r>
+              <a:rPr lang="en-IT" sz="1800" b="0" i="0" dirty="0">
+                <a:solidFill>
+                  <a:schemeClr val="tx1"/>
+                </a:solidFill>
+                <a:effectLst/>
+                <a:latin typeface="+mn-lt"/>
+              </a:rPr>
+              <a:t> Short words enriched in the primary sequences relative to the controls provide starting points.</a:t>
+            </a:r>
+          </a:p>
+          <a:p>
+            <a:pPr marL="342900" lvl="0" indent="-342900" algn="l">
+              <a:buFont typeface="+mj-lt"/>
+              <a:buAutoNum type="arabicPeriod"/>
+            </a:pPr>
+            <a:r>
+              <a:rPr lang="en-IT" sz="1800" b="1" i="0" dirty="0">
+                <a:solidFill>
+                  <a:schemeClr val="tx1"/>
+                </a:solidFill>
+                <a:effectLst/>
+                <a:latin typeface="+mn-lt"/>
+              </a:rPr>
+              <a:t>Refine the motif.</a:t>
+            </a:r>
+            <a:r>
+              <a:rPr lang="en-IT" sz="1800" b="0" i="0" dirty="0">
+                <a:solidFill>
+                  <a:schemeClr val="tx1"/>
+                </a:solidFill>
+                <a:effectLst/>
+                <a:latin typeface="+mn-lt"/>
+              </a:rPr>
+              <a:t> Similar sequence occurrences are collected and used to improve the model.</a:t>
+            </a:r>
+          </a:p>
+          <a:p>
+            <a:pPr marL="342900" lvl="0" indent="-342900" algn="l">
+              <a:buFont typeface="+mj-lt"/>
+              <a:buAutoNum type="arabicPeriod"/>
+            </a:pPr>
+            <a:r>
+              <a:rPr lang="en-IT" sz="1800" b="1" i="0" dirty="0">
+                <a:solidFill>
+                  <a:schemeClr val="tx1"/>
+                </a:solidFill>
+                <a:effectLst/>
+                <a:latin typeface="+mn-lt"/>
+              </a:rPr>
+              <a:t>Represent the motif as a position-weight matrix (PWM).</a:t>
+            </a:r>
+            <a:r>
+              <a:rPr lang="en-IT" sz="1800" b="0" i="0" dirty="0">
+                <a:solidFill>
+                  <a:schemeClr val="tx1"/>
+                </a:solidFill>
+                <a:effectLst/>
+                <a:latin typeface="+mn-lt"/>
+              </a:rPr>
+              <a:t> Each position stores the preference for A, C, G and T rather than requiring one exact sequence.</a:t>
+            </a:r>
+          </a:p>
+          <a:p>
+            <a:pPr marL="342900" lvl="0" indent="-342900" algn="l">
+              <a:buFont typeface="+mj-lt"/>
+              <a:buAutoNum type="arabicPeriod"/>
+            </a:pPr>
+            <a:r>
+              <a:rPr lang="en-IT" sz="1800" b="1" i="0" dirty="0">
+                <a:solidFill>
+                  <a:schemeClr val="tx1"/>
+                </a:solidFill>
+                <a:effectLst/>
+                <a:latin typeface="+mn-lt"/>
+              </a:rPr>
+              <a:t>Search both DNA strands.</a:t>
+            </a:r>
+            <a:r>
+              <a:rPr lang="en-IT" sz="1800" b="0" i="0" dirty="0">
+                <a:solidFill>
+                  <a:schemeClr val="tx1"/>
+                </a:solidFill>
+                <a:effectLst/>
+                <a:latin typeface="+mn-lt"/>
+              </a:rPr>
+              <a:t> A DNA-binding site may occur in either orientation, so the reverse complement is considered automatically for DNA.</a:t>
+            </a:r>
+          </a:p>
+          <a:p>
+            <a:pPr marL="342900" lvl="0" indent="-342900" algn="l">
+              <a:buFont typeface="+mj-lt"/>
+              <a:buAutoNum type="arabicPeriod"/>
+            </a:pPr>
+            <a:r>
+              <a:rPr lang="en-IT" sz="1800" b="1" i="0" dirty="0">
+                <a:solidFill>
+                  <a:schemeClr val="tx1"/>
+                </a:solidFill>
+                <a:effectLst/>
+                <a:latin typeface="+mn-lt"/>
+              </a:rPr>
+              <a:t>Evaluate enrichment.</a:t>
+            </a:r>
+            <a:r>
+              <a:rPr lang="en-IT" sz="1800" b="0" i="0" dirty="0">
+                <a:solidFill>
+                  <a:schemeClr val="tx1"/>
+                </a:solidFill>
+                <a:effectLst/>
+                <a:latin typeface="+mn-lt"/>
+              </a:rPr>
+              <a:t> STREME asks whether sequences containing good matches to the motif are more frequent in the primary set than in the control set.</a:t>
+            </a:r>
+          </a:p>
+          <a:p>
+            <a:pPr marL="342900" lvl="0" indent="-342900" algn="l">
+              <a:buFont typeface="+mj-lt"/>
+              <a:buAutoNum type="arabicPeriod"/>
+            </a:pPr>
+            <a:r>
+              <a:rPr lang="en-IT" sz="1800" b="1" i="0" dirty="0">
+                <a:solidFill>
+                  <a:schemeClr val="tx1"/>
+                </a:solidFill>
+                <a:effectLst/>
+                <a:latin typeface="+mn-lt"/>
+              </a:rPr>
+              <a:t>Continue searching.</a:t>
+            </a:r>
+            <a:r>
+              <a:rPr lang="en-IT" sz="1800" b="0" i="0" dirty="0">
+                <a:solidFill>
+                  <a:schemeClr val="tx1"/>
+                </a:solidFill>
+                <a:effectLst/>
+                <a:latin typeface="+mn-lt"/>
+              </a:rPr>
+              <a:t> After a motif is found, its strongest sites are masked/erased and STREME can search for additional motifs in the remaining sequence information.</a:t>
+            </a:r>
+          </a:p>
+        </p:txBody>
+      </p:sp>
+      <p:sp>
+        <p:nvSpPr>
+          <p:cNvPr id="9" name="TextBox 8">
+            <a:extLst>
+              <a:ext uri="{FF2B5EF4-FFF2-40B4-BE49-F238E27FC236}">
+                <a16:creationId xmlns:a16="http://schemas.microsoft.com/office/drawing/2014/main" id="{A317D3F3-8335-815E-A35D-67889975DC49}"/>
+              </a:ext>
+            </a:extLst>
+          </p:cNvPr>
+          <p:cNvSpPr txBox="1"/>
+          <p:nvPr/>
+        </p:nvSpPr>
+        <p:spPr>
+          <a:xfrm>
+            <a:off x="0" y="0"/>
+            <a:ext cx="12192000" cy="523220"/>
+          </a:xfrm>
+          <a:prstGeom prst="rect">
+            <a:avLst/>
+          </a:prstGeom>
+          <a:noFill/>
+        </p:spPr>
+        <p:txBody>
+          <a:bodyPr wrap="square">
+            <a:spAutoFit/>
+          </a:bodyPr>
+          <a:lstStyle/>
+          <a:p>
+            <a:r>
+              <a:rPr lang="en-IT" sz="2800" b="1" dirty="0"/>
+              <a:t>De novo motif discovery with STREME</a:t>
+            </a:r>
+          </a:p>
+        </p:txBody>
+      </p:sp>
+      <p:pic>
+        <p:nvPicPr>
+          <p:cNvPr id="10" name="Picture 9">
+            <a:extLst>
+              <a:ext uri="{FF2B5EF4-FFF2-40B4-BE49-F238E27FC236}">
+                <a16:creationId xmlns:a16="http://schemas.microsoft.com/office/drawing/2014/main" id="{AA25F026-C01E-756A-660E-98905C3D3CCA}"/>
+              </a:ext>
+            </a:extLst>
+          </p:cNvPr>
+          <p:cNvPicPr>
+            <a:picLocks noChangeAspect="1"/>
+          </p:cNvPicPr>
+          <p:nvPr/>
+        </p:nvPicPr>
+        <p:blipFill>
+          <a:blip r:embed="rId2"/>
+          <a:stretch>
+            <a:fillRect/>
+          </a:stretch>
+        </p:blipFill>
+        <p:spPr>
+          <a:xfrm>
+            <a:off x="6964680" y="0"/>
+            <a:ext cx="5227320" cy="1471924"/>
+          </a:xfrm>
+          <a:prstGeom prst="rect">
+            <a:avLst/>
+          </a:prstGeom>
+          <a:ln>
+            <a:solidFill>
+              <a:schemeClr val="tx1"/>
+            </a:solidFill>
+          </a:ln>
+        </p:spPr>
+      </p:pic>
+    </p:spTree>
+    <p:extLst>
+      <p:ext uri="{BB962C8B-B14F-4D97-AF65-F5344CB8AC3E}">
+        <p14:creationId xmlns:p14="http://schemas.microsoft.com/office/powerpoint/2010/main" val="3666508007"/>
+      </p:ext>
+    </p:extLst>
+  </p:cSld>
+  <p:clrMapOvr>
+    <a:masterClrMapping/>
+  </p:clrMapOvr>
+</p:sld>
+</file>
+
 <file path=ppt/slides/slide3.xml><?xml version="1.0" encoding="utf-8"?>
 <p:sld xmlns:a="http://schemas.openxmlformats.org/drawingml/2006/main" xmlns:r="http://schemas.openxmlformats.org/officeDocument/2006/relationships" xmlns:p="http://schemas.openxmlformats.org/presentationml/2006/main">
   <p:cSld>
@@ -8511,7 +11473,7 @@
           <a:p>
             <a:fld id="{761DFEEA-1162-B343-ACBF-B3E92F6AC390}" type="datetime1">
               <a:rPr lang="it-IT" smtClean="0"/>
-              <a:t>08/10/26</a:t>
+              <a:t>15/10/26</a:t>
             </a:fld>
             <a:endParaRPr lang="en-GB"/>
           </a:p>
@@ -9624,7 +12586,7 @@
           <a:p>
             <a:fld id="{761DFEEA-1162-B343-ACBF-B3E92F6AC390}" type="datetime1">
               <a:rPr lang="it-IT" smtClean="0"/>
-              <a:t>08/10/26</a:t>
+              <a:t>15/10/26</a:t>
             </a:fld>
             <a:endParaRPr lang="en-GB"/>
           </a:p>
@@ -11755,7 +14717,7 @@
           <a:p>
             <a:fld id="{761DFEEA-1162-B343-ACBF-B3E92F6AC390}" type="datetime1">
               <a:rPr lang="it-IT" smtClean="0"/>
-              <a:t>08/10/26</a:t>
+              <a:t>15/10/26</a:t>
             </a:fld>
             <a:endParaRPr lang="en-GB"/>
           </a:p>
@@ -12408,10 +15370,41 @@
       </p:grpSpPr>
       <p:sp>
         <p:nvSpPr>
+          <p:cNvPr id="2" name="Title 1">
+            <a:extLst>
+              <a:ext uri="{FF2B5EF4-FFF2-40B4-BE49-F238E27FC236}">
+                <a16:creationId xmlns:a16="http://schemas.microsoft.com/office/drawing/2014/main" id="{0B938EBE-0656-56B3-46AC-4DEE8B138D7F}"/>
+              </a:ext>
+            </a:extLst>
+          </p:cNvPr>
+          <p:cNvSpPr>
+            <a:spLocks noGrp="1"/>
+          </p:cNvSpPr>
+          <p:nvPr>
+            <p:ph type="title"/>
+          </p:nvPr>
+        </p:nvSpPr>
+        <p:spPr/>
+        <p:txBody>
+          <a:bodyPr>
+            <a:normAutofit fontScale="90000"/>
+          </a:bodyPr>
+          <a:lstStyle/>
+          <a:p>
+            <a:r>
+              <a:rPr lang="en-IT" dirty="0"/>
+              <a:t>ChIP-seq QC before peak calling</a:t>
+            </a:r>
+            <a:endParaRPr lang="en-GB" dirty="0"/>
+          </a:p>
+        </p:txBody>
+      </p:sp>
+      <p:sp>
+        <p:nvSpPr>
           <p:cNvPr id="4" name="Date Placeholder 3">
             <a:extLst>
               <a:ext uri="{FF2B5EF4-FFF2-40B4-BE49-F238E27FC236}">
-                <a16:creationId xmlns:a16="http://schemas.microsoft.com/office/drawing/2014/main" id="{036D41BE-0535-3666-44BD-7D9D43547DBB}"/>
+                <a16:creationId xmlns:a16="http://schemas.microsoft.com/office/drawing/2014/main" id="{2054000F-7F68-43AF-4010-A016F9C7B3CB}"/>
               </a:ext>
             </a:extLst>
           </p:cNvPr>
@@ -12429,7 +15422,7 @@
           <a:p>
             <a:fld id="{761DFEEA-1162-B343-ACBF-B3E92F6AC390}" type="datetime1">
               <a:rPr lang="it-IT" smtClean="0"/>
-              <a:t>08/10/26</a:t>
+              <a:t>15/10/26</a:t>
             </a:fld>
             <a:endParaRPr lang="en-GB"/>
           </a:p>
@@ -12440,7 +15433,7 @@
           <p:cNvPr id="5" name="Footer Placeholder 4">
             <a:extLst>
               <a:ext uri="{FF2B5EF4-FFF2-40B4-BE49-F238E27FC236}">
-                <a16:creationId xmlns:a16="http://schemas.microsoft.com/office/drawing/2014/main" id="{2A5B017C-1FD5-52FF-2551-15E4DCE5790D}"/>
+                <a16:creationId xmlns:a16="http://schemas.microsoft.com/office/drawing/2014/main" id="{8DE349B4-BAE1-BFCC-35D0-9B4344485F6D}"/>
               </a:ext>
             </a:extLst>
           </p:cNvPr>
@@ -12468,7 +15461,7 @@
           <p:cNvPr id="6" name="Slide Number Placeholder 5">
             <a:extLst>
               <a:ext uri="{FF2B5EF4-FFF2-40B4-BE49-F238E27FC236}">
-                <a16:creationId xmlns:a16="http://schemas.microsoft.com/office/drawing/2014/main" id="{8FF26809-9CCC-E336-FEB1-3AD87A95AB82}"/>
+                <a16:creationId xmlns:a16="http://schemas.microsoft.com/office/drawing/2014/main" id="{2CA9B841-317D-8B34-4B09-6C5F78ADAF1E}"/>
               </a:ext>
             </a:extLst>
           </p:cNvPr>
@@ -12497,7 +15490,7 @@
           <p:cNvPr id="7" name="Text 2">
             <a:extLst>
               <a:ext uri="{FF2B5EF4-FFF2-40B4-BE49-F238E27FC236}">
-                <a16:creationId xmlns:a16="http://schemas.microsoft.com/office/drawing/2014/main" id="{ECE18393-DCCC-E791-13CE-E0E723223AAA}"/>
+                <a16:creationId xmlns:a16="http://schemas.microsoft.com/office/drawing/2014/main" id="{03F9DBB3-8A7A-2863-5E72-244E8792EAB0}"/>
               </a:ext>
             </a:extLst>
           </p:cNvPr>
@@ -12550,7 +15543,7 @@
           <p:cNvPr id="8" name="Shape 3">
             <a:extLst>
               <a:ext uri="{FF2B5EF4-FFF2-40B4-BE49-F238E27FC236}">
-                <a16:creationId xmlns:a16="http://schemas.microsoft.com/office/drawing/2014/main" id="{F4BA8BE9-AD13-6972-5151-432BF609AA4E}"/>
+                <a16:creationId xmlns:a16="http://schemas.microsoft.com/office/drawing/2014/main" id="{ED23CF8D-B428-71A1-4210-A8177024CD16}"/>
               </a:ext>
             </a:extLst>
           </p:cNvPr>
@@ -12587,7 +15580,7 @@
           <p:cNvPr id="9" name="Text 4">
             <a:extLst>
               <a:ext uri="{FF2B5EF4-FFF2-40B4-BE49-F238E27FC236}">
-                <a16:creationId xmlns:a16="http://schemas.microsoft.com/office/drawing/2014/main" id="{58F9B1B7-77CD-02EB-C35E-898F59083197}"/>
+                <a16:creationId xmlns:a16="http://schemas.microsoft.com/office/drawing/2014/main" id="{E0BAE7D9-AD07-00AD-D4D7-5B2738502BDB}"/>
               </a:ext>
             </a:extLst>
           </p:cNvPr>
@@ -12597,149 +15590,6 @@
         <p:spPr>
           <a:xfrm>
             <a:off x="1965959" y="1286077"/>
-            <a:ext cx="1325880" cy="640080"/>
-          </a:xfrm>
-          <a:prstGeom prst="rect">
-            <a:avLst/>
-          </a:prstGeom>
-          <a:solidFill>
-            <a:srgbClr val="FFFFFF"/>
-          </a:solidFill>
-          <a:ln w="12700">
-            <a:solidFill>
-              <a:srgbClr val="2F704F"/>
-            </a:solidFill>
-          </a:ln>
-        </p:spPr>
-        <p:txBody>
-          <a:bodyPr wrap="square" lIns="762" tIns="762" rIns="762" bIns="762" rtlCol="0" anchor="ctr">
-            <a:normAutofit/>
-          </a:bodyPr>
-          <a:lstStyle/>
-          <a:p>
-            <a:pPr marL="0" indent="0" algn="ctr">
-              <a:buNone/>
-            </a:pPr>
-            <a:r>
-              <a:rPr lang="en-US" sz="1200" dirty="0">
-                <a:solidFill>
-                  <a:srgbClr val="111111"/>
-                </a:solidFill>
-                <a:latin typeface="Gill Sans" pitchFamily="34" charset="0"/>
-                <a:ea typeface="Gill Sans" pitchFamily="34" charset="-122"/>
-                <a:cs typeface="Gill Sans" pitchFamily="34" charset="-120"/>
-              </a:rPr>
-              <a:t>Bowtie2</a:t>
-            </a:r>
-            <a:endParaRPr lang="en-US" sz="1200" dirty="0"/>
-          </a:p>
-          <a:p>
-            <a:pPr marL="0" indent="0" algn="ctr">
-              <a:buNone/>
-            </a:pPr>
-            <a:r>
-              <a:rPr lang="en-US" sz="1200" dirty="0">
-                <a:solidFill>
-                  <a:srgbClr val="111111"/>
-                </a:solidFill>
-                <a:latin typeface="Gill Sans" pitchFamily="34" charset="0"/>
-                <a:ea typeface="Gill Sans" pitchFamily="34" charset="-122"/>
-                <a:cs typeface="Gill Sans" pitchFamily="34" charset="-120"/>
-              </a:rPr>
-              <a:t>BAM</a:t>
-            </a:r>
-            <a:endParaRPr lang="en-US" sz="1200" dirty="0"/>
-          </a:p>
-        </p:txBody>
-      </p:sp>
-      <p:sp>
-        <p:nvSpPr>
-          <p:cNvPr id="10" name="Shape 5">
-            <a:extLst>
-              <a:ext uri="{FF2B5EF4-FFF2-40B4-BE49-F238E27FC236}">
-                <a16:creationId xmlns:a16="http://schemas.microsoft.com/office/drawing/2014/main" id="{D381E7E0-F6A8-0AE9-4879-3FB98566DC71}"/>
-              </a:ext>
-            </a:extLst>
-          </p:cNvPr>
-          <p:cNvSpPr/>
-          <p:nvPr/>
-        </p:nvSpPr>
-        <p:spPr>
-          <a:xfrm>
-            <a:off x="3319271" y="1606117"/>
-            <a:ext cx="219456" cy="0"/>
-          </a:xfrm>
-          <a:prstGeom prst="line">
-            <a:avLst/>
-          </a:prstGeom>
-          <a:noFill/>
-          <a:ln w="15240">
-            <a:solidFill>
-              <a:srgbClr val="2F704F"/>
-            </a:solidFill>
-            <a:prstDash val="solid"/>
-            <a:tailEnd type="triangle"/>
-          </a:ln>
-        </p:spPr>
-        <p:txBody>
-          <a:bodyPr/>
-          <a:lstStyle/>
-          <a:p>
-            <a:endParaRPr lang="en-GB"/>
-          </a:p>
-        </p:txBody>
-      </p:sp>
-      <p:sp>
-        <p:nvSpPr>
-          <p:cNvPr id="11" name="Title 1">
-            <a:extLst>
-              <a:ext uri="{FF2B5EF4-FFF2-40B4-BE49-F238E27FC236}">
-                <a16:creationId xmlns:a16="http://schemas.microsoft.com/office/drawing/2014/main" id="{4936E58C-989F-A717-670E-41EE46896DE0}"/>
-              </a:ext>
-            </a:extLst>
-          </p:cNvPr>
-          <p:cNvSpPr>
-            <a:spLocks noGrp="1"/>
-          </p:cNvSpPr>
-          <p:nvPr>
-            <p:ph type="title"/>
-          </p:nvPr>
-        </p:nvSpPr>
-        <p:spPr>
-          <a:xfrm>
-            <a:off x="155985" y="143352"/>
-            <a:ext cx="7783159" cy="551051"/>
-          </a:xfrm>
-        </p:spPr>
-        <p:txBody>
-          <a:bodyPr>
-            <a:normAutofit/>
-          </a:bodyPr>
-          <a:lstStyle/>
-          <a:p>
-            <a:r>
-              <a:rPr lang="en-IT" sz="3200" dirty="0"/>
-              <a:t>ChIP-seq specific QCs:  PhantomPeak check:</a:t>
-            </a:r>
-            <a:endParaRPr lang="en-GB" sz="3200" dirty="0"/>
-          </a:p>
-        </p:txBody>
-      </p:sp>
-      <p:sp>
-        <p:nvSpPr>
-          <p:cNvPr id="12" name="Text 6">
-            <a:extLst>
-              <a:ext uri="{FF2B5EF4-FFF2-40B4-BE49-F238E27FC236}">
-                <a16:creationId xmlns:a16="http://schemas.microsoft.com/office/drawing/2014/main" id="{57ECAA5A-D747-ACC6-E70B-41F2B4C90CEF}"/>
-              </a:ext>
-            </a:extLst>
-          </p:cNvPr>
-          <p:cNvSpPr/>
-          <p:nvPr/>
-        </p:nvSpPr>
-        <p:spPr>
-          <a:xfrm>
-            <a:off x="3611879" y="1286077"/>
             <a:ext cx="1325880" cy="640080"/>
           </a:xfrm>
           <a:prstGeom prst="rect">
@@ -12750,7 +15600,7 @@
           </a:solidFill>
           <a:ln w="12700">
             <a:solidFill>
-              <a:srgbClr val="2F704F"/>
+              <a:schemeClr val="tx1"/>
             </a:solidFill>
           </a:ln>
         </p:spPr>
@@ -12772,7 +15622,7 @@
                 <a:ea typeface="Gill Sans" pitchFamily="34" charset="-122"/>
                 <a:cs typeface="Gill Sans" pitchFamily="34" charset="-120"/>
               </a:rPr>
-              <a:t>ChIP QC</a:t>
+              <a:t>Bowtie2</a:t>
             </a:r>
             <a:endParaRPr lang="en-US" sz="1200" dirty="0">
               <a:solidFill>
@@ -12793,7 +15643,7 @@
                 <a:ea typeface="Gill Sans" pitchFamily="34" charset="-122"/>
                 <a:cs typeface="Gill Sans" pitchFamily="34" charset="-120"/>
               </a:rPr>
-              <a:t>phantom peak</a:t>
+              <a:t>BAM</a:t>
             </a:r>
             <a:endParaRPr lang="en-US" sz="1200" dirty="0">
               <a:solidFill>
@@ -12803,82 +15653,136 @@
           </a:p>
         </p:txBody>
       </p:sp>
-      <p:pic>
-        <p:nvPicPr>
-          <p:cNvPr id="13" name="Picture 12">
-            <a:extLst>
-              <a:ext uri="{FF2B5EF4-FFF2-40B4-BE49-F238E27FC236}">
-                <a16:creationId xmlns:a16="http://schemas.microsoft.com/office/drawing/2014/main" id="{E88F6775-D5E6-58B7-F774-9388EDE7E397}"/>
-              </a:ext>
-            </a:extLst>
-          </p:cNvPr>
-          <p:cNvPicPr>
-            <a:picLocks noChangeAspect="1"/>
-          </p:cNvPicPr>
+      <p:sp>
+        <p:nvSpPr>
+          <p:cNvPr id="17" name="TextBox 16">
+            <a:extLst>
+              <a:ext uri="{FF2B5EF4-FFF2-40B4-BE49-F238E27FC236}">
+                <a16:creationId xmlns:a16="http://schemas.microsoft.com/office/drawing/2014/main" id="{C46CB9AF-B167-BE8E-82C7-12E9279CB855}"/>
+              </a:ext>
+            </a:extLst>
+          </p:cNvPr>
+          <p:cNvSpPr txBox="1"/>
           <p:nvPr/>
-        </p:nvPicPr>
-        <p:blipFill>
-          <a:blip r:embed="rId2"/>
-          <a:stretch>
-            <a:fillRect/>
-          </a:stretch>
-        </p:blipFill>
+        </p:nvSpPr>
         <p:spPr>
           <a:xfrm>
-            <a:off x="409537" y="2342747"/>
-            <a:ext cx="4528222" cy="3917051"/>
+            <a:off x="186689" y="2138520"/>
+            <a:ext cx="7966711" cy="2031325"/>
           </a:xfrm>
           <a:prstGeom prst="rect">
             <a:avLst/>
           </a:prstGeom>
+          <a:noFill/>
+          <a:ln>
+            <a:solidFill>
+              <a:schemeClr val="tx1"/>
+            </a:solidFill>
+          </a:ln>
         </p:spPr>
-      </p:pic>
-      <p:pic>
-        <p:nvPicPr>
-          <p:cNvPr id="14" name="Picture 13">
-            <a:extLst>
-              <a:ext uri="{FF2B5EF4-FFF2-40B4-BE49-F238E27FC236}">
-                <a16:creationId xmlns:a16="http://schemas.microsoft.com/office/drawing/2014/main" id="{02C05C69-ACFD-B5B3-C4A0-A3D65005E162}"/>
-              </a:ext>
-            </a:extLst>
-          </p:cNvPr>
-          <p:cNvPicPr>
-            <a:picLocks noChangeAspect="1"/>
-          </p:cNvPicPr>
+        <p:txBody>
+          <a:bodyPr wrap="square">
+            <a:spAutoFit/>
+          </a:bodyPr>
+          <a:lstStyle/>
+          <a:p>
+            <a:pPr>
+              <a:buNone/>
+            </a:pPr>
+            <a:r>
+              <a:rPr lang="en-IT" b="1" dirty="0"/>
+              <a:t>Same alignment QC — different biological consequences</a:t>
+            </a:r>
+          </a:p>
+          <a:p>
+            <a:pPr>
+              <a:buNone/>
+            </a:pPr>
+            <a:r>
+              <a:rPr lang="en-IT" dirty="0"/>
+              <a:t>The same BAM concepts introduced for RNA-seq still apply:</a:t>
+            </a:r>
+          </a:p>
+          <a:p>
+            <a:pPr>
+              <a:buNone/>
+            </a:pPr>
+            <a:endParaRPr lang="en-IT" dirty="0"/>
+          </a:p>
+          <a:p>
+            <a:pPr marL="342900" lvl="0" indent="-342900">
+              <a:buFont typeface="Arial" panose="020B0604020202020204" pitchFamily="34" charset="0"/>
+              <a:buChar char="•"/>
+            </a:pPr>
+            <a:r>
+              <a:rPr lang="en-IT" b="1" dirty="0"/>
+              <a:t>Mapping confidence</a:t>
+            </a:r>
+            <a:r>
+              <a:rPr lang="en-IT" dirty="0"/>
+              <a:t> — are reads confidently assigned to the reference?</a:t>
+            </a:r>
+          </a:p>
+          <a:p>
+            <a:pPr marL="342900" lvl="0" indent="-342900">
+              <a:buFont typeface="Arial" panose="020B0604020202020204" pitchFamily="34" charset="0"/>
+              <a:buChar char="•"/>
+            </a:pPr>
+            <a:r>
+              <a:rPr lang="en-IT" b="1" dirty="0"/>
+              <a:t>Multi-mapping</a:t>
+            </a:r>
+            <a:r>
+              <a:rPr lang="en-IT" dirty="0"/>
+              <a:t> — can reads originate from several genomic positions?</a:t>
+            </a:r>
+          </a:p>
+          <a:p>
+            <a:pPr marL="342900" lvl="0" indent="-342900">
+              <a:buFont typeface="Arial" panose="020B0604020202020204" pitchFamily="34" charset="0"/>
+              <a:buChar char="•"/>
+            </a:pPr>
+            <a:r>
+              <a:rPr lang="en-IT" b="1" dirty="0"/>
+              <a:t>Coordinate duplication</a:t>
+            </a:r>
+            <a:r>
+              <a:rPr lang="en-IT" dirty="0"/>
+              <a:t> — are identical fragments represented repeatedly?</a:t>
+            </a:r>
+          </a:p>
+          <a:p>
+            <a:pPr marL="342900" lvl="0" indent="-342900">
+              <a:buFont typeface="Arial" panose="020B0604020202020204" pitchFamily="34" charset="0"/>
+              <a:buChar char="•"/>
+            </a:pPr>
+            <a:r>
+              <a:rPr lang="en-IT" b="1" dirty="0"/>
+              <a:t>Paired-end geometry</a:t>
+            </a:r>
+            <a:r>
+              <a:rPr lang="en-IT" dirty="0"/>
+              <a:t> — are fragments mapped as expected?</a:t>
+            </a:r>
+          </a:p>
+        </p:txBody>
+      </p:sp>
+      <p:sp>
+        <p:nvSpPr>
+          <p:cNvPr id="19" name="TextBox 18">
+            <a:extLst>
+              <a:ext uri="{FF2B5EF4-FFF2-40B4-BE49-F238E27FC236}">
+                <a16:creationId xmlns:a16="http://schemas.microsoft.com/office/drawing/2014/main" id="{E0B104CC-80A8-34D9-DEE6-2B640A2BDF23}"/>
+              </a:ext>
+            </a:extLst>
+          </p:cNvPr>
+          <p:cNvSpPr txBox="1"/>
           <p:nvPr/>
-        </p:nvPicPr>
-        <p:blipFill>
-          <a:blip r:embed="rId3"/>
-          <a:stretch>
-            <a:fillRect/>
-          </a:stretch>
-        </p:blipFill>
+        </p:nvSpPr>
         <p:spPr>
           <a:xfrm>
-            <a:off x="6420860" y="1266779"/>
-            <a:ext cx="5079065" cy="4706290"/>
-          </a:xfrm>
-          <a:prstGeom prst="rect">
-            <a:avLst/>
-          </a:prstGeom>
-        </p:spPr>
-      </p:pic>
-      <p:sp>
-        <p:nvSpPr>
-          <p:cNvPr id="16" name="TextBox 15">
-            <a:extLst>
-              <a:ext uri="{FF2B5EF4-FFF2-40B4-BE49-F238E27FC236}">
-                <a16:creationId xmlns:a16="http://schemas.microsoft.com/office/drawing/2014/main" id="{71DC3FB1-323C-991E-0A94-1F0DCA4092AC}"/>
-              </a:ext>
-            </a:extLst>
-          </p:cNvPr>
-          <p:cNvSpPr txBox="1"/>
-          <p:nvPr/>
-        </p:nvSpPr>
-        <p:spPr>
-          <a:xfrm>
-            <a:off x="6294124" y="714690"/>
-            <a:ext cx="5377923" cy="369332"/>
+            <a:off x="7856219" y="2575799"/>
+            <a:ext cx="4251961" cy="923330"/>
           </a:xfrm>
           <a:prstGeom prst="rect">
             <a:avLst/>
@@ -12891,68 +15795,53 @@
           </a:bodyPr>
           <a:lstStyle/>
           <a:p>
-            <a:r>
-              <a:rPr lang="en-IT" sz="1800" b="0" i="0" dirty="0">
-                <a:effectLst/>
-                <a:latin typeface="+mn-lt"/>
-              </a:rPr>
-              <a:t>Strong Signal: predominant peak at the true peak shift.</a:t>
-            </a:r>
-            <a:endParaRPr lang="en-GB" dirty="0"/>
-          </a:p>
-        </p:txBody>
-      </p:sp>
-      <p:pic>
-        <p:nvPicPr>
-          <p:cNvPr id="17" name="Picture 16">
-            <a:extLst>
-              <a:ext uri="{FF2B5EF4-FFF2-40B4-BE49-F238E27FC236}">
-                <a16:creationId xmlns:a16="http://schemas.microsoft.com/office/drawing/2014/main" id="{ED8779D1-C0EF-2DA0-32CD-7CFD594B3F14}"/>
-              </a:ext>
-            </a:extLst>
-          </p:cNvPr>
-          <p:cNvPicPr>
-            <a:picLocks noChangeAspect="1"/>
-          </p:cNvPicPr>
+            <a:pPr algn="ctr"/>
+            <a:r>
+              <a:rPr lang="en-IT" b="1" dirty="0">
+                <a:solidFill>
+                  <a:schemeClr val="accent2">
+                    <a:lumMod val="75000"/>
+                  </a:schemeClr>
+                </a:solidFill>
+              </a:rPr>
+              <a:t>Local accumulation of aligned fragments is the signal used to identify binding sites.</a:t>
+            </a:r>
+            <a:endParaRPr lang="en-GB" b="1" dirty="0">
+              <a:solidFill>
+                <a:schemeClr val="accent2">
+                  <a:lumMod val="75000"/>
+                </a:schemeClr>
+              </a:solidFill>
+            </a:endParaRPr>
+          </a:p>
+        </p:txBody>
+      </p:sp>
+      <p:sp>
+        <p:nvSpPr>
+          <p:cNvPr id="21" name="TextBox 20">
+            <a:extLst>
+              <a:ext uri="{FF2B5EF4-FFF2-40B4-BE49-F238E27FC236}">
+                <a16:creationId xmlns:a16="http://schemas.microsoft.com/office/drawing/2014/main" id="{D08E15E4-0653-BA39-91BD-8EF7ABE05929}"/>
+              </a:ext>
+            </a:extLst>
+          </p:cNvPr>
+          <p:cNvSpPr txBox="1"/>
           <p:nvPr/>
-        </p:nvPicPr>
-        <p:blipFill>
-          <a:blip r:embed="rId4"/>
-          <a:stretch>
-            <a:fillRect/>
-          </a:stretch>
-        </p:blipFill>
+        </p:nvSpPr>
         <p:spPr>
           <a:xfrm>
-            <a:off x="6521375" y="1390337"/>
-            <a:ext cx="4832425" cy="4642918"/>
-          </a:xfrm>
-          <a:prstGeom prst="rect">
-            <a:avLst/>
-          </a:prstGeom>
-        </p:spPr>
-      </p:pic>
-      <p:sp>
-        <p:nvSpPr>
-          <p:cNvPr id="19" name="TextBox 18">
-            <a:extLst>
-              <a:ext uri="{FF2B5EF4-FFF2-40B4-BE49-F238E27FC236}">
-                <a16:creationId xmlns:a16="http://schemas.microsoft.com/office/drawing/2014/main" id="{3ECAAB32-7FEF-BAF7-995C-461153E74033}"/>
-              </a:ext>
-            </a:extLst>
-          </p:cNvPr>
-          <p:cNvSpPr txBox="1"/>
-          <p:nvPr/>
-        </p:nvSpPr>
-        <p:spPr>
-          <a:xfrm>
-            <a:off x="6187736" y="694403"/>
-            <a:ext cx="6094206" cy="295466"/>
+            <a:off x="186689" y="4694355"/>
+            <a:ext cx="7966711" cy="1477328"/>
           </a:xfrm>
           <a:prstGeom prst="rect">
             <a:avLst/>
           </a:prstGeom>
           <a:noFill/>
+          <a:ln>
+            <a:solidFill>
+              <a:schemeClr val="tx1"/>
+            </a:solidFill>
+          </a:ln>
         </p:spPr>
         <p:txBody>
           <a:bodyPr wrap="square">
@@ -12960,117 +15849,53 @@
           </a:bodyPr>
           <a:lstStyle/>
           <a:p>
-            <a:r>
-              <a:rPr lang="en-IT" sz="1800" b="0" i="0" dirty="0">
-                <a:effectLst/>
-                <a:latin typeface="+mn-lt"/>
-              </a:rPr>
-              <a:t>Weak Signal: Strongest peak is the blue line (read length) </a:t>
-            </a:r>
-            <a:endParaRPr lang="en-GB" dirty="0"/>
-          </a:p>
-        </p:txBody>
-      </p:sp>
-      <p:pic>
-        <p:nvPicPr>
-          <p:cNvPr id="20" name="Picture 19">
-            <a:extLst>
-              <a:ext uri="{FF2B5EF4-FFF2-40B4-BE49-F238E27FC236}">
-                <a16:creationId xmlns:a16="http://schemas.microsoft.com/office/drawing/2014/main" id="{4BF4BB52-9595-712E-8D95-CDD9654C439F}"/>
-              </a:ext>
-            </a:extLst>
-          </p:cNvPr>
-          <p:cNvPicPr>
-            <a:picLocks noChangeAspect="1"/>
-          </p:cNvPicPr>
-          <p:nvPr/>
-        </p:nvPicPr>
-        <p:blipFill>
-          <a:blip r:embed="rId5"/>
-          <a:stretch>
-            <a:fillRect/>
-          </a:stretch>
-        </p:blipFill>
-        <p:spPr>
-          <a:xfrm>
-            <a:off x="6629419" y="1388161"/>
-            <a:ext cx="4724381" cy="4350617"/>
-          </a:xfrm>
-          <a:prstGeom prst="rect">
-            <a:avLst/>
-          </a:prstGeom>
-        </p:spPr>
-      </p:pic>
-      <p:sp>
-        <p:nvSpPr>
-          <p:cNvPr id="22" name="TextBox 21">
-            <a:extLst>
-              <a:ext uri="{FF2B5EF4-FFF2-40B4-BE49-F238E27FC236}">
-                <a16:creationId xmlns:a16="http://schemas.microsoft.com/office/drawing/2014/main" id="{385FEFF4-2EEA-3B24-60A2-F42E8EF969A4}"/>
-              </a:ext>
-            </a:extLst>
-          </p:cNvPr>
-          <p:cNvSpPr txBox="1"/>
-          <p:nvPr/>
-        </p:nvSpPr>
-        <p:spPr>
-          <a:xfrm>
-            <a:off x="6187736" y="723372"/>
-            <a:ext cx="6096000" cy="295466"/>
-          </a:xfrm>
-          <a:prstGeom prst="rect">
-            <a:avLst/>
-          </a:prstGeom>
-          <a:noFill/>
-        </p:spPr>
-        <p:txBody>
-          <a:bodyPr wrap="square">
-            <a:spAutoFit/>
-          </a:bodyPr>
-          <a:lstStyle/>
-          <a:p>
-            <a:r>
-              <a:rPr lang="en-IT" sz="1800" b="0" i="0" dirty="0">
-                <a:effectLst/>
-                <a:latin typeface="+mn-lt"/>
-              </a:rPr>
-              <a:t>No signal: Predominant peak is the blue line (read length) </a:t>
-            </a:r>
-            <a:endParaRPr lang="en-GB" dirty="0"/>
-          </a:p>
-        </p:txBody>
-      </p:sp>
-      <p:sp>
-        <p:nvSpPr>
-          <p:cNvPr id="23" name="TextBox 22">
-            <a:extLst>
-              <a:ext uri="{FF2B5EF4-FFF2-40B4-BE49-F238E27FC236}">
-                <a16:creationId xmlns:a16="http://schemas.microsoft.com/office/drawing/2014/main" id="{18170771-5CF8-7671-F1B6-924D61316832}"/>
-              </a:ext>
-            </a:extLst>
-          </p:cNvPr>
-          <p:cNvSpPr txBox="1"/>
-          <p:nvPr/>
-        </p:nvSpPr>
-        <p:spPr>
-          <a:xfrm>
-            <a:off x="5771141" y="5871637"/>
-            <a:ext cx="6235103" cy="646331"/>
-          </a:xfrm>
-          <a:prstGeom prst="rect">
-            <a:avLst/>
-          </a:prstGeom>
-          <a:noFill/>
-        </p:spPr>
-        <p:txBody>
-          <a:bodyPr wrap="square" rtlCol="0">
-            <a:spAutoFit/>
-          </a:bodyPr>
-          <a:lstStyle/>
-          <a:p>
-            <a:r>
-              <a:rPr lang="en-GB" dirty="0"/>
-              <a:t>In PE mode we can directly extrapolate this from the BAMPE insert size: so the span between read mates</a:t>
+            <a:pPr>
+              <a:buNone/>
+            </a:pPr>
+            <a:r>
+              <a:rPr lang="en-IT" b="1" dirty="0"/>
+              <a:t>Before peak calling we ask:</a:t>
+            </a:r>
+            <a:endParaRPr lang="en-IT" dirty="0"/>
+          </a:p>
+          <a:p>
+            <a:pPr marL="342900" lvl="0" indent="-342900">
+              <a:buFont typeface="Arial" panose="020B0604020202020204" pitchFamily="34" charset="0"/>
+              <a:buChar char="•"/>
+            </a:pPr>
+            <a:r>
+              <a:rPr lang="en-IT" dirty="0"/>
+              <a:t>How much alignment ambiguity remains?</a:t>
+            </a:r>
+          </a:p>
+          <a:p>
+            <a:pPr marL="342900" lvl="0" indent="-342900">
+              <a:buFont typeface="Arial" panose="020B0604020202020204" pitchFamily="34" charset="0"/>
+              <a:buChar char="•"/>
+            </a:pPr>
+            <a:r>
+              <a:rPr lang="en-IT" dirty="0"/>
+              <a:t>Is coordinate duplication unusually high?</a:t>
+            </a:r>
+          </a:p>
+          <a:p>
+            <a:pPr marL="342900" lvl="0" indent="-342900">
+              <a:buFont typeface="Arial" panose="020B0604020202020204" pitchFamily="34" charset="0"/>
+              <a:buChar char="•"/>
+            </a:pPr>
+            <a:r>
+              <a:rPr lang="en-IT" dirty="0"/>
+              <a:t>Are paired fragments plausible?</a:t>
+            </a:r>
+          </a:p>
+          <a:p>
+            <a:pPr marL="342900" lvl="0" indent="-342900">
+              <a:buFont typeface="Arial" panose="020B0604020202020204" pitchFamily="34" charset="0"/>
+              <a:buChar char="•"/>
+            </a:pPr>
+            <a:r>
+              <a:rPr lang="en-IT" dirty="0"/>
+              <a:t>Do the libraries show the expected ChIP enrichment structure?</a:t>
             </a:r>
           </a:p>
         </p:txBody>
@@ -13078,7 +15903,7 @@
     </p:spTree>
     <p:extLst>
       <p:ext uri="{BB962C8B-B14F-4D97-AF65-F5344CB8AC3E}">
-        <p14:creationId xmlns:p14="http://schemas.microsoft.com/office/powerpoint/2010/main" val="2423424265"/>
+        <p14:creationId xmlns:p14="http://schemas.microsoft.com/office/powerpoint/2010/main" val="1435986959"/>
       </p:ext>
     </p:extLst>
   </p:cSld>
@@ -13106,7 +15931,7 @@
                             </p:stCondLst>
                             <p:childTnLst>
                               <p:par>
-                                <p:cTn id="5" presetID="1" presetClass="entr" presetSubtype="0" fill="hold" nodeType="clickEffect">
+                                <p:cTn id="5" presetID="1" presetClass="entr" presetSubtype="0" fill="hold" grpId="0" nodeType="clickEffect">
                                   <p:stCondLst>
                                     <p:cond delay="0"/>
                                   </p:stCondLst>
@@ -13119,7 +15944,7 @@
                                           </p:stCondLst>
                                         </p:cTn>
                                         <p:tgtEl>
-                                          <p:spTgt spid="13"/>
+                                          <p:spTgt spid="19"/>
                                         </p:tgtEl>
                                         <p:attrNameLst>
                                           <p:attrName>style.visibility</p:attrName>
@@ -13164,331 +15989,7 @@
                                           </p:stCondLst>
                                         </p:cTn>
                                         <p:tgtEl>
-                                          <p:spTgt spid="16"/>
-                                        </p:tgtEl>
-                                        <p:attrNameLst>
-                                          <p:attrName>style.visibility</p:attrName>
-                                        </p:attrNameLst>
-                                      </p:cBhvr>
-                                      <p:to>
-                                        <p:strVal val="visible"/>
-                                      </p:to>
-                                    </p:set>
-                                  </p:childTnLst>
-                                </p:cTn>
-                              </p:par>
-                              <p:par>
-                                <p:cTn id="11" presetID="1" presetClass="entr" presetSubtype="0" fill="hold" nodeType="withEffect">
-                                  <p:stCondLst>
-                                    <p:cond delay="0"/>
-                                  </p:stCondLst>
-                                  <p:childTnLst>
-                                    <p:set>
-                                      <p:cBhvr>
-                                        <p:cTn id="12" dur="1" fill="hold">
-                                          <p:stCondLst>
-                                            <p:cond delay="0"/>
-                                          </p:stCondLst>
-                                        </p:cTn>
-                                        <p:tgtEl>
-                                          <p:spTgt spid="14"/>
-                                        </p:tgtEl>
-                                        <p:attrNameLst>
-                                          <p:attrName>style.visibility</p:attrName>
-                                        </p:attrNameLst>
-                                      </p:cBhvr>
-                                      <p:to>
-                                        <p:strVal val="visible"/>
-                                      </p:to>
-                                    </p:set>
-                                  </p:childTnLst>
-                                </p:cTn>
-                              </p:par>
-                            </p:childTnLst>
-                          </p:cTn>
-                        </p:par>
-                      </p:childTnLst>
-                    </p:cTn>
-                  </p:par>
-                  <p:par>
-                    <p:cTn id="13" fill="hold">
-                      <p:stCondLst>
-                        <p:cond delay="indefinite"/>
-                      </p:stCondLst>
-                      <p:childTnLst>
-                        <p:par>
-                          <p:cTn id="14" fill="hold">
-                            <p:stCondLst>
-                              <p:cond delay="0"/>
-                            </p:stCondLst>
-                            <p:childTnLst>
-                              <p:par>
-                                <p:cTn id="15" presetID="1" presetClass="entr" presetSubtype="0" fill="hold" grpId="0" nodeType="clickEffect">
-                                  <p:stCondLst>
-                                    <p:cond delay="0"/>
-                                  </p:stCondLst>
-                                  <p:childTnLst>
-                                    <p:set>
-                                      <p:cBhvr>
-                                        <p:cTn id="16" dur="1" fill="hold">
-                                          <p:stCondLst>
-                                            <p:cond delay="0"/>
-                                          </p:stCondLst>
-                                        </p:cTn>
-                                        <p:tgtEl>
-                                          <p:spTgt spid="19"/>
-                                        </p:tgtEl>
-                                        <p:attrNameLst>
-                                          <p:attrName>style.visibility</p:attrName>
-                                        </p:attrNameLst>
-                                      </p:cBhvr>
-                                      <p:to>
-                                        <p:strVal val="visible"/>
-                                      </p:to>
-                                    </p:set>
-                                  </p:childTnLst>
-                                </p:cTn>
-                              </p:par>
-                              <p:par>
-                                <p:cTn id="17" presetID="1" presetClass="entr" presetSubtype="0" fill="hold" nodeType="withEffect">
-                                  <p:stCondLst>
-                                    <p:cond delay="0"/>
-                                  </p:stCondLst>
-                                  <p:childTnLst>
-                                    <p:set>
-                                      <p:cBhvr>
-                                        <p:cTn id="18" dur="1" fill="hold">
-                                          <p:stCondLst>
-                                            <p:cond delay="0"/>
-                                          </p:stCondLst>
-                                        </p:cTn>
-                                        <p:tgtEl>
-                                          <p:spTgt spid="17"/>
-                                        </p:tgtEl>
-                                        <p:attrNameLst>
-                                          <p:attrName>style.visibility</p:attrName>
-                                        </p:attrNameLst>
-                                      </p:cBhvr>
-                                      <p:to>
-                                        <p:strVal val="visible"/>
-                                      </p:to>
-                                    </p:set>
-                                  </p:childTnLst>
-                                </p:cTn>
-                              </p:par>
-                              <p:par>
-                                <p:cTn id="19" presetID="1" presetClass="exit" presetSubtype="0" fill="hold" nodeType="withEffect">
-                                  <p:stCondLst>
-                                    <p:cond delay="0"/>
-                                  </p:stCondLst>
-                                  <p:childTnLst>
-                                    <p:set>
-                                      <p:cBhvr>
-                                        <p:cTn id="20" dur="1" fill="hold">
-                                          <p:stCondLst>
-                                            <p:cond delay="0"/>
-                                          </p:stCondLst>
-                                        </p:cTn>
-                                        <p:tgtEl>
-                                          <p:spTgt spid="14"/>
-                                        </p:tgtEl>
-                                        <p:attrNameLst>
-                                          <p:attrName>style.visibility</p:attrName>
-                                        </p:attrNameLst>
-                                      </p:cBhvr>
-                                      <p:to>
-                                        <p:strVal val="hidden"/>
-                                      </p:to>
-                                    </p:set>
-                                  </p:childTnLst>
-                                </p:cTn>
-                              </p:par>
-                              <p:par>
-                                <p:cTn id="21" presetID="1" presetClass="exit" presetSubtype="0" fill="hold" grpId="1" nodeType="withEffect">
-                                  <p:stCondLst>
-                                    <p:cond delay="0"/>
-                                  </p:stCondLst>
-                                  <p:childTnLst>
-                                    <p:set>
-                                      <p:cBhvr>
-                                        <p:cTn id="22" dur="1" fill="hold">
-                                          <p:stCondLst>
-                                            <p:cond delay="0"/>
-                                          </p:stCondLst>
-                                        </p:cTn>
-                                        <p:tgtEl>
-                                          <p:spTgt spid="16"/>
-                                        </p:tgtEl>
-                                        <p:attrNameLst>
-                                          <p:attrName>style.visibility</p:attrName>
-                                        </p:attrNameLst>
-                                      </p:cBhvr>
-                                      <p:to>
-                                        <p:strVal val="hidden"/>
-                                      </p:to>
-                                    </p:set>
-                                  </p:childTnLst>
-                                </p:cTn>
-                              </p:par>
-                            </p:childTnLst>
-                          </p:cTn>
-                        </p:par>
-                      </p:childTnLst>
-                    </p:cTn>
-                  </p:par>
-                  <p:par>
-                    <p:cTn id="23" fill="hold">
-                      <p:stCondLst>
-                        <p:cond delay="indefinite"/>
-                      </p:stCondLst>
-                      <p:childTnLst>
-                        <p:par>
-                          <p:cTn id="24" fill="hold">
-                            <p:stCondLst>
-                              <p:cond delay="0"/>
-                            </p:stCondLst>
-                            <p:childTnLst>
-                              <p:par>
-                                <p:cTn id="25" presetID="1" presetClass="exit" presetSubtype="0" fill="hold" nodeType="clickEffect">
-                                  <p:stCondLst>
-                                    <p:cond delay="0"/>
-                                  </p:stCondLst>
-                                  <p:childTnLst>
-                                    <p:set>
-                                      <p:cBhvr>
-                                        <p:cTn id="26" dur="1" fill="hold">
-                                          <p:stCondLst>
-                                            <p:cond delay="0"/>
-                                          </p:stCondLst>
-                                        </p:cTn>
-                                        <p:tgtEl>
-                                          <p:spTgt spid="17"/>
-                                        </p:tgtEl>
-                                        <p:attrNameLst>
-                                          <p:attrName>style.visibility</p:attrName>
-                                        </p:attrNameLst>
-                                      </p:cBhvr>
-                                      <p:to>
-                                        <p:strVal val="hidden"/>
-                                      </p:to>
-                                    </p:set>
-                                  </p:childTnLst>
-                                </p:cTn>
-                              </p:par>
-                              <p:par>
-                                <p:cTn id="27" presetID="1" presetClass="exit" presetSubtype="0" fill="hold" grpId="1" nodeType="withEffect">
-                                  <p:stCondLst>
-                                    <p:cond delay="0"/>
-                                  </p:stCondLst>
-                                  <p:childTnLst>
-                                    <p:set>
-                                      <p:cBhvr>
-                                        <p:cTn id="28" dur="1" fill="hold">
-                                          <p:stCondLst>
-                                            <p:cond delay="0"/>
-                                          </p:stCondLst>
-                                        </p:cTn>
-                                        <p:tgtEl>
-                                          <p:spTgt spid="19"/>
-                                        </p:tgtEl>
-                                        <p:attrNameLst>
-                                          <p:attrName>style.visibility</p:attrName>
-                                        </p:attrNameLst>
-                                      </p:cBhvr>
-                                      <p:to>
-                                        <p:strVal val="hidden"/>
-                                      </p:to>
-                                    </p:set>
-                                  </p:childTnLst>
-                                </p:cTn>
-                              </p:par>
-                              <p:par>
-                                <p:cTn id="29" presetID="1" presetClass="entr" presetSubtype="0" fill="hold" grpId="0" nodeType="withEffect">
-                                  <p:stCondLst>
-                                    <p:cond delay="0"/>
-                                  </p:stCondLst>
-                                  <p:childTnLst>
-                                    <p:set>
-                                      <p:cBhvr>
-                                        <p:cTn id="30" dur="1" fill="hold">
-                                          <p:stCondLst>
-                                            <p:cond delay="0"/>
-                                          </p:stCondLst>
-                                        </p:cTn>
-                                        <p:tgtEl>
-                                          <p:spTgt spid="22"/>
-                                        </p:tgtEl>
-                                        <p:attrNameLst>
-                                          <p:attrName>style.visibility</p:attrName>
-                                        </p:attrNameLst>
-                                      </p:cBhvr>
-                                      <p:to>
-                                        <p:strVal val="visible"/>
-                                      </p:to>
-                                    </p:set>
-                                  </p:childTnLst>
-                                </p:cTn>
-                              </p:par>
-                              <p:par>
-                                <p:cTn id="31" presetID="1" presetClass="entr" presetSubtype="0" fill="hold" nodeType="withEffect">
-                                  <p:stCondLst>
-                                    <p:cond delay="0"/>
-                                  </p:stCondLst>
-                                  <p:childTnLst>
-                                    <p:set>
-                                      <p:cBhvr>
-                                        <p:cTn id="32" dur="1" fill="hold">
-                                          <p:stCondLst>
-                                            <p:cond delay="0"/>
-                                          </p:stCondLst>
-                                        </p:cTn>
-                                        <p:tgtEl>
-                                          <p:spTgt spid="20"/>
-                                        </p:tgtEl>
-                                        <p:attrNameLst>
-                                          <p:attrName>style.visibility</p:attrName>
-                                        </p:attrNameLst>
-                                      </p:cBhvr>
-                                      <p:to>
-                                        <p:strVal val="visible"/>
-                                      </p:to>
-                                    </p:set>
-                                  </p:childTnLst>
-                                </p:cTn>
-                              </p:par>
-                            </p:childTnLst>
-                          </p:cTn>
-                        </p:par>
-                      </p:childTnLst>
-                    </p:cTn>
-                  </p:par>
-                  <p:par>
-                    <p:cTn id="33" fill="hold">
-                      <p:stCondLst>
-                        <p:cond delay="indefinite"/>
-                      </p:stCondLst>
-                      <p:childTnLst>
-                        <p:par>
-                          <p:cTn id="34" fill="hold">
-                            <p:stCondLst>
-                              <p:cond delay="0"/>
-                            </p:stCondLst>
-                            <p:childTnLst>
-                              <p:par>
-                                <p:cTn id="35" presetID="1" presetClass="entr" presetSubtype="0" fill="hold" grpId="0" nodeType="clickEffect">
-                                  <p:stCondLst>
-                                    <p:cond delay="0"/>
-                                  </p:stCondLst>
-                                  <p:childTnLst>
-                                    <p:set>
-                                      <p:cBhvr>
-                                        <p:cTn id="36" dur="1" fill="hold">
-                                          <p:stCondLst>
-                                            <p:cond delay="0"/>
-                                          </p:stCondLst>
-                                        </p:cTn>
-                                        <p:tgtEl>
-                                          <p:spTgt spid="23"/>
+                                          <p:spTgt spid="21"/>
                                         </p:tgtEl>
                                         <p:attrNameLst>
                                           <p:attrName>style.visibility</p:attrName>
@@ -13529,12 +16030,8 @@
       </p:par>
     </p:tnLst>
     <p:bldLst>
-      <p:bldP spid="16" grpId="0"/>
-      <p:bldP spid="16" grpId="1"/>
       <p:bldP spid="19" grpId="0"/>
-      <p:bldP spid="19" grpId="1"/>
-      <p:bldP spid="22" grpId="0"/>
-      <p:bldP spid="23" grpId="0"/>
+      <p:bldP spid="21" grpId="0" animBg="1"/>
     </p:bldLst>
   </p:timing>
 </p:sld>
@@ -13559,10 +16056,41 @@
       </p:grpSpPr>
       <p:sp>
         <p:nvSpPr>
+          <p:cNvPr id="2" name="Title 1">
+            <a:extLst>
+              <a:ext uri="{FF2B5EF4-FFF2-40B4-BE49-F238E27FC236}">
+                <a16:creationId xmlns:a16="http://schemas.microsoft.com/office/drawing/2014/main" id="{78AD14FE-E0A1-7DB3-05BA-2095ADB4CDF4}"/>
+              </a:ext>
+            </a:extLst>
+          </p:cNvPr>
+          <p:cNvSpPr>
+            <a:spLocks noGrp="1"/>
+          </p:cNvSpPr>
+          <p:nvPr>
+            <p:ph type="title"/>
+          </p:nvPr>
+        </p:nvSpPr>
+        <p:spPr/>
+        <p:txBody>
+          <a:bodyPr>
+            <a:noAutofit/>
+          </a:bodyPr>
+          <a:lstStyle/>
+          <a:p>
+            <a:r>
+              <a:rPr lang="en-IT" sz="2800" dirty="0"/>
+              <a:t>1) Multi-mapping: ambiguous placement can become apparent enrichment</a:t>
+            </a:r>
+            <a:endParaRPr lang="en-GB" sz="2800" dirty="0"/>
+          </a:p>
+        </p:txBody>
+      </p:sp>
+      <p:sp>
+        <p:nvSpPr>
           <p:cNvPr id="4" name="Date Placeholder 3">
             <a:extLst>
               <a:ext uri="{FF2B5EF4-FFF2-40B4-BE49-F238E27FC236}">
-                <a16:creationId xmlns:a16="http://schemas.microsoft.com/office/drawing/2014/main" id="{C11FEEE6-EE9E-CE3E-57FC-1A66932CC1D8}"/>
+                <a16:creationId xmlns:a16="http://schemas.microsoft.com/office/drawing/2014/main" id="{CC8D23E9-3819-FD74-596C-95555DD9E902}"/>
               </a:ext>
             </a:extLst>
           </p:cNvPr>
@@ -13580,7 +16108,7 @@
           <a:p>
             <a:fld id="{761DFEEA-1162-B343-ACBF-B3E92F6AC390}" type="datetime1">
               <a:rPr lang="it-IT" smtClean="0"/>
-              <a:t>08/10/26</a:t>
+              <a:t>15/10/26</a:t>
             </a:fld>
             <a:endParaRPr lang="en-GB"/>
           </a:p>
@@ -13591,7 +16119,7 @@
           <p:cNvPr id="5" name="Footer Placeholder 4">
             <a:extLst>
               <a:ext uri="{FF2B5EF4-FFF2-40B4-BE49-F238E27FC236}">
-                <a16:creationId xmlns:a16="http://schemas.microsoft.com/office/drawing/2014/main" id="{81AED09B-76D3-24F7-8966-F5263527EFA2}"/>
+                <a16:creationId xmlns:a16="http://schemas.microsoft.com/office/drawing/2014/main" id="{F413E902-CAFB-CC5B-15FA-1A8D711023F4}"/>
               </a:ext>
             </a:extLst>
           </p:cNvPr>
@@ -13619,7 +16147,7 @@
           <p:cNvPr id="6" name="Slide Number Placeholder 5">
             <a:extLst>
               <a:ext uri="{FF2B5EF4-FFF2-40B4-BE49-F238E27FC236}">
-                <a16:creationId xmlns:a16="http://schemas.microsoft.com/office/drawing/2014/main" id="{A64D4AB0-09D7-040B-2AEF-A817C8BC7441}"/>
+                <a16:creationId xmlns:a16="http://schemas.microsoft.com/office/drawing/2014/main" id="{47774152-8122-6BC8-FA83-F66BC7297418}"/>
               </a:ext>
             </a:extLst>
           </p:cNvPr>
@@ -13645,545 +16173,20 @@
       </p:sp>
       <p:sp>
         <p:nvSpPr>
-          <p:cNvPr id="7" name="Text 2">
-            <a:extLst>
-              <a:ext uri="{FF2B5EF4-FFF2-40B4-BE49-F238E27FC236}">
-                <a16:creationId xmlns:a16="http://schemas.microsoft.com/office/drawing/2014/main" id="{CED132D3-BF24-D51D-CA52-48D271AC55B4}"/>
-              </a:ext>
-            </a:extLst>
-          </p:cNvPr>
-          <p:cNvSpPr/>
+          <p:cNvPr id="8" name="TextBox 7">
+            <a:extLst>
+              <a:ext uri="{FF2B5EF4-FFF2-40B4-BE49-F238E27FC236}">
+                <a16:creationId xmlns:a16="http://schemas.microsoft.com/office/drawing/2014/main" id="{1B44F3C5-551D-4719-10F3-6AB47D519FD0}"/>
+              </a:ext>
+            </a:extLst>
+          </p:cNvPr>
+          <p:cNvSpPr txBox="1"/>
           <p:nvPr/>
         </p:nvSpPr>
         <p:spPr>
           <a:xfrm>
-            <a:off x="243840" y="823059"/>
-            <a:ext cx="1325880" cy="640080"/>
-          </a:xfrm>
-          <a:prstGeom prst="rect">
-            <a:avLst/>
-          </a:prstGeom>
-          <a:solidFill>
-            <a:srgbClr val="F6F6F6"/>
-          </a:solidFill>
-          <a:ln w="12700">
-            <a:solidFill>
-              <a:srgbClr val="2F704F"/>
-            </a:solidFill>
-          </a:ln>
-        </p:spPr>
-        <p:txBody>
-          <a:bodyPr wrap="square" lIns="762" tIns="762" rIns="762" bIns="762" rtlCol="0" anchor="ctr">
-            <a:normAutofit/>
-          </a:bodyPr>
-          <a:lstStyle/>
-          <a:p>
-            <a:pPr marL="0" indent="0" algn="ctr">
-              <a:buNone/>
-            </a:pPr>
-            <a:r>
-              <a:rPr lang="en-US" sz="1200" dirty="0">
-                <a:solidFill>
-                  <a:srgbClr val="111111"/>
-                </a:solidFill>
-                <a:latin typeface="Gill Sans" pitchFamily="34" charset="0"/>
-                <a:ea typeface="Gill Sans" pitchFamily="34" charset="-122"/>
-                <a:cs typeface="Gill Sans" pitchFamily="34" charset="-120"/>
-              </a:rPr>
-              <a:t>FASTQ</a:t>
-            </a:r>
-            <a:endParaRPr lang="en-US" sz="1200" dirty="0"/>
-          </a:p>
-        </p:txBody>
-      </p:sp>
-      <p:sp>
-        <p:nvSpPr>
-          <p:cNvPr id="8" name="Shape 3">
-            <a:extLst>
-              <a:ext uri="{FF2B5EF4-FFF2-40B4-BE49-F238E27FC236}">
-                <a16:creationId xmlns:a16="http://schemas.microsoft.com/office/drawing/2014/main" id="{5691EC75-7CC6-4A0D-C3AE-9FBDB956F34B}"/>
-              </a:ext>
-            </a:extLst>
-          </p:cNvPr>
-          <p:cNvSpPr/>
-          <p:nvPr/>
-        </p:nvSpPr>
-        <p:spPr>
-          <a:xfrm>
-            <a:off x="1597152" y="1143099"/>
-            <a:ext cx="219456" cy="0"/>
-          </a:xfrm>
-          <a:prstGeom prst="line">
-            <a:avLst/>
-          </a:prstGeom>
-          <a:noFill/>
-          <a:ln w="15240">
-            <a:solidFill>
-              <a:srgbClr val="2F704F"/>
-            </a:solidFill>
-            <a:prstDash val="solid"/>
-            <a:tailEnd type="triangle"/>
-          </a:ln>
-        </p:spPr>
-        <p:txBody>
-          <a:bodyPr/>
-          <a:lstStyle/>
-          <a:p>
-            <a:endParaRPr lang="en-GB"/>
-          </a:p>
-        </p:txBody>
-      </p:sp>
-      <p:sp>
-        <p:nvSpPr>
-          <p:cNvPr id="9" name="Text 4">
-            <a:extLst>
-              <a:ext uri="{FF2B5EF4-FFF2-40B4-BE49-F238E27FC236}">
-                <a16:creationId xmlns:a16="http://schemas.microsoft.com/office/drawing/2014/main" id="{498EA64D-A18D-C04D-9C9E-CCF8EAB75673}"/>
-              </a:ext>
-            </a:extLst>
-          </p:cNvPr>
-          <p:cNvSpPr/>
-          <p:nvPr/>
-        </p:nvSpPr>
-        <p:spPr>
-          <a:xfrm>
-            <a:off x="1889760" y="823059"/>
-            <a:ext cx="1325880" cy="640080"/>
-          </a:xfrm>
-          <a:prstGeom prst="rect">
-            <a:avLst/>
-          </a:prstGeom>
-          <a:solidFill>
-            <a:srgbClr val="FFFFFF"/>
-          </a:solidFill>
-          <a:ln w="12700">
-            <a:solidFill>
-              <a:srgbClr val="2F704F"/>
-            </a:solidFill>
-          </a:ln>
-        </p:spPr>
-        <p:txBody>
-          <a:bodyPr wrap="square" lIns="762" tIns="762" rIns="762" bIns="762" rtlCol="0" anchor="ctr">
-            <a:normAutofit/>
-          </a:bodyPr>
-          <a:lstStyle/>
-          <a:p>
-            <a:pPr marL="0" indent="0" algn="ctr">
-              <a:buNone/>
-            </a:pPr>
-            <a:r>
-              <a:rPr lang="en-US" sz="1200" dirty="0">
-                <a:solidFill>
-                  <a:srgbClr val="111111"/>
-                </a:solidFill>
-                <a:latin typeface="Gill Sans" pitchFamily="34" charset="0"/>
-                <a:ea typeface="Gill Sans" pitchFamily="34" charset="-122"/>
-                <a:cs typeface="Gill Sans" pitchFamily="34" charset="-120"/>
-              </a:rPr>
-              <a:t>Bowtie2</a:t>
-            </a:r>
-            <a:endParaRPr lang="en-US" sz="1200" dirty="0"/>
-          </a:p>
-          <a:p>
-            <a:pPr marL="0" indent="0" algn="ctr">
-              <a:buNone/>
-            </a:pPr>
-            <a:r>
-              <a:rPr lang="en-US" sz="1200" dirty="0">
-                <a:solidFill>
-                  <a:srgbClr val="111111"/>
-                </a:solidFill>
-                <a:latin typeface="Gill Sans" pitchFamily="34" charset="0"/>
-                <a:ea typeface="Gill Sans" pitchFamily="34" charset="-122"/>
-                <a:cs typeface="Gill Sans" pitchFamily="34" charset="-120"/>
-              </a:rPr>
-              <a:t>BAM</a:t>
-            </a:r>
-            <a:endParaRPr lang="en-US" sz="1200" dirty="0"/>
-          </a:p>
-        </p:txBody>
-      </p:sp>
-      <p:sp>
-        <p:nvSpPr>
-          <p:cNvPr id="10" name="Shape 5">
-            <a:extLst>
-              <a:ext uri="{FF2B5EF4-FFF2-40B4-BE49-F238E27FC236}">
-                <a16:creationId xmlns:a16="http://schemas.microsoft.com/office/drawing/2014/main" id="{0FC3CE6E-FAC6-D5A2-FA10-95AE6B33FCFE}"/>
-              </a:ext>
-            </a:extLst>
-          </p:cNvPr>
-          <p:cNvSpPr/>
-          <p:nvPr/>
-        </p:nvSpPr>
-        <p:spPr>
-          <a:xfrm>
-            <a:off x="3243072" y="1143099"/>
-            <a:ext cx="219456" cy="0"/>
-          </a:xfrm>
-          <a:prstGeom prst="line">
-            <a:avLst/>
-          </a:prstGeom>
-          <a:noFill/>
-          <a:ln w="15240">
-            <a:solidFill>
-              <a:srgbClr val="2F704F"/>
-            </a:solidFill>
-            <a:prstDash val="solid"/>
-            <a:tailEnd type="triangle"/>
-          </a:ln>
-        </p:spPr>
-        <p:txBody>
-          <a:bodyPr/>
-          <a:lstStyle/>
-          <a:p>
-            <a:endParaRPr lang="en-GB"/>
-          </a:p>
-        </p:txBody>
-      </p:sp>
-      <p:sp>
-        <p:nvSpPr>
-          <p:cNvPr id="11" name="Text 6">
-            <a:extLst>
-              <a:ext uri="{FF2B5EF4-FFF2-40B4-BE49-F238E27FC236}">
-                <a16:creationId xmlns:a16="http://schemas.microsoft.com/office/drawing/2014/main" id="{63806288-7E96-F634-2749-6B81A5D73DD5}"/>
-              </a:ext>
-            </a:extLst>
-          </p:cNvPr>
-          <p:cNvSpPr/>
-          <p:nvPr/>
-        </p:nvSpPr>
-        <p:spPr>
-          <a:xfrm>
-            <a:off x="3535680" y="823059"/>
-            <a:ext cx="1325880" cy="640080"/>
-          </a:xfrm>
-          <a:prstGeom prst="rect">
-            <a:avLst/>
-          </a:prstGeom>
-          <a:solidFill>
-            <a:srgbClr val="FFFFFF"/>
-          </a:solidFill>
-          <a:ln w="12700">
-            <a:solidFill>
-              <a:srgbClr val="2F704F"/>
-            </a:solidFill>
-          </a:ln>
-        </p:spPr>
-        <p:txBody>
-          <a:bodyPr wrap="square" lIns="762" tIns="762" rIns="762" bIns="762" rtlCol="0" anchor="ctr">
-            <a:normAutofit/>
-          </a:bodyPr>
-          <a:lstStyle/>
-          <a:p>
-            <a:pPr marL="0" indent="0" algn="ctr">
-              <a:buNone/>
-            </a:pPr>
-            <a:r>
-              <a:rPr lang="en-US" sz="1200" dirty="0">
-                <a:solidFill>
-                  <a:srgbClr val="111111"/>
-                </a:solidFill>
-                <a:latin typeface="Gill Sans" pitchFamily="34" charset="0"/>
-                <a:ea typeface="Gill Sans" pitchFamily="34" charset="-122"/>
-                <a:cs typeface="Gill Sans" pitchFamily="34" charset="-120"/>
-              </a:rPr>
-              <a:t>ChIP QC</a:t>
-            </a:r>
-            <a:endParaRPr lang="en-US" sz="1200" dirty="0"/>
-          </a:p>
-          <a:p>
-            <a:pPr marL="0" indent="0" algn="ctr">
-              <a:buNone/>
-            </a:pPr>
-            <a:r>
-              <a:rPr lang="en-US" sz="1200" dirty="0">
-                <a:solidFill>
-                  <a:srgbClr val="111111"/>
-                </a:solidFill>
-                <a:latin typeface="Gill Sans" pitchFamily="34" charset="0"/>
-                <a:ea typeface="Gill Sans" pitchFamily="34" charset="-122"/>
-                <a:cs typeface="Gill Sans" pitchFamily="34" charset="-120"/>
-              </a:rPr>
-              <a:t>phantom peak</a:t>
-            </a:r>
-            <a:endParaRPr lang="en-US" sz="1200" dirty="0"/>
-          </a:p>
-        </p:txBody>
-      </p:sp>
-      <p:sp>
-        <p:nvSpPr>
-          <p:cNvPr id="12" name="Shape 7">
-            <a:extLst>
-              <a:ext uri="{FF2B5EF4-FFF2-40B4-BE49-F238E27FC236}">
-                <a16:creationId xmlns:a16="http://schemas.microsoft.com/office/drawing/2014/main" id="{B610415E-A93C-745E-4856-6DF6BA2C08B2}"/>
-              </a:ext>
-            </a:extLst>
-          </p:cNvPr>
-          <p:cNvSpPr/>
-          <p:nvPr/>
-        </p:nvSpPr>
-        <p:spPr>
-          <a:xfrm>
-            <a:off x="4888992" y="1143099"/>
-            <a:ext cx="219456" cy="0"/>
-          </a:xfrm>
-          <a:prstGeom prst="line">
-            <a:avLst/>
-          </a:prstGeom>
-          <a:noFill/>
-          <a:ln w="15240">
-            <a:solidFill>
-              <a:srgbClr val="2F704F"/>
-            </a:solidFill>
-            <a:prstDash val="solid"/>
-            <a:tailEnd type="triangle"/>
-          </a:ln>
-        </p:spPr>
-        <p:txBody>
-          <a:bodyPr/>
-          <a:lstStyle/>
-          <a:p>
-            <a:endParaRPr lang="en-GB"/>
-          </a:p>
-        </p:txBody>
-      </p:sp>
-      <p:sp>
-        <p:nvSpPr>
-          <p:cNvPr id="13" name="Text 8">
-            <a:extLst>
-              <a:ext uri="{FF2B5EF4-FFF2-40B4-BE49-F238E27FC236}">
-                <a16:creationId xmlns:a16="http://schemas.microsoft.com/office/drawing/2014/main" id="{636028E9-429B-F87F-0DB2-18BE4A352F0C}"/>
-              </a:ext>
-            </a:extLst>
-          </p:cNvPr>
-          <p:cNvSpPr/>
-          <p:nvPr/>
-        </p:nvSpPr>
-        <p:spPr>
-          <a:xfrm>
-            <a:off x="5181600" y="823059"/>
-            <a:ext cx="1325880" cy="640080"/>
-          </a:xfrm>
-          <a:prstGeom prst="rect">
-            <a:avLst/>
-          </a:prstGeom>
-          <a:solidFill>
-            <a:srgbClr val="FFFFFF"/>
-          </a:solidFill>
-          <a:ln w="12700">
-            <a:solidFill>
-              <a:srgbClr val="2F704F"/>
-            </a:solidFill>
-          </a:ln>
-        </p:spPr>
-        <p:txBody>
-          <a:bodyPr wrap="square" lIns="762" tIns="762" rIns="762" bIns="762" rtlCol="0" anchor="ctr">
-            <a:normAutofit/>
-          </a:bodyPr>
-          <a:lstStyle/>
-          <a:p>
-            <a:pPr marL="0" indent="0" algn="ctr">
-              <a:buNone/>
-            </a:pPr>
-            <a:r>
-              <a:rPr lang="en-US" sz="1200" dirty="0">
-                <a:solidFill>
-                  <a:srgbClr val="111111"/>
-                </a:solidFill>
-                <a:latin typeface="Gill Sans" pitchFamily="34" charset="0"/>
-                <a:ea typeface="Gill Sans" pitchFamily="34" charset="-122"/>
-                <a:cs typeface="Gill Sans" pitchFamily="34" charset="-120"/>
-              </a:rPr>
-              <a:t>bigWig</a:t>
-            </a:r>
-            <a:endParaRPr lang="en-US" sz="1200" dirty="0"/>
-          </a:p>
-          <a:p>
-            <a:pPr marL="0" indent="0" algn="ctr">
-              <a:buNone/>
-            </a:pPr>
-            <a:r>
-              <a:rPr lang="en-US" sz="1200" dirty="0">
-                <a:solidFill>
-                  <a:srgbClr val="111111"/>
-                </a:solidFill>
-                <a:latin typeface="Gill Sans" pitchFamily="34" charset="0"/>
-                <a:ea typeface="Gill Sans" pitchFamily="34" charset="-122"/>
-                <a:cs typeface="Gill Sans" pitchFamily="34" charset="-120"/>
-              </a:rPr>
-              <a:t>tracks</a:t>
-            </a:r>
-            <a:endParaRPr lang="en-US" sz="1200" dirty="0"/>
-          </a:p>
-        </p:txBody>
-      </p:sp>
-      <p:sp>
-        <p:nvSpPr>
-          <p:cNvPr id="14" name="Shape 9">
-            <a:extLst>
-              <a:ext uri="{FF2B5EF4-FFF2-40B4-BE49-F238E27FC236}">
-                <a16:creationId xmlns:a16="http://schemas.microsoft.com/office/drawing/2014/main" id="{DC79F522-C27E-C1D7-6E51-2C80555A17E5}"/>
-              </a:ext>
-            </a:extLst>
-          </p:cNvPr>
-          <p:cNvSpPr/>
-          <p:nvPr/>
-        </p:nvSpPr>
-        <p:spPr>
-          <a:xfrm>
-            <a:off x="6534912" y="1143099"/>
-            <a:ext cx="219456" cy="0"/>
-          </a:xfrm>
-          <a:prstGeom prst="line">
-            <a:avLst/>
-          </a:prstGeom>
-          <a:noFill/>
-          <a:ln w="15240">
-            <a:solidFill>
-              <a:srgbClr val="2F704F"/>
-            </a:solidFill>
-            <a:prstDash val="solid"/>
-            <a:tailEnd type="triangle"/>
-          </a:ln>
-        </p:spPr>
-        <p:txBody>
-          <a:bodyPr/>
-          <a:lstStyle/>
-          <a:p>
-            <a:endParaRPr lang="en-GB"/>
-          </a:p>
-        </p:txBody>
-      </p:sp>
-      <p:sp>
-        <p:nvSpPr>
-          <p:cNvPr id="15" name="Text 10">
-            <a:extLst>
-              <a:ext uri="{FF2B5EF4-FFF2-40B4-BE49-F238E27FC236}">
-                <a16:creationId xmlns:a16="http://schemas.microsoft.com/office/drawing/2014/main" id="{0E6BD326-C877-753E-19CA-D24E338337C1}"/>
-              </a:ext>
-            </a:extLst>
-          </p:cNvPr>
-          <p:cNvSpPr/>
-          <p:nvPr/>
-        </p:nvSpPr>
-        <p:spPr>
-          <a:xfrm>
-            <a:off x="6827520" y="823059"/>
-            <a:ext cx="1325880" cy="640080"/>
-          </a:xfrm>
-          <a:prstGeom prst="rect">
-            <a:avLst/>
-          </a:prstGeom>
-          <a:solidFill>
-            <a:srgbClr val="FF0000"/>
-          </a:solidFill>
-          <a:ln w="12700">
-            <a:solidFill>
-              <a:srgbClr val="2F704F"/>
-            </a:solidFill>
-          </a:ln>
-        </p:spPr>
-        <p:txBody>
-          <a:bodyPr wrap="square" lIns="762" tIns="762" rIns="762" bIns="762" rtlCol="0" anchor="ctr">
-            <a:normAutofit/>
-          </a:bodyPr>
-          <a:lstStyle/>
-          <a:p>
-            <a:pPr marL="0" indent="0" algn="ctr">
-              <a:buNone/>
-            </a:pPr>
-            <a:r>
-              <a:rPr lang="en-US" sz="1200" dirty="0">
-                <a:solidFill>
-                  <a:schemeClr val="bg1"/>
-                </a:solidFill>
-                <a:latin typeface="Gill Sans" pitchFamily="34" charset="0"/>
-                <a:ea typeface="Gill Sans" pitchFamily="34" charset="-122"/>
-                <a:cs typeface="Gill Sans" pitchFamily="34" charset="-120"/>
-              </a:rPr>
-              <a:t>MACS3</a:t>
-            </a:r>
-            <a:endParaRPr lang="en-US" sz="1200" dirty="0">
-              <a:solidFill>
-                <a:schemeClr val="bg1"/>
-              </a:solidFill>
-            </a:endParaRPr>
-          </a:p>
-          <a:p>
-            <a:pPr marL="0" indent="0" algn="ctr">
-              <a:buNone/>
-            </a:pPr>
-            <a:r>
-              <a:rPr lang="en-US" sz="1200" dirty="0">
-                <a:solidFill>
-                  <a:schemeClr val="bg1"/>
-                </a:solidFill>
-                <a:latin typeface="Gill Sans" pitchFamily="34" charset="0"/>
-                <a:ea typeface="Gill Sans" pitchFamily="34" charset="-122"/>
-                <a:cs typeface="Gill Sans" pitchFamily="34" charset="-120"/>
-              </a:rPr>
-              <a:t>peaks</a:t>
-            </a:r>
-            <a:endParaRPr lang="en-US" sz="1200" dirty="0">
-              <a:solidFill>
-                <a:schemeClr val="bg1"/>
-              </a:solidFill>
-            </a:endParaRPr>
-          </a:p>
-        </p:txBody>
-      </p:sp>
-      <p:sp>
-        <p:nvSpPr>
-          <p:cNvPr id="16" name="Title 1">
-            <a:extLst>
-              <a:ext uri="{FF2B5EF4-FFF2-40B4-BE49-F238E27FC236}">
-                <a16:creationId xmlns:a16="http://schemas.microsoft.com/office/drawing/2014/main" id="{73B0B448-3769-DFFA-3B1A-47834B4848BF}"/>
-              </a:ext>
-            </a:extLst>
-          </p:cNvPr>
-          <p:cNvSpPr>
-            <a:spLocks noGrp="1"/>
-          </p:cNvSpPr>
-          <p:nvPr>
-            <p:ph type="title"/>
-          </p:nvPr>
-        </p:nvSpPr>
-        <p:spPr>
-          <a:xfrm>
-            <a:off x="155985" y="143352"/>
-            <a:ext cx="10524207" cy="551051"/>
-          </a:xfrm>
-        </p:spPr>
-        <p:txBody>
-          <a:bodyPr>
-            <a:normAutofit/>
-          </a:bodyPr>
-          <a:lstStyle/>
-          <a:p>
-            <a:r>
-              <a:rPr lang="en-IT" sz="3200" dirty="0"/>
-              <a:t>MACS3: from aligned fragments to ChIP enrichment</a:t>
-            </a:r>
-            <a:endParaRPr lang="en-GB" sz="3200" dirty="0"/>
-          </a:p>
-        </p:txBody>
-      </p:sp>
-      <p:sp>
-        <p:nvSpPr>
-          <p:cNvPr id="18" name="TextBox 17">
-            <a:extLst>
-              <a:ext uri="{FF2B5EF4-FFF2-40B4-BE49-F238E27FC236}">
-                <a16:creationId xmlns:a16="http://schemas.microsoft.com/office/drawing/2014/main" id="{7F3B26F0-AD19-D11A-171D-6D2EF6E0ABC1}"/>
-              </a:ext>
-            </a:extLst>
-          </p:cNvPr>
-          <p:cNvSpPr txBox="1"/>
-          <p:nvPr/>
-        </p:nvSpPr>
-        <p:spPr>
-          <a:xfrm>
-            <a:off x="155985" y="1911835"/>
-            <a:ext cx="11938480" cy="4524315"/>
+            <a:off x="327025" y="805934"/>
+            <a:ext cx="6165850" cy="369332"/>
           </a:xfrm>
           <a:prstGeom prst="rect">
             <a:avLst/>
@@ -14196,199 +16199,189 @@
           </a:bodyPr>
           <a:lstStyle/>
           <a:p>
-            <a:pPr marL="342900" indent="-342900">
-              <a:buAutoNum type="arabicPeriod"/>
+            <a:pPr>
+              <a:buNone/>
             </a:pPr>
             <a:r>
-              <a:rPr lang="en-IT" sz="1600" dirty="0">
-                <a:solidFill>
-                  <a:srgbClr val="00B050"/>
-                </a:solidFill>
-              </a:rPr>
-              <a:t>Build the observed ChIP signal:</a:t>
-            </a:r>
-          </a:p>
-          <a:p>
-            <a:pPr marL="857250" lvl="1" indent="-400050">
-              <a:buAutoNum type="romanLcParenR"/>
+              <a:rPr lang="en-IT" dirty="0"/>
+              <a:t>Repetitive reads may have several plausible genomic placements.</a:t>
+            </a:r>
+          </a:p>
+        </p:txBody>
+      </p:sp>
+      <p:sp>
+        <p:nvSpPr>
+          <p:cNvPr id="10" name="TextBox 9">
+            <a:extLst>
+              <a:ext uri="{FF2B5EF4-FFF2-40B4-BE49-F238E27FC236}">
+                <a16:creationId xmlns:a16="http://schemas.microsoft.com/office/drawing/2014/main" id="{C5F0C2F1-5145-F9BB-6CB3-821C16C1C5D2}"/>
+              </a:ext>
+            </a:extLst>
+          </p:cNvPr>
+          <p:cNvSpPr txBox="1"/>
+          <p:nvPr/>
+        </p:nvSpPr>
+        <p:spPr>
+          <a:xfrm>
+            <a:off x="2720246" y="1549816"/>
+            <a:ext cx="6751508" cy="1477328"/>
+          </a:xfrm>
+          <a:prstGeom prst="rect">
+            <a:avLst/>
+          </a:prstGeom>
+          <a:noFill/>
+        </p:spPr>
+        <p:txBody>
+          <a:bodyPr wrap="square">
+            <a:spAutoFit/>
+          </a:bodyPr>
+          <a:lstStyle/>
+          <a:p>
+            <a:pPr>
+              <a:buNone/>
             </a:pPr>
             <a:r>
-              <a:rPr lang="en-GB" sz="1600" dirty="0"/>
-              <a:t>Fragment are reconstructed either directly from the BAMPE or using the shift of FW and RW like the </a:t>
-            </a:r>
-            <a:r>
-              <a:rPr lang="en-GB" sz="1600" dirty="0" err="1"/>
-              <a:t>Phantompeak</a:t>
-            </a:r>
-            <a:r>
-              <a:rPr lang="en-GB" sz="1600" dirty="0"/>
-              <a:t> trick.</a:t>
-            </a:r>
-          </a:p>
-          <a:p>
-            <a:pPr marL="857250" lvl="1" indent="-400050">
-              <a:buAutoNum type="romanLcParenR"/>
+              <a:rPr lang="en-IT" b="1" dirty="0"/>
+              <a:t>Why does this matter more for ChIP-seq? Ambiguous reads</a:t>
+            </a:r>
+            <a:br>
+              <a:rPr lang="en-IT" dirty="0"/>
+            </a:br>
+            <a:r>
+              <a:rPr lang="en-IT" dirty="0"/>
+              <a:t>→ uncertain genomic placement</a:t>
+            </a:r>
+            <a:br>
+              <a:rPr lang="en-IT" dirty="0"/>
+            </a:br>
+            <a:r>
+              <a:rPr lang="en-IT" dirty="0"/>
+              <a:t>→ accumulation at repetitive regions</a:t>
+            </a:r>
+            <a:br>
+              <a:rPr lang="en-IT" dirty="0"/>
+            </a:br>
+            <a:r>
+              <a:rPr lang="en-IT" dirty="0"/>
+              <a:t>→ apparent local enrichment</a:t>
+            </a:r>
+            <a:br>
+              <a:rPr lang="en-IT" dirty="0"/>
+            </a:br>
+            <a:r>
+              <a:rPr lang="en-IT" dirty="0"/>
+              <a:t>→ </a:t>
+            </a:r>
+            <a:r>
+              <a:rPr lang="en-IT" b="1" dirty="0"/>
+              <a:t>potential false or inflated peaks</a:t>
+            </a:r>
+            <a:endParaRPr lang="en-IT" dirty="0"/>
+          </a:p>
+        </p:txBody>
+      </p:sp>
+      <p:sp>
+        <p:nvSpPr>
+          <p:cNvPr id="12" name="TextBox 11">
+            <a:extLst>
+              <a:ext uri="{FF2B5EF4-FFF2-40B4-BE49-F238E27FC236}">
+                <a16:creationId xmlns:a16="http://schemas.microsoft.com/office/drawing/2014/main" id="{ADCBAA4C-6457-52D3-FE21-E1D64B8C7818}"/>
+              </a:ext>
+            </a:extLst>
+          </p:cNvPr>
+          <p:cNvSpPr txBox="1"/>
+          <p:nvPr/>
+        </p:nvSpPr>
+        <p:spPr>
+          <a:xfrm>
+            <a:off x="2720246" y="3429000"/>
+            <a:ext cx="6751508" cy="2585323"/>
+          </a:xfrm>
+          <a:prstGeom prst="rect">
+            <a:avLst/>
+          </a:prstGeom>
+          <a:noFill/>
+        </p:spPr>
+        <p:txBody>
+          <a:bodyPr wrap="square">
+            <a:spAutoFit/>
+          </a:bodyPr>
+          <a:lstStyle/>
+          <a:p>
+            <a:pPr>
+              <a:buNone/>
             </a:pPr>
             <a:r>
-              <a:rPr lang="en-IT" sz="1600" dirty="0"/>
-              <a:t>Overlapping fragments generate the </a:t>
-            </a:r>
-            <a:r>
-              <a:rPr lang="en-IT" sz="1600" b="1" dirty="0"/>
-              <a:t>observed pileup</a:t>
-            </a:r>
-            <a:r>
-              <a:rPr lang="en-IT" sz="1600" dirty="0"/>
-              <a:t> k(x) across the genome.</a:t>
-            </a:r>
-            <a:endParaRPr lang="en-GB" sz="1600" dirty="0"/>
-          </a:p>
-          <a:p>
-            <a:pPr marL="342900" indent="-342900">
-              <a:buAutoNum type="arabicPeriod"/>
+              <a:rPr lang="en-IT" b="1" dirty="0"/>
+              <a:t>Good practice for standard TF ChIP-seq</a:t>
+            </a:r>
+          </a:p>
+          <a:p>
+            <a:pPr marL="342900" lvl="0" indent="-342900">
+              <a:buFont typeface="Arial" panose="020B0604020202020204" pitchFamily="34" charset="0"/>
+              <a:buChar char="•"/>
             </a:pPr>
-            <a:endParaRPr lang="en-GB" sz="1600" dirty="0"/>
-          </a:p>
-          <a:p>
-            <a:pPr marL="342900" indent="-342900">
-              <a:buAutoNum type="arabicPeriod"/>
+            <a:r>
+              <a:rPr lang="en-IT" dirty="0"/>
+              <a:t>retain primary alignments;</a:t>
+            </a:r>
+          </a:p>
+          <a:p>
+            <a:pPr marL="342900" lvl="0" indent="-342900">
+              <a:buFont typeface="Arial" panose="020B0604020202020204" pitchFamily="34" charset="0"/>
+              <a:buChar char="•"/>
             </a:pPr>
             <a:r>
-              <a:rPr lang="en-IT" sz="1600" dirty="0">
-                <a:solidFill>
-                  <a:srgbClr val="00B050"/>
-                </a:solidFill>
-              </a:rPr>
-              <a:t>Define the expected background</a:t>
-            </a:r>
-            <a:r>
-              <a:rPr lang="en-IT" sz="1600" dirty="0"/>
-              <a:t>:</a:t>
-            </a:r>
-          </a:p>
-          <a:p>
-            <a:pPr marL="857250" lvl="1" indent="-400050">
-              <a:buAutoNum type="romanLcParenR"/>
+              <a:rPr lang="en-IT" dirty="0"/>
+              <a:t>require the expected paired-end configuration;</a:t>
+            </a:r>
+          </a:p>
+          <a:p>
+            <a:pPr marL="342900" lvl="0" indent="-342900">
+              <a:buFont typeface="Arial" panose="020B0604020202020204" pitchFamily="34" charset="0"/>
+              <a:buChar char="•"/>
             </a:pPr>
             <a:r>
-              <a:rPr lang="en-IT" sz="1600" dirty="0"/>
-              <a:t>For each genomic region, MACS3 asks: </a:t>
-            </a:r>
-            <a:r>
-              <a:rPr lang="en-IT" sz="1600" b="1" dirty="0"/>
-              <a:t>how much signal would we expect in the absence of specific enrichment?</a:t>
-            </a:r>
-          </a:p>
-          <a:p>
-            <a:pPr marL="857250" lvl="1" indent="-400050">
-              <a:buAutoNum type="romanLcParenR"/>
+              <a:rPr lang="en-IT" dirty="0"/>
+              <a:t>filter low-confidence alignments using MAPQ;</a:t>
+            </a:r>
+          </a:p>
+          <a:p>
+            <a:pPr marL="342900" lvl="0" indent="-342900">
+              <a:buFont typeface="Arial" panose="020B0604020202020204" pitchFamily="34" charset="0"/>
+              <a:buChar char="•"/>
             </a:pPr>
             <a:r>
-              <a:rPr lang="en-US" sz="1600" dirty="0"/>
-              <a:t>BG is constructed from control samples (like input) or internally from the actual sample.</a:t>
-            </a:r>
-          </a:p>
-          <a:p>
-            <a:pPr marL="857250" lvl="1" indent="-400050">
-              <a:buAutoNum type="romanLcParenR"/>
+              <a:rPr lang="en-IT" dirty="0"/>
+              <a:t>compare multimapping rates across biological replicates.</a:t>
+            </a:r>
+          </a:p>
+          <a:p>
+            <a:pPr marL="342900" lvl="0" indent="-342900">
+              <a:buFont typeface="Arial" panose="020B0604020202020204" pitchFamily="34" charset="0"/>
+              <a:buChar char="•"/>
             </a:pPr>
-            <a:r>
-              <a:rPr lang="en-IT" sz="1600" dirty="0"/>
-              <a:t>MACS3 considers background at different spatial scales: </a:t>
-            </a:r>
-            <a:r>
-              <a:rPr lang="en-IT" sz="1600" b="1" dirty="0"/>
-              <a:t>genome-wide background</a:t>
-            </a:r>
-            <a:r>
-              <a:rPr lang="en-IT" sz="1600" dirty="0"/>
-              <a:t>, </a:t>
-            </a:r>
-            <a:r>
-              <a:rPr lang="en-IT" sz="1600" b="1" dirty="0"/>
-              <a:t>fragment-scale background</a:t>
-            </a:r>
-            <a:r>
-              <a:rPr lang="en-IT" sz="1600" dirty="0"/>
-              <a:t>, </a:t>
-            </a:r>
-            <a:r>
-              <a:rPr lang="en-IT" sz="1600" b="1" dirty="0"/>
-              <a:t>local background</a:t>
-            </a:r>
-            <a:r>
-              <a:rPr lang="en-IT" sz="1600" dirty="0"/>
-              <a:t>, </a:t>
-            </a:r>
-            <a:r>
-              <a:rPr lang="en-IT" sz="1600" b="1" dirty="0"/>
-              <a:t>broader local background </a:t>
-            </a:r>
-            <a:r>
-              <a:rPr lang="en-IT" sz="1600" dirty="0"/>
-              <a:t>-&gt; It uses the largest of these! i.e MACS says my expected intesities are potentially : global average signal, or different local level signals</a:t>
-            </a:r>
-          </a:p>
-          <a:p>
-            <a:pPr marL="342900" indent="-342900">
-              <a:buAutoNum type="arabicPeriod"/>
+            <a:endParaRPr lang="en-IT" dirty="0"/>
+          </a:p>
+          <a:p>
+            <a:pPr>
+              <a:buNone/>
             </a:pPr>
-            <a:endParaRPr lang="en-IT" sz="1600" dirty="0"/>
-          </a:p>
-          <a:p>
-            <a:pPr marL="342900" indent="-342900">
-              <a:buAutoNum type="arabicPeriod"/>
-            </a:pPr>
-            <a:r>
-              <a:rPr lang="en-IT" sz="1600" dirty="0">
-                <a:solidFill>
-                  <a:srgbClr val="00B050"/>
-                </a:solidFill>
-              </a:rPr>
-              <a:t>Convert significant enrichment into peaks:</a:t>
-            </a:r>
-          </a:p>
-          <a:p>
-            <a:pPr marL="857250" lvl="1" indent="-400050">
-              <a:buAutoNum type="romanLcParenR"/>
-            </a:pPr>
-            <a:r>
-              <a:rPr lang="en-IT" sz="1600" dirty="0"/>
-              <a:t>MACS3 compares observed pileup and expected (BG) using a </a:t>
-            </a:r>
-            <a:r>
-              <a:rPr lang="en-IT" sz="1600" b="1" dirty="0"/>
-              <a:t>Poisson model</a:t>
-            </a:r>
-            <a:r>
-              <a:rPr lang="en-IT" sz="1600" dirty="0"/>
-              <a:t>. Meaning Observed ~ Poisson(Expected) so we get how likely it is to see that observed signal given the expected signal and its theoretical distribution of the error.</a:t>
-            </a:r>
-          </a:p>
-          <a:p>
-            <a:pPr marL="857250" lvl="1" indent="-400050">
-              <a:buAutoNum type="romanLcParenR"/>
-            </a:pPr>
-            <a:r>
-              <a:rPr lang="en-IT" sz="1600" dirty="0"/>
-              <a:t>It then select those significant – join nearby portions – apply some rule for gapping – compute p and then q values - generate the peakfile!</a:t>
-            </a:r>
-          </a:p>
-          <a:p>
-            <a:pPr marL="400050" indent="-400050">
-              <a:buAutoNum type="romanLcParenR"/>
-            </a:pPr>
-            <a:endParaRPr lang="en-IT" sz="1600" dirty="0"/>
-          </a:p>
-          <a:p>
-            <a:endParaRPr lang="en-IT" sz="1600" dirty="0"/>
+            <a:r>
+              <a:rPr lang="en-IT" b="1" dirty="0"/>
+              <a:t>Exception:</a:t>
+            </a:r>
+            <a:r>
+              <a:rPr lang="en-IT" dirty="0"/>
+              <a:t> if repetitive DNA or multicopy loci are the biological target, multimappers may contain meaningful signal and require a repeat-aware analysis.</a:t>
+            </a:r>
           </a:p>
         </p:txBody>
       </p:sp>
     </p:spTree>
     <p:extLst>
       <p:ext uri="{BB962C8B-B14F-4D97-AF65-F5344CB8AC3E}">
-        <p14:creationId xmlns:p14="http://schemas.microsoft.com/office/powerpoint/2010/main" val="3394874389"/>
+        <p14:creationId xmlns:p14="http://schemas.microsoft.com/office/powerpoint/2010/main" val="3675443517"/>
       </p:ext>
     </p:extLst>
   </p:cSld>
@@ -14429,7 +16422,7 @@
                                           </p:stCondLst>
                                         </p:cTn>
                                         <p:tgtEl>
-                                          <p:spTgt spid="18"/>
+                                          <p:spTgt spid="12"/>
                                         </p:tgtEl>
                                         <p:attrNameLst>
                                           <p:attrName>style.visibility</p:attrName>
@@ -14470,7 +16463,7 @@
       </p:par>
     </p:tnLst>
     <p:bldLst>
-      <p:bldP spid="18" grpId="0"/>
+      <p:bldP spid="12" grpId="0"/>
     </p:bldLst>
   </p:timing>
 </p:sld>
@@ -14495,10 +16488,41 @@
       </p:grpSpPr>
       <p:sp>
         <p:nvSpPr>
+          <p:cNvPr id="2" name="Title 1">
+            <a:extLst>
+              <a:ext uri="{FF2B5EF4-FFF2-40B4-BE49-F238E27FC236}">
+                <a16:creationId xmlns:a16="http://schemas.microsoft.com/office/drawing/2014/main" id="{FFDDF612-D9BE-A9FF-5AF2-87139C20014F}"/>
+              </a:ext>
+            </a:extLst>
+          </p:cNvPr>
+          <p:cNvSpPr>
+            <a:spLocks noGrp="1"/>
+          </p:cNvSpPr>
+          <p:nvPr>
+            <p:ph type="title"/>
+          </p:nvPr>
+        </p:nvSpPr>
+        <p:spPr/>
+        <p:txBody>
+          <a:bodyPr>
+            <a:normAutofit fontScale="90000"/>
+          </a:bodyPr>
+          <a:lstStyle/>
+          <a:p>
+            <a:r>
+              <a:rPr lang="en-IT" dirty="0"/>
+              <a:t>2) Coordinate duplication: artifact or real enrichment?</a:t>
+            </a:r>
+            <a:endParaRPr lang="en-GB" dirty="0"/>
+          </a:p>
+        </p:txBody>
+      </p:sp>
+      <p:sp>
+        <p:nvSpPr>
           <p:cNvPr id="4" name="Date Placeholder 3">
             <a:extLst>
               <a:ext uri="{FF2B5EF4-FFF2-40B4-BE49-F238E27FC236}">
-                <a16:creationId xmlns:a16="http://schemas.microsoft.com/office/drawing/2014/main" id="{4D0F476B-F93A-F44E-C839-0EE0EDB8C20E}"/>
+                <a16:creationId xmlns:a16="http://schemas.microsoft.com/office/drawing/2014/main" id="{818414CC-CD1A-D2FF-6A3D-2A8E561F1853}"/>
               </a:ext>
             </a:extLst>
           </p:cNvPr>
@@ -14516,7 +16540,7 @@
           <a:p>
             <a:fld id="{761DFEEA-1162-B343-ACBF-B3E92F6AC390}" type="datetime1">
               <a:rPr lang="it-IT" smtClean="0"/>
-              <a:t>08/10/26</a:t>
+              <a:t>15/10/26</a:t>
             </a:fld>
             <a:endParaRPr lang="en-GB"/>
           </a:p>
@@ -14527,7 +16551,7 @@
           <p:cNvPr id="5" name="Footer Placeholder 4">
             <a:extLst>
               <a:ext uri="{FF2B5EF4-FFF2-40B4-BE49-F238E27FC236}">
-                <a16:creationId xmlns:a16="http://schemas.microsoft.com/office/drawing/2014/main" id="{184472E6-C3DC-1337-FAA3-BEE2B67AFA1B}"/>
+                <a16:creationId xmlns:a16="http://schemas.microsoft.com/office/drawing/2014/main" id="{2E8E70FF-4EC3-8921-5FEB-73A243B1EAD7}"/>
               </a:ext>
             </a:extLst>
           </p:cNvPr>
@@ -14555,7 +16579,7 @@
           <p:cNvPr id="6" name="Slide Number Placeholder 5">
             <a:extLst>
               <a:ext uri="{FF2B5EF4-FFF2-40B4-BE49-F238E27FC236}">
-                <a16:creationId xmlns:a16="http://schemas.microsoft.com/office/drawing/2014/main" id="{61F68FD3-3625-0E40-FA59-6838B5ABEABF}"/>
+                <a16:creationId xmlns:a16="http://schemas.microsoft.com/office/drawing/2014/main" id="{D626775F-5085-6B94-5F7D-28E06E62154D}"/>
               </a:ext>
             </a:extLst>
           </p:cNvPr>
@@ -14581,85 +16605,582 @@
       </p:sp>
       <p:sp>
         <p:nvSpPr>
-          <p:cNvPr id="7" name="Title 1">
-            <a:extLst>
-              <a:ext uri="{FF2B5EF4-FFF2-40B4-BE49-F238E27FC236}">
-                <a16:creationId xmlns:a16="http://schemas.microsoft.com/office/drawing/2014/main" id="{5867F66F-A207-5D96-E7DA-A3884D68C5FB}"/>
-              </a:ext>
-            </a:extLst>
-          </p:cNvPr>
-          <p:cNvSpPr>
-            <a:spLocks noGrp="1"/>
-          </p:cNvSpPr>
-          <p:nvPr>
-            <p:ph type="title"/>
-          </p:nvPr>
+          <p:cNvPr id="8" name="TextBox 7">
+            <a:extLst>
+              <a:ext uri="{FF2B5EF4-FFF2-40B4-BE49-F238E27FC236}">
+                <a16:creationId xmlns:a16="http://schemas.microsoft.com/office/drawing/2014/main" id="{7A96113F-D1D4-2C93-1FFC-A07F81BB1773}"/>
+              </a:ext>
+            </a:extLst>
+          </p:cNvPr>
+          <p:cNvSpPr txBox="1"/>
+          <p:nvPr/>
         </p:nvSpPr>
         <p:spPr>
           <a:xfrm>
-            <a:off x="155985" y="143352"/>
-            <a:ext cx="9414735" cy="551051"/>
-          </a:xfrm>
-        </p:spPr>
-        <p:txBody>
-          <a:bodyPr>
-            <a:normAutofit/>
-          </a:bodyPr>
-          <a:lstStyle/>
-          <a:p>
-            <a:r>
-              <a:rPr lang="en-IT" sz="3200" dirty="0"/>
-              <a:t>Control condition and Control-free peak calling:</a:t>
-            </a:r>
-            <a:endParaRPr lang="en-GB" sz="3200" dirty="0"/>
-          </a:p>
-        </p:txBody>
-      </p:sp>
-      <p:pic>
-        <p:nvPicPr>
-          <p:cNvPr id="9" name="Picture 8">
-            <a:extLst>
-              <a:ext uri="{FF2B5EF4-FFF2-40B4-BE49-F238E27FC236}">
-                <a16:creationId xmlns:a16="http://schemas.microsoft.com/office/drawing/2014/main" id="{70D574AD-2FE2-7452-6CCD-E630B58191FF}"/>
-              </a:ext>
-            </a:extLst>
-          </p:cNvPr>
-          <p:cNvPicPr>
-            <a:picLocks noChangeAspect="1"/>
-          </p:cNvPicPr>
-          <p:nvPr/>
-        </p:nvPicPr>
-        <p:blipFill>
-          <a:blip r:embed="rId2"/>
-          <a:stretch>
-            <a:fillRect/>
-          </a:stretch>
-        </p:blipFill>
-        <p:spPr>
-          <a:xfrm>
-            <a:off x="285622" y="1387255"/>
-            <a:ext cx="11620755" cy="4276243"/>
+            <a:off x="134470" y="896035"/>
+            <a:ext cx="7752230" cy="369332"/>
           </a:xfrm>
           <a:prstGeom prst="rect">
             <a:avLst/>
           </a:prstGeom>
-          <a:ln w="28575">
+          <a:noFill/>
+        </p:spPr>
+        <p:txBody>
+          <a:bodyPr wrap="square">
+            <a:spAutoFit/>
+          </a:bodyPr>
+          <a:lstStyle/>
+          <a:p>
+            <a:r>
+              <a:rPr lang="en-IT" dirty="0"/>
+              <a:t>Coordinate duplicates are fragments sharing the same genomic coordinates.</a:t>
+            </a:r>
+            <a:endParaRPr lang="en-GB" dirty="0"/>
+          </a:p>
+        </p:txBody>
+      </p:sp>
+      <p:sp>
+        <p:nvSpPr>
+          <p:cNvPr id="10" name="TextBox 9">
+            <a:extLst>
+              <a:ext uri="{FF2B5EF4-FFF2-40B4-BE49-F238E27FC236}">
+                <a16:creationId xmlns:a16="http://schemas.microsoft.com/office/drawing/2014/main" id="{5D425E91-EB88-B66A-BF17-D5A5E3C4755A}"/>
+              </a:ext>
+            </a:extLst>
+          </p:cNvPr>
+          <p:cNvSpPr txBox="1"/>
+          <p:nvPr/>
+        </p:nvSpPr>
+        <p:spPr>
+          <a:xfrm>
+            <a:off x="311150" y="1519493"/>
+            <a:ext cx="3727450" cy="1754326"/>
+          </a:xfrm>
+          <a:prstGeom prst="rect">
+            <a:avLst/>
+          </a:prstGeom>
+          <a:noFill/>
+          <a:ln>
             <a:solidFill>
               <a:schemeClr val="tx1"/>
             </a:solidFill>
           </a:ln>
         </p:spPr>
-      </p:pic>
+        <p:txBody>
+          <a:bodyPr wrap="square">
+            <a:spAutoFit/>
+          </a:bodyPr>
+          <a:lstStyle/>
+          <a:p>
+            <a:pPr>
+              <a:buNone/>
+            </a:pPr>
+            <a:r>
+              <a:rPr lang="en-IT" b="1" dirty="0"/>
+              <a:t>Technical explanation</a:t>
+            </a:r>
+          </a:p>
+          <a:p>
+            <a:pPr>
+              <a:buNone/>
+            </a:pPr>
+            <a:r>
+              <a:rPr lang="en-IT" b="1" dirty="0"/>
+              <a:t>Few original ChIP fragments</a:t>
+            </a:r>
+            <a:br>
+              <a:rPr lang="en-IT" dirty="0"/>
+            </a:br>
+            <a:r>
+              <a:rPr lang="en-IT" dirty="0"/>
+              <a:t>→ PCR amplification</a:t>
+            </a:r>
+            <a:br>
+              <a:rPr lang="en-IT" dirty="0"/>
+            </a:br>
+            <a:r>
+              <a:rPr lang="en-IT" dirty="0"/>
+              <a:t>→ many identical fragments</a:t>
+            </a:r>
+            <a:br>
+              <a:rPr lang="en-IT" dirty="0"/>
+            </a:br>
+            <a:r>
+              <a:rPr lang="en-IT" dirty="0"/>
+              <a:t>→ artificial local pileup</a:t>
+            </a:r>
+            <a:br>
+              <a:rPr lang="en-IT" dirty="0"/>
+            </a:br>
+            <a:r>
+              <a:rPr lang="en-IT" dirty="0"/>
+              <a:t>→ </a:t>
+            </a:r>
+            <a:r>
+              <a:rPr lang="en-IT" b="1" dirty="0"/>
+              <a:t>inflated or false peak</a:t>
+            </a:r>
+            <a:endParaRPr lang="en-IT" dirty="0"/>
+          </a:p>
+        </p:txBody>
+      </p:sp>
+      <p:sp>
+        <p:nvSpPr>
+          <p:cNvPr id="12" name="TextBox 11">
+            <a:extLst>
+              <a:ext uri="{FF2B5EF4-FFF2-40B4-BE49-F238E27FC236}">
+                <a16:creationId xmlns:a16="http://schemas.microsoft.com/office/drawing/2014/main" id="{F198A44C-1C3F-E463-C9D5-227FED3F8B3B}"/>
+              </a:ext>
+            </a:extLst>
+          </p:cNvPr>
+          <p:cNvSpPr txBox="1"/>
+          <p:nvPr/>
+        </p:nvSpPr>
+        <p:spPr>
+          <a:xfrm>
+            <a:off x="4438650" y="1519493"/>
+            <a:ext cx="6210300" cy="2862322"/>
+          </a:xfrm>
+          <a:prstGeom prst="rect">
+            <a:avLst/>
+          </a:prstGeom>
+          <a:noFill/>
+          <a:ln>
+            <a:solidFill>
+              <a:schemeClr val="tx1"/>
+            </a:solidFill>
+          </a:ln>
+        </p:spPr>
+        <p:txBody>
+          <a:bodyPr wrap="square">
+            <a:spAutoFit/>
+          </a:bodyPr>
+          <a:lstStyle/>
+          <a:p>
+            <a:pPr>
+              <a:buNone/>
+            </a:pPr>
+            <a:r>
+              <a:rPr lang="en-IT" b="1" dirty="0"/>
+              <a:t>But repeated coordinates can also be biological</a:t>
+            </a:r>
+          </a:p>
+          <a:p>
+            <a:pPr>
+              <a:buNone/>
+            </a:pPr>
+            <a:r>
+              <a:rPr lang="en-IT" b="1" dirty="0"/>
+              <a:t>Strong TF binding</a:t>
+            </a:r>
+            <a:br>
+              <a:rPr lang="en-IT" dirty="0"/>
+            </a:br>
+            <a:r>
+              <a:rPr lang="en-IT" dirty="0"/>
+              <a:t>→ many genuinely enriched fragments</a:t>
+            </a:r>
+            <a:br>
+              <a:rPr lang="en-IT" dirty="0"/>
+            </a:br>
+            <a:r>
+              <a:rPr lang="en-IT" dirty="0"/>
+              <a:t>→ repeated sampling of a narrow genomic region</a:t>
+            </a:r>
+            <a:br>
+              <a:rPr lang="en-IT" dirty="0"/>
+            </a:br>
+            <a:r>
+              <a:rPr lang="en-IT" dirty="0"/>
+              <a:t>→ identical/overlapping coordinates</a:t>
+            </a:r>
+            <a:br>
+              <a:rPr lang="en-IT" dirty="0"/>
+            </a:br>
+            <a:r>
+              <a:rPr lang="en-IT" dirty="0"/>
+              <a:t>→ </a:t>
+            </a:r>
+            <a:r>
+              <a:rPr lang="en-IT" b="1" dirty="0"/>
+              <a:t>real strong peak</a:t>
+            </a:r>
+          </a:p>
+          <a:p>
+            <a:pPr>
+              <a:buNone/>
+            </a:pPr>
+            <a:endParaRPr lang="en-IT" b="1" dirty="0"/>
+          </a:p>
+          <a:p>
+            <a:pPr lvl="0"/>
+            <a:r>
+              <a:rPr lang="en-IT" i="1" dirty="0">
+                <a:solidFill>
+                  <a:srgbClr val="FF0000"/>
+                </a:solidFill>
+              </a:rPr>
+              <a:t>small genomes;</a:t>
+            </a:r>
+          </a:p>
+          <a:p>
+            <a:pPr lvl="0"/>
+            <a:r>
+              <a:rPr lang="en-IT" i="1" dirty="0">
+                <a:solidFill>
+                  <a:srgbClr val="FF0000"/>
+                </a:solidFill>
+              </a:rPr>
+              <a:t>deep sequencing relative to genome size;</a:t>
+            </a:r>
+          </a:p>
+          <a:p>
+            <a:pPr lvl="0"/>
+            <a:r>
+              <a:rPr lang="en-IT" i="1" dirty="0">
+                <a:solidFill>
+                  <a:srgbClr val="FF0000"/>
+                </a:solidFill>
+              </a:rPr>
+              <a:t>sharply localized TF binding.</a:t>
+            </a:r>
+          </a:p>
+        </p:txBody>
+      </p:sp>
+      <p:sp>
+        <p:nvSpPr>
+          <p:cNvPr id="14" name="TextBox 13">
+            <a:extLst>
+              <a:ext uri="{FF2B5EF4-FFF2-40B4-BE49-F238E27FC236}">
+                <a16:creationId xmlns:a16="http://schemas.microsoft.com/office/drawing/2014/main" id="{3BAAD222-ED85-A4C6-56B5-B99995B50A44}"/>
+              </a:ext>
+            </a:extLst>
+          </p:cNvPr>
+          <p:cNvSpPr txBox="1"/>
+          <p:nvPr/>
+        </p:nvSpPr>
+        <p:spPr>
+          <a:xfrm>
+            <a:off x="311150" y="3701567"/>
+            <a:ext cx="3727450" cy="646331"/>
+          </a:xfrm>
+          <a:prstGeom prst="rect">
+            <a:avLst/>
+          </a:prstGeom>
+          <a:noFill/>
+        </p:spPr>
+        <p:txBody>
+          <a:bodyPr wrap="square">
+            <a:spAutoFit/>
+          </a:bodyPr>
+          <a:lstStyle/>
+          <a:p>
+            <a:pPr algn="ctr"/>
+            <a:r>
+              <a:rPr lang="en-IT" b="1" dirty="0">
+                <a:solidFill>
+                  <a:srgbClr val="FF0000"/>
+                </a:solidFill>
+              </a:rPr>
+              <a:t>Coordinate duplicate ≠ automatically PCR artifact.</a:t>
+            </a:r>
+            <a:endParaRPr lang="en-GB" b="1" dirty="0">
+              <a:solidFill>
+                <a:srgbClr val="FF0000"/>
+              </a:solidFill>
+            </a:endParaRPr>
+          </a:p>
+        </p:txBody>
+      </p:sp>
+      <p:sp>
+        <p:nvSpPr>
+          <p:cNvPr id="16" name="TextBox 15">
+            <a:extLst>
+              <a:ext uri="{FF2B5EF4-FFF2-40B4-BE49-F238E27FC236}">
+                <a16:creationId xmlns:a16="http://schemas.microsoft.com/office/drawing/2014/main" id="{00F0BE5C-1B10-6945-7030-D300669C301C}"/>
+              </a:ext>
+            </a:extLst>
+          </p:cNvPr>
+          <p:cNvSpPr txBox="1"/>
+          <p:nvPr/>
+        </p:nvSpPr>
+        <p:spPr>
+          <a:xfrm>
+            <a:off x="311150" y="4602024"/>
+            <a:ext cx="10337800" cy="1754326"/>
+          </a:xfrm>
+          <a:prstGeom prst="rect">
+            <a:avLst/>
+          </a:prstGeom>
+          <a:noFill/>
+          <a:ln>
+            <a:solidFill>
+              <a:schemeClr val="tx1"/>
+            </a:solidFill>
+          </a:ln>
+        </p:spPr>
+        <p:txBody>
+          <a:bodyPr wrap="square">
+            <a:spAutoFit/>
+          </a:bodyPr>
+          <a:lstStyle/>
+          <a:p>
+            <a:pPr>
+              <a:buNone/>
+            </a:pPr>
+            <a:r>
+              <a:rPr lang="en-IT" b="1" dirty="0"/>
+              <a:t>Good practice</a:t>
+            </a:r>
+          </a:p>
+          <a:p>
+            <a:pPr marL="342900" lvl="0" indent="-342900">
+              <a:buFont typeface="Arial" panose="020B0604020202020204" pitchFamily="34" charset="0"/>
+              <a:buChar char="•"/>
+            </a:pPr>
+            <a:r>
+              <a:rPr lang="en-IT" dirty="0"/>
+              <a:t>mark and </a:t>
+            </a:r>
+            <a:r>
+              <a:rPr lang="en-IT" b="1" dirty="0"/>
+              <a:t>measure</a:t>
+            </a:r>
+            <a:r>
+              <a:rPr lang="en-IT" dirty="0"/>
+              <a:t> duplicates;</a:t>
+            </a:r>
+          </a:p>
+          <a:p>
+            <a:pPr marL="342900" lvl="0" indent="-342900">
+              <a:buFont typeface="Arial" panose="020B0604020202020204" pitchFamily="34" charset="0"/>
+              <a:buChar char="•"/>
+            </a:pPr>
+            <a:r>
+              <a:rPr lang="en-IT" dirty="0"/>
+              <a:t>compare duplicate rates between replicates;</a:t>
+            </a:r>
+          </a:p>
+          <a:p>
+            <a:pPr marL="342900" lvl="0" indent="-342900">
+              <a:buFont typeface="Arial" panose="020B0604020202020204" pitchFamily="34" charset="0"/>
+              <a:buChar char="•"/>
+            </a:pPr>
+            <a:r>
+              <a:rPr lang="en-IT" dirty="0"/>
+              <a:t>look for unusually high or inconsistent samples;</a:t>
+            </a:r>
+          </a:p>
+          <a:p>
+            <a:pPr marL="342900" lvl="0" indent="-342900">
+              <a:buFont typeface="Arial" panose="020B0604020202020204" pitchFamily="34" charset="0"/>
+              <a:buChar char="•"/>
+            </a:pPr>
+            <a:r>
+              <a:rPr lang="en-IT" dirty="0"/>
+              <a:t>interpret duplication together with enrichment and replicate reproducibility;</a:t>
+            </a:r>
+          </a:p>
+          <a:p>
+            <a:pPr marL="342900" lvl="0" indent="-342900">
+              <a:buFont typeface="Arial" panose="020B0604020202020204" pitchFamily="34" charset="0"/>
+              <a:buChar char="•"/>
+            </a:pPr>
+            <a:r>
+              <a:rPr lang="en-IT" dirty="0"/>
+              <a:t>use deduplication as a </a:t>
+            </a:r>
+            <a:r>
+              <a:rPr lang="en-IT" b="1" dirty="0"/>
+              <a:t>sensitivity analysis</a:t>
+            </a:r>
+            <a:r>
+              <a:rPr lang="en-IT" dirty="0"/>
+              <a:t>, not an automatic reaction.</a:t>
+            </a:r>
+          </a:p>
+        </p:txBody>
+      </p:sp>
     </p:spTree>
     <p:extLst>
       <p:ext uri="{BB962C8B-B14F-4D97-AF65-F5344CB8AC3E}">
-        <p14:creationId xmlns:p14="http://schemas.microsoft.com/office/powerpoint/2010/main" val="3213431792"/>
+        <p14:creationId xmlns:p14="http://schemas.microsoft.com/office/powerpoint/2010/main" val="2461430938"/>
       </p:ext>
     </p:extLst>
   </p:cSld>
   <p:clrMapOvr>
     <a:masterClrMapping/>
   </p:clrMapOvr>
+  <p:timing>
+    <p:tnLst>
+      <p:par>
+        <p:cTn id="1" dur="indefinite" restart="never" nodeType="tmRoot">
+          <p:childTnLst>
+            <p:seq concurrent="1" nextAc="seek">
+              <p:cTn id="2" dur="indefinite" nodeType="mainSeq">
+                <p:childTnLst>
+                  <p:par>
+                    <p:cTn id="3" fill="hold">
+                      <p:stCondLst>
+                        <p:cond delay="indefinite"/>
+                      </p:stCondLst>
+                      <p:childTnLst>
+                        <p:par>
+                          <p:cTn id="4" fill="hold">
+                            <p:stCondLst>
+                              <p:cond delay="0"/>
+                            </p:stCondLst>
+                            <p:childTnLst>
+                              <p:par>
+                                <p:cTn id="5" presetID="1" presetClass="entr" presetSubtype="0" fill="hold" grpId="0" nodeType="clickEffect">
+                                  <p:stCondLst>
+                                    <p:cond delay="0"/>
+                                  </p:stCondLst>
+                                  <p:childTnLst>
+                                    <p:set>
+                                      <p:cBhvr>
+                                        <p:cTn id="6" dur="1" fill="hold">
+                                          <p:stCondLst>
+                                            <p:cond delay="0"/>
+                                          </p:stCondLst>
+                                        </p:cTn>
+                                        <p:tgtEl>
+                                          <p:spTgt spid="12"/>
+                                        </p:tgtEl>
+                                        <p:attrNameLst>
+                                          <p:attrName>style.visibility</p:attrName>
+                                        </p:attrNameLst>
+                                      </p:cBhvr>
+                                      <p:to>
+                                        <p:strVal val="visible"/>
+                                      </p:to>
+                                    </p:set>
+                                  </p:childTnLst>
+                                </p:cTn>
+                              </p:par>
+                            </p:childTnLst>
+                          </p:cTn>
+                        </p:par>
+                      </p:childTnLst>
+                    </p:cTn>
+                  </p:par>
+                  <p:par>
+                    <p:cTn id="7" fill="hold">
+                      <p:stCondLst>
+                        <p:cond delay="indefinite"/>
+                      </p:stCondLst>
+                      <p:childTnLst>
+                        <p:par>
+                          <p:cTn id="8" fill="hold">
+                            <p:stCondLst>
+                              <p:cond delay="0"/>
+                            </p:stCondLst>
+                            <p:childTnLst>
+                              <p:par>
+                                <p:cTn id="9" presetID="1" presetClass="entr" presetSubtype="0" fill="hold" grpId="0" nodeType="clickEffect">
+                                  <p:stCondLst>
+                                    <p:cond delay="0"/>
+                                  </p:stCondLst>
+                                  <p:childTnLst>
+                                    <p:set>
+                                      <p:cBhvr>
+                                        <p:cTn id="10" dur="1" fill="hold">
+                                          <p:stCondLst>
+                                            <p:cond delay="0"/>
+                                          </p:stCondLst>
+                                        </p:cTn>
+                                        <p:tgtEl>
+                                          <p:spTgt spid="14"/>
+                                        </p:tgtEl>
+                                        <p:attrNameLst>
+                                          <p:attrName>style.visibility</p:attrName>
+                                        </p:attrNameLst>
+                                      </p:cBhvr>
+                                      <p:to>
+                                        <p:strVal val="visible"/>
+                                      </p:to>
+                                    </p:set>
+                                  </p:childTnLst>
+                                </p:cTn>
+                              </p:par>
+                            </p:childTnLst>
+                          </p:cTn>
+                        </p:par>
+                      </p:childTnLst>
+                    </p:cTn>
+                  </p:par>
+                  <p:par>
+                    <p:cTn id="11" fill="hold">
+                      <p:stCondLst>
+                        <p:cond delay="indefinite"/>
+                      </p:stCondLst>
+                      <p:childTnLst>
+                        <p:par>
+                          <p:cTn id="12" fill="hold">
+                            <p:stCondLst>
+                              <p:cond delay="0"/>
+                            </p:stCondLst>
+                            <p:childTnLst>
+                              <p:par>
+                                <p:cTn id="13" presetID="1" presetClass="entr" presetSubtype="0" fill="hold" grpId="0" nodeType="clickEffect">
+                                  <p:stCondLst>
+                                    <p:cond delay="0"/>
+                                  </p:stCondLst>
+                                  <p:childTnLst>
+                                    <p:set>
+                                      <p:cBhvr>
+                                        <p:cTn id="14" dur="1" fill="hold">
+                                          <p:stCondLst>
+                                            <p:cond delay="0"/>
+                                          </p:stCondLst>
+                                        </p:cTn>
+                                        <p:tgtEl>
+                                          <p:spTgt spid="16"/>
+                                        </p:tgtEl>
+                                        <p:attrNameLst>
+                                          <p:attrName>style.visibility</p:attrName>
+                                        </p:attrNameLst>
+                                      </p:cBhvr>
+                                      <p:to>
+                                        <p:strVal val="visible"/>
+                                      </p:to>
+                                    </p:set>
+                                  </p:childTnLst>
+                                </p:cTn>
+                              </p:par>
+                            </p:childTnLst>
+                          </p:cTn>
+                        </p:par>
+                      </p:childTnLst>
+                    </p:cTn>
+                  </p:par>
+                </p:childTnLst>
+              </p:cTn>
+              <p:prevCondLst>
+                <p:cond evt="onPrev" delay="0">
+                  <p:tgtEl>
+                    <p:sldTgt/>
+                  </p:tgtEl>
+                </p:cond>
+              </p:prevCondLst>
+              <p:nextCondLst>
+                <p:cond evt="onNext" delay="0">
+                  <p:tgtEl>
+                    <p:sldTgt/>
+                  </p:tgtEl>
+                </p:cond>
+              </p:nextCondLst>
+            </p:seq>
+          </p:childTnLst>
+        </p:cTn>
+      </p:par>
+    </p:tnLst>
+    <p:bldLst>
+      <p:bldP spid="12" grpId="0" animBg="1"/>
+      <p:bldP spid="14" grpId="0"/>
+      <p:bldP spid="16" grpId="0" animBg="1"/>
+    </p:bldLst>
+  </p:timing>
 </p:sld>
 </file>
 
@@ -14682,10 +17203,41 @@
       </p:grpSpPr>
       <p:sp>
         <p:nvSpPr>
+          <p:cNvPr id="2" name="Title 1">
+            <a:extLst>
+              <a:ext uri="{FF2B5EF4-FFF2-40B4-BE49-F238E27FC236}">
+                <a16:creationId xmlns:a16="http://schemas.microsoft.com/office/drawing/2014/main" id="{3B427D23-B837-5233-9B71-332DDF91E754}"/>
+              </a:ext>
+            </a:extLst>
+          </p:cNvPr>
+          <p:cNvSpPr>
+            <a:spLocks noGrp="1"/>
+          </p:cNvSpPr>
+          <p:nvPr>
+            <p:ph type="title"/>
+          </p:nvPr>
+        </p:nvSpPr>
+        <p:spPr/>
+        <p:txBody>
+          <a:bodyPr>
+            <a:normAutofit fontScale="90000"/>
+          </a:bodyPr>
+          <a:lstStyle/>
+          <a:p>
+            <a:r>
+              <a:rPr lang="en-IT" dirty="0"/>
+              <a:t>ChIP-seq QC before peak calling</a:t>
+            </a:r>
+            <a:endParaRPr lang="en-GB" dirty="0"/>
+          </a:p>
+        </p:txBody>
+      </p:sp>
+      <p:sp>
+        <p:nvSpPr>
           <p:cNvPr id="4" name="Date Placeholder 3">
             <a:extLst>
               <a:ext uri="{FF2B5EF4-FFF2-40B4-BE49-F238E27FC236}">
-                <a16:creationId xmlns:a16="http://schemas.microsoft.com/office/drawing/2014/main" id="{48EB20C5-5AEF-F776-1AE3-A90C2C0DE936}"/>
+                <a16:creationId xmlns:a16="http://schemas.microsoft.com/office/drawing/2014/main" id="{BDD6697B-9D07-B59E-0907-C06F24ECFD9D}"/>
               </a:ext>
             </a:extLst>
           </p:cNvPr>
@@ -14703,7 +17255,7 @@
           <a:p>
             <a:fld id="{761DFEEA-1162-B343-ACBF-B3E92F6AC390}" type="datetime1">
               <a:rPr lang="it-IT" smtClean="0"/>
-              <a:t>08/10/26</a:t>
+              <a:t>15/10/26</a:t>
             </a:fld>
             <a:endParaRPr lang="en-GB"/>
           </a:p>
@@ -14714,7 +17266,7 @@
           <p:cNvPr id="5" name="Footer Placeholder 4">
             <a:extLst>
               <a:ext uri="{FF2B5EF4-FFF2-40B4-BE49-F238E27FC236}">
-                <a16:creationId xmlns:a16="http://schemas.microsoft.com/office/drawing/2014/main" id="{B04E9174-8DF0-2675-8B68-953439908917}"/>
+                <a16:creationId xmlns:a16="http://schemas.microsoft.com/office/drawing/2014/main" id="{72C6F15F-3936-FA84-9896-E728B82D09F8}"/>
               </a:ext>
             </a:extLst>
           </p:cNvPr>
@@ -14742,7 +17294,7 @@
           <p:cNvPr id="6" name="Slide Number Placeholder 5">
             <a:extLst>
               <a:ext uri="{FF2B5EF4-FFF2-40B4-BE49-F238E27FC236}">
-                <a16:creationId xmlns:a16="http://schemas.microsoft.com/office/drawing/2014/main" id="{7ABA7BD0-A2FD-BCBF-0B22-4FB0E375A484}"/>
+                <a16:creationId xmlns:a16="http://schemas.microsoft.com/office/drawing/2014/main" id="{4650F2CB-34AC-5B9A-196A-C7A9B4751161}"/>
               </a:ext>
             </a:extLst>
           </p:cNvPr>
@@ -14768,657 +17320,338 @@
       </p:sp>
       <p:sp>
         <p:nvSpPr>
-          <p:cNvPr id="7" name="Title 1">
-            <a:extLst>
-              <a:ext uri="{FF2B5EF4-FFF2-40B4-BE49-F238E27FC236}">
-                <a16:creationId xmlns:a16="http://schemas.microsoft.com/office/drawing/2014/main" id="{879F5670-A0C1-EA68-AA92-558F8EB5C765}"/>
-              </a:ext>
-            </a:extLst>
-          </p:cNvPr>
-          <p:cNvSpPr>
-            <a:spLocks noGrp="1"/>
-          </p:cNvSpPr>
-          <p:nvPr>
-            <p:ph type="title"/>
-          </p:nvPr>
+          <p:cNvPr id="8" name="TextBox 7">
+            <a:extLst>
+              <a:ext uri="{FF2B5EF4-FFF2-40B4-BE49-F238E27FC236}">
+                <a16:creationId xmlns:a16="http://schemas.microsoft.com/office/drawing/2014/main" id="{FACA3FEB-51EB-7E30-1DA5-5AAB72593E4B}"/>
+              </a:ext>
+            </a:extLst>
+          </p:cNvPr>
+          <p:cNvSpPr txBox="1"/>
+          <p:nvPr/>
         </p:nvSpPr>
         <p:spPr>
           <a:xfrm>
-            <a:off x="155985" y="143352"/>
-            <a:ext cx="9414735" cy="551051"/>
-          </a:xfrm>
-        </p:spPr>
-        <p:txBody>
-          <a:bodyPr>
-            <a:normAutofit fontScale="90000"/>
-          </a:bodyPr>
-          <a:lstStyle/>
-          <a:p>
-            <a:r>
-              <a:rPr lang="en-IT" b="1" dirty="0"/>
-              <a:t>Post-peak quality control</a:t>
-            </a:r>
-          </a:p>
-        </p:txBody>
-      </p:sp>
-      <p:sp>
-        <p:nvSpPr>
-          <p:cNvPr id="8" name="Text 2">
-            <a:extLst>
-              <a:ext uri="{FF2B5EF4-FFF2-40B4-BE49-F238E27FC236}">
-                <a16:creationId xmlns:a16="http://schemas.microsoft.com/office/drawing/2014/main" id="{C648B2FD-CFFC-6CA1-3F84-76E18A928531}"/>
-              </a:ext>
-            </a:extLst>
-          </p:cNvPr>
-          <p:cNvSpPr/>
-          <p:nvPr/>
-        </p:nvSpPr>
-        <p:spPr>
-          <a:xfrm>
-            <a:off x="320039" y="1286077"/>
-            <a:ext cx="1325880" cy="640080"/>
+            <a:off x="304799" y="2341604"/>
+            <a:ext cx="5314951" cy="830997"/>
           </a:xfrm>
           <a:prstGeom prst="rect">
             <a:avLst/>
           </a:prstGeom>
-          <a:solidFill>
-            <a:srgbClr val="F6F6F6"/>
-          </a:solidFill>
-          <a:ln w="12700">
-            <a:solidFill>
-              <a:srgbClr val="2F704F"/>
-            </a:solidFill>
-          </a:ln>
+          <a:noFill/>
         </p:spPr>
         <p:txBody>
-          <a:bodyPr wrap="square" lIns="762" tIns="762" rIns="762" bIns="762" rtlCol="0" anchor="ctr">
-            <a:normAutofit/>
+          <a:bodyPr wrap="square">
+            <a:spAutoFit/>
           </a:bodyPr>
           <a:lstStyle/>
           <a:p>
-            <a:pPr marL="0" indent="0" algn="ctr">
-              <a:buNone/>
-            </a:pPr>
-            <a:r>
-              <a:rPr lang="en-US" sz="1200" dirty="0">
+            <a:pPr algn="ctr"/>
+            <a:r>
+              <a:rPr lang="en-IT" sz="2400" b="1" dirty="0">
                 <a:solidFill>
-                  <a:srgbClr val="111111"/>
+                  <a:srgbClr val="FF0000"/>
                 </a:solidFill>
-                <a:latin typeface="Gill Sans" pitchFamily="34" charset="0"/>
-                <a:ea typeface="Gill Sans" pitchFamily="34" charset="-122"/>
-                <a:cs typeface="Gill Sans" pitchFamily="34" charset="-120"/>
-              </a:rPr>
-              <a:t>FASTQ</a:t>
-            </a:r>
-            <a:endParaRPr lang="en-US" sz="1200" dirty="0"/>
-          </a:p>
-        </p:txBody>
-      </p:sp>
-      <p:sp>
-        <p:nvSpPr>
-          <p:cNvPr id="9" name="Shape 3">
-            <a:extLst>
-              <a:ext uri="{FF2B5EF4-FFF2-40B4-BE49-F238E27FC236}">
-                <a16:creationId xmlns:a16="http://schemas.microsoft.com/office/drawing/2014/main" id="{E054935D-12F5-C156-1030-C693E7EA736A}"/>
-              </a:ext>
-            </a:extLst>
-          </p:cNvPr>
-          <p:cNvSpPr/>
+              </a:rPr>
+              <a:t>No single metric determines whether a ChIP-seq library is good!!</a:t>
+            </a:r>
+            <a:endParaRPr lang="en-GB" sz="2400" b="1" dirty="0">
+              <a:solidFill>
+                <a:srgbClr val="FF0000"/>
+              </a:solidFill>
+            </a:endParaRPr>
+          </a:p>
+        </p:txBody>
+      </p:sp>
+      <p:sp>
+        <p:nvSpPr>
+          <p:cNvPr id="10" name="TextBox 9">
+            <a:extLst>
+              <a:ext uri="{FF2B5EF4-FFF2-40B4-BE49-F238E27FC236}">
+                <a16:creationId xmlns:a16="http://schemas.microsoft.com/office/drawing/2014/main" id="{3975682B-CD95-A42F-B37F-2B6D72CDD13E}"/>
+              </a:ext>
+            </a:extLst>
+          </p:cNvPr>
+          <p:cNvSpPr txBox="1"/>
           <p:nvPr/>
         </p:nvSpPr>
         <p:spPr>
           <a:xfrm>
-            <a:off x="1673351" y="1606117"/>
-            <a:ext cx="219456" cy="0"/>
-          </a:xfrm>
-          <a:prstGeom prst="line">
-            <a:avLst/>
-          </a:prstGeom>
-          <a:noFill/>
-          <a:ln w="15240">
-            <a:solidFill>
-              <a:srgbClr val="2F704F"/>
-            </a:solidFill>
-            <a:prstDash val="solid"/>
-            <a:tailEnd type="triangle"/>
-          </a:ln>
-        </p:spPr>
-        <p:txBody>
-          <a:bodyPr/>
-          <a:lstStyle/>
-          <a:p>
-            <a:endParaRPr lang="en-GB"/>
-          </a:p>
-        </p:txBody>
-      </p:sp>
-      <p:sp>
-        <p:nvSpPr>
-          <p:cNvPr id="10" name="Text 4">
-            <a:extLst>
-              <a:ext uri="{FF2B5EF4-FFF2-40B4-BE49-F238E27FC236}">
-                <a16:creationId xmlns:a16="http://schemas.microsoft.com/office/drawing/2014/main" id="{16EE36DA-24ED-529D-647F-CB8ECFB49ED4}"/>
-              </a:ext>
-            </a:extLst>
-          </p:cNvPr>
-          <p:cNvSpPr/>
-          <p:nvPr/>
-        </p:nvSpPr>
-        <p:spPr>
-          <a:xfrm>
-            <a:off x="1965959" y="1286077"/>
-            <a:ext cx="1325880" cy="640080"/>
+            <a:off x="5854700" y="682974"/>
+            <a:ext cx="5511799" cy="5632311"/>
           </a:xfrm>
           <a:prstGeom prst="rect">
             <a:avLst/>
           </a:prstGeom>
-          <a:solidFill>
-            <a:srgbClr val="FFFFFF"/>
-          </a:solidFill>
-          <a:ln w="12700">
-            <a:solidFill>
-              <a:srgbClr val="2F704F"/>
-            </a:solidFill>
-          </a:ln>
-        </p:spPr>
-        <p:txBody>
-          <a:bodyPr wrap="square" lIns="762" tIns="762" rIns="762" bIns="762" rtlCol="0" anchor="ctr">
-            <a:normAutofit/>
-          </a:bodyPr>
-          <a:lstStyle/>
-          <a:p>
-            <a:pPr marL="0" indent="0" algn="ctr">
-              <a:buNone/>
-            </a:pPr>
-            <a:r>
-              <a:rPr lang="en-US" sz="1200" dirty="0">
-                <a:solidFill>
-                  <a:srgbClr val="111111"/>
-                </a:solidFill>
-                <a:latin typeface="Gill Sans" pitchFamily="34" charset="0"/>
-                <a:ea typeface="Gill Sans" pitchFamily="34" charset="-122"/>
-                <a:cs typeface="Gill Sans" pitchFamily="34" charset="-120"/>
-              </a:rPr>
-              <a:t>Bowtie2</a:t>
-            </a:r>
-            <a:endParaRPr lang="en-US" sz="1200" dirty="0"/>
-          </a:p>
-          <a:p>
-            <a:pPr marL="0" indent="0" algn="ctr">
-              <a:buNone/>
-            </a:pPr>
-            <a:r>
-              <a:rPr lang="en-US" sz="1200" dirty="0">
-                <a:solidFill>
-                  <a:srgbClr val="111111"/>
-                </a:solidFill>
-                <a:latin typeface="Gill Sans" pitchFamily="34" charset="0"/>
-                <a:ea typeface="Gill Sans" pitchFamily="34" charset="-122"/>
-                <a:cs typeface="Gill Sans" pitchFamily="34" charset="-120"/>
-              </a:rPr>
-              <a:t>BAM</a:t>
-            </a:r>
-            <a:endParaRPr lang="en-US" sz="1200" dirty="0"/>
-          </a:p>
-        </p:txBody>
-      </p:sp>
-      <p:sp>
-        <p:nvSpPr>
-          <p:cNvPr id="11" name="Shape 5">
-            <a:extLst>
-              <a:ext uri="{FF2B5EF4-FFF2-40B4-BE49-F238E27FC236}">
-                <a16:creationId xmlns:a16="http://schemas.microsoft.com/office/drawing/2014/main" id="{6F45CC0F-F71A-5A17-D471-0EF65F65A043}"/>
-              </a:ext>
-            </a:extLst>
-          </p:cNvPr>
-          <p:cNvSpPr/>
-          <p:nvPr/>
-        </p:nvSpPr>
-        <p:spPr>
-          <a:xfrm>
-            <a:off x="3319271" y="1606117"/>
-            <a:ext cx="219456" cy="0"/>
-          </a:xfrm>
-          <a:prstGeom prst="line">
-            <a:avLst/>
-          </a:prstGeom>
           <a:noFill/>
-          <a:ln w="15240">
-            <a:solidFill>
-              <a:srgbClr val="2F704F"/>
-            </a:solidFill>
-            <a:prstDash val="solid"/>
-            <a:tailEnd type="triangle"/>
-          </a:ln>
-        </p:spPr>
-        <p:txBody>
-          <a:bodyPr/>
-          <a:lstStyle/>
-          <a:p>
-            <a:endParaRPr lang="en-GB"/>
-          </a:p>
-        </p:txBody>
-      </p:sp>
-      <p:sp>
-        <p:nvSpPr>
-          <p:cNvPr id="12" name="Text 6">
-            <a:extLst>
-              <a:ext uri="{FF2B5EF4-FFF2-40B4-BE49-F238E27FC236}">
-                <a16:creationId xmlns:a16="http://schemas.microsoft.com/office/drawing/2014/main" id="{771268DD-DC6A-2177-CF26-9126392D25BE}"/>
-              </a:ext>
-            </a:extLst>
-          </p:cNvPr>
-          <p:cNvSpPr/>
-          <p:nvPr/>
-        </p:nvSpPr>
-        <p:spPr>
-          <a:xfrm>
-            <a:off x="3611879" y="1286077"/>
-            <a:ext cx="1325880" cy="640080"/>
-          </a:xfrm>
-          <a:prstGeom prst="rect">
-            <a:avLst/>
-          </a:prstGeom>
-          <a:solidFill>
-            <a:srgbClr val="FFFFFF"/>
-          </a:solidFill>
-          <a:ln w="12700">
-            <a:solidFill>
-              <a:srgbClr val="2F704F"/>
-            </a:solidFill>
-          </a:ln>
-        </p:spPr>
-        <p:txBody>
-          <a:bodyPr wrap="square" lIns="762" tIns="762" rIns="762" bIns="762" rtlCol="0" anchor="ctr">
-            <a:normAutofit/>
-          </a:bodyPr>
-          <a:lstStyle/>
-          <a:p>
-            <a:pPr marL="0" indent="0" algn="ctr">
-              <a:buNone/>
-            </a:pPr>
-            <a:r>
-              <a:rPr lang="en-US" sz="1200" dirty="0">
-                <a:solidFill>
-                  <a:srgbClr val="111111"/>
-                </a:solidFill>
-                <a:latin typeface="Gill Sans" pitchFamily="34" charset="0"/>
-                <a:ea typeface="Gill Sans" pitchFamily="34" charset="-122"/>
-                <a:cs typeface="Gill Sans" pitchFamily="34" charset="-120"/>
-              </a:rPr>
-              <a:t>ChIP QC</a:t>
-            </a:r>
-            <a:endParaRPr lang="en-US" sz="1200" dirty="0"/>
-          </a:p>
-          <a:p>
-            <a:pPr marL="0" indent="0" algn="ctr">
-              <a:buNone/>
-            </a:pPr>
-            <a:r>
-              <a:rPr lang="en-US" sz="1200" dirty="0">
-                <a:solidFill>
-                  <a:srgbClr val="111111"/>
-                </a:solidFill>
-                <a:latin typeface="Gill Sans" pitchFamily="34" charset="0"/>
-                <a:ea typeface="Gill Sans" pitchFamily="34" charset="-122"/>
-                <a:cs typeface="Gill Sans" pitchFamily="34" charset="-120"/>
-              </a:rPr>
-              <a:t>phantom peak</a:t>
-            </a:r>
-            <a:endParaRPr lang="en-US" sz="1200" dirty="0"/>
-          </a:p>
-        </p:txBody>
-      </p:sp>
-      <p:sp>
-        <p:nvSpPr>
-          <p:cNvPr id="13" name="Shape 7">
-            <a:extLst>
-              <a:ext uri="{FF2B5EF4-FFF2-40B4-BE49-F238E27FC236}">
-                <a16:creationId xmlns:a16="http://schemas.microsoft.com/office/drawing/2014/main" id="{018B2203-1D26-CF67-69B1-4EABAEF30EE3}"/>
-              </a:ext>
-            </a:extLst>
-          </p:cNvPr>
-          <p:cNvSpPr/>
-          <p:nvPr/>
-        </p:nvSpPr>
-        <p:spPr>
-          <a:xfrm>
-            <a:off x="4965191" y="1606117"/>
-            <a:ext cx="219456" cy="0"/>
-          </a:xfrm>
-          <a:prstGeom prst="line">
-            <a:avLst/>
-          </a:prstGeom>
-          <a:noFill/>
-          <a:ln w="15240">
-            <a:solidFill>
-              <a:srgbClr val="2F704F"/>
-            </a:solidFill>
-            <a:prstDash val="solid"/>
-            <a:tailEnd type="triangle"/>
-          </a:ln>
-        </p:spPr>
-        <p:txBody>
-          <a:bodyPr/>
-          <a:lstStyle/>
-          <a:p>
-            <a:endParaRPr lang="en-GB"/>
-          </a:p>
-        </p:txBody>
-      </p:sp>
-      <p:sp>
-        <p:nvSpPr>
-          <p:cNvPr id="14" name="Text 8">
-            <a:extLst>
-              <a:ext uri="{FF2B5EF4-FFF2-40B4-BE49-F238E27FC236}">
-                <a16:creationId xmlns:a16="http://schemas.microsoft.com/office/drawing/2014/main" id="{950F42B7-52BF-55C7-2915-FF2420C4B3CE}"/>
-              </a:ext>
-            </a:extLst>
-          </p:cNvPr>
-          <p:cNvSpPr/>
-          <p:nvPr/>
-        </p:nvSpPr>
-        <p:spPr>
-          <a:xfrm>
-            <a:off x="5257799" y="1286077"/>
-            <a:ext cx="1325880" cy="640080"/>
-          </a:xfrm>
-          <a:prstGeom prst="rect">
-            <a:avLst/>
-          </a:prstGeom>
-          <a:solidFill>
-            <a:srgbClr val="FFFFFF"/>
-          </a:solidFill>
-          <a:ln w="12700">
-            <a:solidFill>
-              <a:srgbClr val="2F704F"/>
-            </a:solidFill>
-          </a:ln>
-        </p:spPr>
-        <p:txBody>
-          <a:bodyPr wrap="square" lIns="762" tIns="762" rIns="762" bIns="762" rtlCol="0" anchor="ctr">
-            <a:normAutofit/>
-          </a:bodyPr>
-          <a:lstStyle/>
-          <a:p>
-            <a:pPr marL="0" indent="0" algn="ctr">
-              <a:buNone/>
-            </a:pPr>
-            <a:r>
-              <a:rPr lang="en-US" sz="1200" dirty="0">
-                <a:solidFill>
-                  <a:srgbClr val="111111"/>
-                </a:solidFill>
-                <a:latin typeface="Gill Sans" pitchFamily="34" charset="0"/>
-                <a:ea typeface="Gill Sans" pitchFamily="34" charset="-122"/>
-                <a:cs typeface="Gill Sans" pitchFamily="34" charset="-120"/>
-              </a:rPr>
-              <a:t>bigWig</a:t>
-            </a:r>
-            <a:endParaRPr lang="en-US" sz="1200" dirty="0"/>
-          </a:p>
-          <a:p>
-            <a:pPr marL="0" indent="0" algn="ctr">
-              <a:buNone/>
-            </a:pPr>
-            <a:r>
-              <a:rPr lang="en-US" sz="1200" dirty="0">
-                <a:solidFill>
-                  <a:srgbClr val="111111"/>
-                </a:solidFill>
-                <a:latin typeface="Gill Sans" pitchFamily="34" charset="0"/>
-                <a:ea typeface="Gill Sans" pitchFamily="34" charset="-122"/>
-                <a:cs typeface="Gill Sans" pitchFamily="34" charset="-120"/>
-              </a:rPr>
-              <a:t>tracks</a:t>
-            </a:r>
-            <a:endParaRPr lang="en-US" sz="1200" dirty="0"/>
-          </a:p>
-        </p:txBody>
-      </p:sp>
-      <p:sp>
-        <p:nvSpPr>
-          <p:cNvPr id="15" name="Shape 9">
-            <a:extLst>
-              <a:ext uri="{FF2B5EF4-FFF2-40B4-BE49-F238E27FC236}">
-                <a16:creationId xmlns:a16="http://schemas.microsoft.com/office/drawing/2014/main" id="{EDD1205E-4E1D-224A-1F72-5861203F6237}"/>
-              </a:ext>
-            </a:extLst>
-          </p:cNvPr>
-          <p:cNvSpPr/>
-          <p:nvPr/>
-        </p:nvSpPr>
-        <p:spPr>
-          <a:xfrm>
-            <a:off x="6611111" y="1606117"/>
-            <a:ext cx="219456" cy="0"/>
-          </a:xfrm>
-          <a:prstGeom prst="line">
-            <a:avLst/>
-          </a:prstGeom>
-          <a:noFill/>
-          <a:ln w="15240">
-            <a:solidFill>
-              <a:srgbClr val="2F704F"/>
-            </a:solidFill>
-            <a:prstDash val="solid"/>
-            <a:tailEnd type="triangle"/>
-          </a:ln>
-        </p:spPr>
-        <p:txBody>
-          <a:bodyPr/>
-          <a:lstStyle/>
-          <a:p>
-            <a:endParaRPr lang="en-GB"/>
-          </a:p>
-        </p:txBody>
-      </p:sp>
-      <p:sp>
-        <p:nvSpPr>
-          <p:cNvPr id="16" name="Text 10">
-            <a:extLst>
-              <a:ext uri="{FF2B5EF4-FFF2-40B4-BE49-F238E27FC236}">
-                <a16:creationId xmlns:a16="http://schemas.microsoft.com/office/drawing/2014/main" id="{476D79C6-E996-021D-AC3E-664DB950FE63}"/>
-              </a:ext>
-            </a:extLst>
-          </p:cNvPr>
-          <p:cNvSpPr/>
-          <p:nvPr/>
-        </p:nvSpPr>
-        <p:spPr>
-          <a:xfrm>
-            <a:off x="6903719" y="1286077"/>
-            <a:ext cx="1325880" cy="640080"/>
-          </a:xfrm>
-          <a:prstGeom prst="rect">
-            <a:avLst/>
-          </a:prstGeom>
-          <a:solidFill>
-            <a:srgbClr val="FFFFFF"/>
-          </a:solidFill>
-          <a:ln w="12700">
-            <a:solidFill>
-              <a:srgbClr val="2F704F"/>
-            </a:solidFill>
-          </a:ln>
-        </p:spPr>
-        <p:txBody>
-          <a:bodyPr wrap="square" lIns="762" tIns="762" rIns="762" bIns="762" rtlCol="0" anchor="ctr">
-            <a:normAutofit/>
-          </a:bodyPr>
-          <a:lstStyle/>
-          <a:p>
-            <a:pPr marL="0" indent="0" algn="ctr">
-              <a:buNone/>
-            </a:pPr>
-            <a:r>
-              <a:rPr lang="en-US" sz="1200" dirty="0">
-                <a:solidFill>
-                  <a:srgbClr val="111111"/>
-                </a:solidFill>
-                <a:latin typeface="Gill Sans" pitchFamily="34" charset="0"/>
-                <a:ea typeface="Gill Sans" pitchFamily="34" charset="-122"/>
-                <a:cs typeface="Gill Sans" pitchFamily="34" charset="-120"/>
-              </a:rPr>
-              <a:t>MACS3</a:t>
-            </a:r>
-            <a:endParaRPr lang="en-US" sz="1200" dirty="0"/>
-          </a:p>
-          <a:p>
-            <a:pPr marL="0" indent="0" algn="ctr">
-              <a:buNone/>
-            </a:pPr>
-            <a:r>
-              <a:rPr lang="en-US" sz="1200" dirty="0">
-                <a:solidFill>
-                  <a:srgbClr val="111111"/>
-                </a:solidFill>
-                <a:latin typeface="Gill Sans" pitchFamily="34" charset="0"/>
-                <a:ea typeface="Gill Sans" pitchFamily="34" charset="-122"/>
-                <a:cs typeface="Gill Sans" pitchFamily="34" charset="-120"/>
-              </a:rPr>
-              <a:t>peaks</a:t>
-            </a:r>
-            <a:endParaRPr lang="en-US" sz="1200" dirty="0"/>
-          </a:p>
-        </p:txBody>
-      </p:sp>
-      <p:sp>
-        <p:nvSpPr>
-          <p:cNvPr id="17" name="Shape 11">
-            <a:extLst>
-              <a:ext uri="{FF2B5EF4-FFF2-40B4-BE49-F238E27FC236}">
-                <a16:creationId xmlns:a16="http://schemas.microsoft.com/office/drawing/2014/main" id="{617C312D-7ABB-049A-5841-20DE80CEAA9B}"/>
-              </a:ext>
-            </a:extLst>
-          </p:cNvPr>
-          <p:cNvSpPr/>
-          <p:nvPr/>
-        </p:nvSpPr>
-        <p:spPr>
-          <a:xfrm>
-            <a:off x="8257031" y="1606117"/>
-            <a:ext cx="219456" cy="0"/>
-          </a:xfrm>
-          <a:prstGeom prst="line">
-            <a:avLst/>
-          </a:prstGeom>
-          <a:noFill/>
-          <a:ln w="15240">
-            <a:solidFill>
-              <a:srgbClr val="2F704F"/>
-            </a:solidFill>
-            <a:prstDash val="solid"/>
-            <a:tailEnd type="triangle"/>
-          </a:ln>
-        </p:spPr>
-        <p:txBody>
-          <a:bodyPr/>
-          <a:lstStyle/>
-          <a:p>
-            <a:endParaRPr lang="en-GB"/>
-          </a:p>
-        </p:txBody>
-      </p:sp>
-      <p:sp>
-        <p:nvSpPr>
-          <p:cNvPr id="18" name="Text 12">
-            <a:extLst>
-              <a:ext uri="{FF2B5EF4-FFF2-40B4-BE49-F238E27FC236}">
-                <a16:creationId xmlns:a16="http://schemas.microsoft.com/office/drawing/2014/main" id="{00204C3C-8274-4048-BC37-67A686BB85DF}"/>
-              </a:ext>
-            </a:extLst>
-          </p:cNvPr>
-          <p:cNvSpPr/>
-          <p:nvPr/>
-        </p:nvSpPr>
-        <p:spPr>
-          <a:xfrm>
-            <a:off x="8549639" y="1286077"/>
-            <a:ext cx="1325880" cy="640080"/>
-          </a:xfrm>
-          <a:prstGeom prst="rect">
-            <a:avLst/>
-          </a:prstGeom>
-          <a:solidFill>
-            <a:srgbClr val="FF0000"/>
-          </a:solidFill>
-          <a:ln w="12700">
-            <a:solidFill>
-              <a:srgbClr val="2F704F"/>
-            </a:solidFill>
-          </a:ln>
-        </p:spPr>
-        <p:txBody>
-          <a:bodyPr wrap="square" lIns="762" tIns="762" rIns="762" bIns="762" rtlCol="0" anchor="ctr">
-            <a:normAutofit/>
-          </a:bodyPr>
-          <a:lstStyle/>
-          <a:p>
-            <a:pPr algn="ctr"/>
-            <a:r>
-              <a:rPr lang="en-US" sz="1200" dirty="0">
-                <a:solidFill>
-                  <a:schemeClr val="bg1"/>
-                </a:solidFill>
-                <a:latin typeface="Gill Sans" pitchFamily="34" charset="0"/>
-                <a:ea typeface="Gill Sans" pitchFamily="34" charset="-122"/>
-                <a:cs typeface="Gill Sans" pitchFamily="34" charset="-120"/>
-              </a:rPr>
-              <a:t>Post-peak quality control</a:t>
-            </a:r>
-            <a:endParaRPr lang="en-US" sz="1200" dirty="0">
-              <a:solidFill>
-                <a:schemeClr val="bg1"/>
-              </a:solidFill>
-            </a:endParaRPr>
-          </a:p>
-        </p:txBody>
-      </p:sp>
-      <p:pic>
-        <p:nvPicPr>
-          <p:cNvPr id="21" name="Picture 20">
-            <a:extLst>
-              <a:ext uri="{FF2B5EF4-FFF2-40B4-BE49-F238E27FC236}">
-                <a16:creationId xmlns:a16="http://schemas.microsoft.com/office/drawing/2014/main" id="{DBB19BF3-329B-2D7B-7F4F-2C028828B356}"/>
-              </a:ext>
-            </a:extLst>
-          </p:cNvPr>
-          <p:cNvPicPr>
-            <a:picLocks noChangeAspect="1"/>
-          </p:cNvPicPr>
-          <p:nvPr/>
-        </p:nvPicPr>
-        <p:blipFill>
-          <a:blip r:embed="rId2"/>
-          <a:stretch>
-            <a:fillRect/>
-          </a:stretch>
-        </p:blipFill>
-        <p:spPr>
-          <a:xfrm>
-            <a:off x="406761" y="2359577"/>
-            <a:ext cx="10947039" cy="3212346"/>
-          </a:xfrm>
-          <a:prstGeom prst="rect">
-            <a:avLst/>
-          </a:prstGeom>
-          <a:ln w="28575">
+          <a:ln>
             <a:solidFill>
               <a:schemeClr val="tx1"/>
             </a:solidFill>
           </a:ln>
         </p:spPr>
-      </p:pic>
+        <p:txBody>
+          <a:bodyPr wrap="square">
+            <a:spAutoFit/>
+          </a:bodyPr>
+          <a:lstStyle/>
+          <a:p>
+            <a:pPr>
+              <a:buNone/>
+            </a:pPr>
+            <a:r>
+              <a:rPr lang="en-IT" b="1" i="1" dirty="0">
+                <a:solidFill>
+                  <a:srgbClr val="00B050"/>
+                </a:solidFill>
+              </a:rPr>
+              <a:t>Bowtie2 / flagstat</a:t>
+            </a:r>
+            <a:br>
+              <a:rPr lang="en-IT" dirty="0"/>
+            </a:br>
+            <a:r>
+              <a:rPr lang="en-IT" dirty="0"/>
+              <a:t>→ mapping success</a:t>
+            </a:r>
+          </a:p>
+          <a:p>
+            <a:pPr>
+              <a:buNone/>
+            </a:pPr>
+            <a:r>
+              <a:rPr lang="en-IT" b="1" dirty="0"/>
+              <a:t>Multimapping + MAPQ</a:t>
+            </a:r>
+            <a:br>
+              <a:rPr lang="en-IT" dirty="0"/>
+            </a:br>
+            <a:r>
+              <a:rPr lang="en-IT" dirty="0"/>
+              <a:t>→ confidence of genomic placement</a:t>
+            </a:r>
+          </a:p>
+          <a:p>
+            <a:pPr>
+              <a:buNone/>
+            </a:pPr>
+            <a:r>
+              <a:rPr lang="en-IT" b="1" dirty="0"/>
+              <a:t>Duplicate rate</a:t>
+            </a:r>
+            <a:br>
+              <a:rPr lang="en-IT" dirty="0"/>
+            </a:br>
+            <a:r>
+              <a:rPr lang="en-IT" dirty="0"/>
+              <a:t>→ possible library-complexity / amplification problems</a:t>
+            </a:r>
+          </a:p>
+          <a:p>
+            <a:pPr>
+              <a:buNone/>
+            </a:pPr>
+            <a:r>
+              <a:rPr lang="en-IT" b="1" dirty="0"/>
+              <a:t>Proper pairs + fragment size</a:t>
+            </a:r>
+            <a:br>
+              <a:rPr lang="en-IT" dirty="0"/>
+            </a:br>
+            <a:r>
+              <a:rPr lang="en-IT" dirty="0"/>
+              <a:t>→ plausible paired-end library geometry</a:t>
+            </a:r>
+          </a:p>
+          <a:p>
+            <a:pPr>
+              <a:buNone/>
+            </a:pPr>
+            <a:r>
+              <a:rPr lang="en-IT" b="1" dirty="0"/>
+              <a:t>Strand cross-correlation</a:t>
+            </a:r>
+            <a:br>
+              <a:rPr lang="en-IT" dirty="0"/>
+            </a:br>
+            <a:r>
+              <a:rPr lang="en-IT" dirty="0"/>
+              <a:t>→ ChIP-like enrichment structure</a:t>
+            </a:r>
+          </a:p>
+          <a:p>
+            <a:pPr>
+              <a:buNone/>
+            </a:pPr>
+            <a:r>
+              <a:rPr lang="en-IT" b="1" dirty="0"/>
+              <a:t>BigWig</a:t>
+            </a:r>
+            <a:br>
+              <a:rPr lang="en-IT" dirty="0"/>
+            </a:br>
+            <a:r>
+              <a:rPr lang="en-IT" dirty="0"/>
+              <a:t>→ visible genomic enrichment</a:t>
+            </a:r>
+          </a:p>
+          <a:p>
+            <a:pPr>
+              <a:buNone/>
+            </a:pPr>
+            <a:endParaRPr lang="en-IT" dirty="0"/>
+          </a:p>
+          <a:p>
+            <a:pPr>
+              <a:buNone/>
+            </a:pPr>
+            <a:r>
+              <a:rPr lang="en-IT" b="1" i="1" dirty="0">
+                <a:solidFill>
+                  <a:srgbClr val="00B050"/>
+                </a:solidFill>
+              </a:rPr>
+              <a:t>After peak calling</a:t>
+            </a:r>
+          </a:p>
+          <a:p>
+            <a:pPr>
+              <a:buNone/>
+            </a:pPr>
+            <a:r>
+              <a:rPr lang="en-IT" b="1" dirty="0"/>
+              <a:t>FRiP</a:t>
+            </a:r>
+            <a:br>
+              <a:rPr lang="en-IT" dirty="0"/>
+            </a:br>
+            <a:r>
+              <a:rPr lang="en-IT" dirty="0"/>
+              <a:t>→ is ChIP signal concentrated in peaks?</a:t>
+            </a:r>
+          </a:p>
+          <a:p>
+            <a:pPr>
+              <a:buNone/>
+            </a:pPr>
+            <a:r>
+              <a:rPr lang="en-IT" b="1" dirty="0"/>
+              <a:t>Replicate correlation</a:t>
+            </a:r>
+            <a:br>
+              <a:rPr lang="en-IT" dirty="0"/>
+            </a:br>
+            <a:r>
+              <a:rPr lang="en-IT" dirty="0"/>
+              <a:t>→ do genome-wide signal profiles agree?</a:t>
+            </a:r>
+          </a:p>
+          <a:p>
+            <a:pPr>
+              <a:buNone/>
+            </a:pPr>
+            <a:r>
+              <a:rPr lang="en-IT" b="1" dirty="0"/>
+              <a:t>IDR</a:t>
+            </a:r>
+            <a:br>
+              <a:rPr lang="en-IT" dirty="0"/>
+            </a:br>
+            <a:r>
+              <a:rPr lang="en-IT" dirty="0"/>
+              <a:t>→ are peak calls reproducible?</a:t>
+            </a:r>
+          </a:p>
+        </p:txBody>
+      </p:sp>
     </p:spTree>
     <p:extLst>
       <p:ext uri="{BB962C8B-B14F-4D97-AF65-F5344CB8AC3E}">
-        <p14:creationId xmlns:p14="http://schemas.microsoft.com/office/powerpoint/2010/main" val="248477289"/>
+        <p14:creationId xmlns:p14="http://schemas.microsoft.com/office/powerpoint/2010/main" val="1117795047"/>
       </p:ext>
     </p:extLst>
   </p:cSld>
   <p:clrMapOvr>
     <a:masterClrMapping/>
   </p:clrMapOvr>
+  <p:timing>
+    <p:tnLst>
+      <p:par>
+        <p:cTn id="1" dur="indefinite" restart="never" nodeType="tmRoot">
+          <p:childTnLst>
+            <p:seq concurrent="1" nextAc="seek">
+              <p:cTn id="2" dur="indefinite" nodeType="mainSeq">
+                <p:childTnLst>
+                  <p:par>
+                    <p:cTn id="3" fill="hold">
+                      <p:stCondLst>
+                        <p:cond delay="indefinite"/>
+                      </p:stCondLst>
+                      <p:childTnLst>
+                        <p:par>
+                          <p:cTn id="4" fill="hold">
+                            <p:stCondLst>
+                              <p:cond delay="0"/>
+                            </p:stCondLst>
+                            <p:childTnLst>
+                              <p:par>
+                                <p:cTn id="5" presetID="1" presetClass="entr" presetSubtype="0" fill="hold" grpId="0" nodeType="clickEffect">
+                                  <p:stCondLst>
+                                    <p:cond delay="0"/>
+                                  </p:stCondLst>
+                                  <p:childTnLst>
+                                    <p:set>
+                                      <p:cBhvr>
+                                        <p:cTn id="6" dur="1" fill="hold">
+                                          <p:stCondLst>
+                                            <p:cond delay="0"/>
+                                          </p:stCondLst>
+                                        </p:cTn>
+                                        <p:tgtEl>
+                                          <p:spTgt spid="10"/>
+                                        </p:tgtEl>
+                                        <p:attrNameLst>
+                                          <p:attrName>style.visibility</p:attrName>
+                                        </p:attrNameLst>
+                                      </p:cBhvr>
+                                      <p:to>
+                                        <p:strVal val="visible"/>
+                                      </p:to>
+                                    </p:set>
+                                  </p:childTnLst>
+                                </p:cTn>
+                              </p:par>
+                            </p:childTnLst>
+                          </p:cTn>
+                        </p:par>
+                      </p:childTnLst>
+                    </p:cTn>
+                  </p:par>
+                </p:childTnLst>
+              </p:cTn>
+              <p:prevCondLst>
+                <p:cond evt="onPrev" delay="0">
+                  <p:tgtEl>
+                    <p:sldTgt/>
+                  </p:tgtEl>
+                </p:cond>
+              </p:prevCondLst>
+              <p:nextCondLst>
+                <p:cond evt="onNext" delay="0">
+                  <p:tgtEl>
+                    <p:sldTgt/>
+                  </p:tgtEl>
+                </p:cond>
+              </p:nextCondLst>
+            </p:seq>
+          </p:childTnLst>
+        </p:cTn>
+      </p:par>
+    </p:tnLst>
+    <p:bldLst>
+      <p:bldP spid="10" grpId="0" animBg="1"/>
+    </p:bldLst>
+  </p:timing>
 </p:sld>
 </file>
 
